--- a/CSCI250-Fall2026/content/Week08_LLM-Concepts/slides.pptx
+++ b/CSCI250-Fall2026/content/Week08_LLM-Concepts/slides.pptx
@@ -21,11 +21,6 @@
     <p:sldId id="269" r:id="rId20"/>
     <p:sldId id="270" r:id="rId21"/>
     <p:sldId id="271" r:id="rId22"/>
-    <p:sldId id="272" r:id="rId23"/>
-    <p:sldId id="273" r:id="rId24"/>
-    <p:sldId id="274" r:id="rId25"/>
-    <p:sldId id="275" r:id="rId26"/>
-    <p:sldId id="276" r:id="rId27"/>
   </p:sldIdLst>
   <p:sldSz cx="12191695" cy="6858000" type="screen4x3"/>
   <p:notesSz cx="6858000" cy="9144000"/>
@@ -3374,96 +3369,21 @@
                 </a:solidFill>
                 <a:latin typeface="Calibri"/>
               </a:rPr>
-              <a:t>In-Context Learning (Few-Shot)</a:t>
-            </a:r>
-          </a:p>
-        </p:txBody>
-      </p:sp>
-      <p:sp>
-        <p:nvSpPr>
-          <p:cNvPr id="5" name="Rectangle 4"/>
-          <p:cNvSpPr/>
-          <p:nvPr/>
-        </p:nvSpPr>
-        <p:spPr>
-          <a:xfrm>
-            <a:off x="548640" y="1325880"/>
-            <a:ext cx="11064240" cy="4480560"/>
-          </a:xfrm>
-          <a:prstGeom prst="rect">
-            <a:avLst/>
-          </a:prstGeom>
-          <a:solidFill>
-            <a:srgbClr val="1E1E1E"/>
-          </a:solidFill>
-          <a:ln>
-            <a:noFill/>
-          </a:ln>
-          <a:effectLst/>
-        </p:spPr>
-        <p:style>
-          <a:lnRef idx="1">
-            <a:schemeClr val="accent1"/>
-          </a:lnRef>
-          <a:fillRef idx="3">
-            <a:schemeClr val="accent1"/>
-          </a:fillRef>
-          <a:effectRef idx="2">
-            <a:schemeClr val="accent1"/>
-          </a:effectRef>
-          <a:fontRef idx="minor">
-            <a:schemeClr val="lt1"/>
-          </a:fontRef>
-        </p:style>
-        <p:txBody>
-          <a:bodyPr rtlCol="0" anchor="ctr" wrap="square" lIns="182880" tIns="137160"/>
-          <a:lstStyle/>
-          <a:p>
-            <a:pPr algn="ctr"/>
-            <a:r>
-              <a:rPr sz="1500">
-                <a:solidFill>
-                  <a:srgbClr val="E6E6E6"/>
-                </a:solidFill>
-                <a:latin typeface="Consolas"/>
-              </a:rPr>
-              <a:t>Review: "Loved every minute." -&gt; positive</a:t>
-            </a:r>
-          </a:p>
-          <a:p>
-            <a:r>
-              <a:rPr sz="1500">
-                <a:solidFill>
-                  <a:srgbClr val="E6E6E6"/>
-                </a:solidFill>
-                <a:latin typeface="Consolas"/>
-              </a:rPr>
-              <a:t>Review: "A complete waste of time." -&gt; negative</a:t>
-            </a:r>
-          </a:p>
-          <a:p>
-            <a:r>
-              <a:rPr sz="1500">
-                <a:solidFill>
-                  <a:srgbClr val="E6E6E6"/>
-                </a:solidFill>
-                <a:latin typeface="Consolas"/>
-              </a:rPr>
-              <a:t>Review: "The acting saved a dull script." -&gt;</a:t>
-            </a:r>
-          </a:p>
-        </p:txBody>
-      </p:sp>
-      <p:sp>
-        <p:nvSpPr>
-          <p:cNvPr id="6" name="TextBox 5"/>
+              <a:t>Under the Hood: Byte-Pair Encoding, From Scratch</a:t>
+            </a:r>
+          </a:p>
+        </p:txBody>
+      </p:sp>
+      <p:sp>
+        <p:nvSpPr>
+          <p:cNvPr id="5" name="TextBox 4"/>
           <p:cNvSpPr txBox="1"/>
           <p:nvPr/>
         </p:nvSpPr>
         <p:spPr>
           <a:xfrm>
-            <a:off x="548640" y="5897880"/>
-            <a:ext cx="10515600" cy="457200"/>
+            <a:off x="731520" y="1371600"/>
+            <a:ext cx="10698480" cy="4754880"/>
           </a:xfrm>
           <a:prstGeom prst="rect">
             <a:avLst/>
@@ -3476,22 +3396,106 @@
           </a:bodyPr>
           <a:lstStyle/>
           <a:p>
-            <a:pPr algn="l"/>
-            <a:r>
-              <a:rPr sz="1400" b="0">
+            <a:pPr>
+              <a:spcAft>
+                <a:spcPts val="800"/>
+              </a:spcAft>
+            </a:pPr>
+            <a:r>
+              <a:rPr sz="2000">
+                <a:solidFill>
+                  <a:srgbClr val="1A1A1A"/>
+                </a:solidFill>
+                <a:latin typeface="Calibri"/>
+              </a:rPr>
+              <a:t>• Start from raw bytes (vocab of 256)</a:t>
+            </a:r>
+          </a:p>
+          <a:p>
+            <a:pPr>
+              <a:spcAft>
+                <a:spcPts val="800"/>
+              </a:spcAft>
+            </a:pPr>
+            <a:r>
+              <a:rPr sz="2000">
+                <a:solidFill>
+                  <a:srgbClr val="1A1A1A"/>
+                </a:solidFill>
+                <a:latin typeface="Calibri"/>
+              </a:rPr>
+              <a:t>• Count every adjacent pair of tokens</a:t>
+            </a:r>
+          </a:p>
+          <a:p>
+            <a:pPr>
+              <a:spcAft>
+                <a:spcPts val="800"/>
+              </a:spcAft>
+            </a:pPr>
+            <a:r>
+              <a:rPr sz="2000">
+                <a:solidFill>
+                  <a:srgbClr val="1A1A1A"/>
+                </a:solidFill>
+                <a:latin typeface="Calibri"/>
+              </a:rPr>
+              <a:t>• Merge the most frequent pair into a new token; repeat</a:t>
+            </a:r>
+          </a:p>
+          <a:p>
+            <a:pPr lvl="1">
+              <a:spcAft>
+                <a:spcPts val="800"/>
+              </a:spcAft>
+            </a:pPr>
+            <a:r>
+              <a:rPr sz="1800">
                 <a:solidFill>
                   <a:srgbClr val="6B7280"/>
                 </a:solidFill>
                 <a:latin typeface="Calibri"/>
               </a:rPr>
-              <a:t>Examples in the prompt teach the task + output format — no retraining. Foundation for Week 9.</a:t>
-            </a:r>
-          </a:p>
-        </p:txBody>
-      </p:sp>
-      <p:sp>
-        <p:nvSpPr>
-          <p:cNvPr id="7" name="TextBox 6"/>
+              <a:t>– encode = replay merges; decode = bytes back → exact round-trip</a:t>
+            </a:r>
+          </a:p>
+          <a:p>
+            <a:pPr lvl="1">
+              <a:spcAft>
+                <a:spcPts val="800"/>
+              </a:spcAft>
+            </a:pPr>
+            <a:r>
+              <a:rPr sz="1800">
+                <a:solidFill>
+                  <a:srgbClr val="6B7280"/>
+                </a:solidFill>
+                <a:latin typeface="Calibri"/>
+              </a:rPr>
+              <a:t>– Tradeoff: bigger vocab = shorter sequences (fewer tokens to pay for)</a:t>
+            </a:r>
+          </a:p>
+          <a:p>
+            <a:pPr lvl="1">
+              <a:spcAft>
+                <a:spcPts val="800"/>
+              </a:spcAft>
+            </a:pPr>
+            <a:r>
+              <a:rPr sz="1800">
+                <a:solidFill>
+                  <a:srgbClr val="6B7280"/>
+                </a:solidFill>
+                <a:latin typeface="Calibri"/>
+              </a:rPr>
+              <a:t>– Why an LLM can't count the r's in 'strawberry': it's one token</a:t>
+            </a:r>
+          </a:p>
+        </p:txBody>
+      </p:sp>
+      <p:sp>
+        <p:nvSpPr>
+          <p:cNvPr id="6" name="TextBox 5"/>
           <p:cNvSpPr txBox="1"/>
           <p:nvPr/>
         </p:nvSpPr>
@@ -3526,7 +3530,7 @@
       </p:sp>
       <p:sp>
         <p:nvSpPr>
-          <p:cNvPr id="8" name="TextBox 7"/>
+          <p:cNvPr id="7" name="TextBox 6"/>
           <p:cNvSpPr txBox="1"/>
           <p:nvPr/>
         </p:nvSpPr>
@@ -3554,7 +3558,7 @@
                 </a:solidFill>
                 <a:latin typeface="Calibri"/>
               </a:rPr>
-              <a:t>10/21</a:t>
+              <a:t>10/16</a:t>
             </a:r>
           </a:p>
         </p:txBody>
@@ -3568,6 +3572,423 @@
 </file>
 
 <file path=ppt/slides/slide11.xml><?xml version="1.0" encoding="utf-8"?>
+<p:sld xmlns:a="http://schemas.openxmlformats.org/drawingml/2006/main" xmlns:p="http://schemas.openxmlformats.org/presentationml/2006/main" xmlns:r="http://schemas.openxmlformats.org/officeDocument/2006/relationships">
+  <p:cSld>
+    <p:bg>
+      <p:bgPr>
+        <a:solidFill>
+          <a:srgbClr val="FFFFFF"/>
+        </a:solidFill>
+        <a:effectLst/>
+      </p:bgPr>
+    </p:bg>
+    <p:spTree>
+      <p:nvGrpSpPr>
+        <p:cNvPr id="1" name=""/>
+        <p:cNvGrpSpPr/>
+        <p:nvPr/>
+      </p:nvGrpSpPr>
+      <p:grpSpPr/>
+      <p:sp>
+        <p:nvSpPr>
+          <p:cNvPr id="2" name="Rectangle 1"/>
+          <p:cNvSpPr/>
+          <p:nvPr/>
+        </p:nvSpPr>
+        <p:spPr>
+          <a:xfrm>
+            <a:off x="0" y="0"/>
+            <a:ext cx="12191695" cy="1051560"/>
+          </a:xfrm>
+          <a:prstGeom prst="rect">
+            <a:avLst/>
+          </a:prstGeom>
+          <a:solidFill>
+            <a:srgbClr val="0B1F3A"/>
+          </a:solidFill>
+          <a:ln>
+            <a:noFill/>
+          </a:ln>
+          <a:effectLst/>
+        </p:spPr>
+        <p:style>
+          <a:lnRef idx="1">
+            <a:schemeClr val="accent1"/>
+          </a:lnRef>
+          <a:fillRef idx="3">
+            <a:schemeClr val="accent1"/>
+          </a:fillRef>
+          <a:effectRef idx="2">
+            <a:schemeClr val="accent1"/>
+          </a:effectRef>
+          <a:fontRef idx="minor">
+            <a:schemeClr val="lt1"/>
+          </a:fontRef>
+        </p:style>
+        <p:txBody>
+          <a:bodyPr rtlCol="0" anchor="ctr"/>
+          <a:lstStyle/>
+          <a:p>
+            <a:pPr algn="ctr"/>
+          </a:p>
+        </p:txBody>
+      </p:sp>
+      <p:sp>
+        <p:nvSpPr>
+          <p:cNvPr id="3" name="Rectangle 2"/>
+          <p:cNvSpPr/>
+          <p:nvPr/>
+        </p:nvSpPr>
+        <p:spPr>
+          <a:xfrm>
+            <a:off x="0" y="1051560"/>
+            <a:ext cx="12191695" cy="54864"/>
+          </a:xfrm>
+          <a:prstGeom prst="rect">
+            <a:avLst/>
+          </a:prstGeom>
+          <a:solidFill>
+            <a:srgbClr val="128C8C"/>
+          </a:solidFill>
+          <a:ln>
+            <a:noFill/>
+          </a:ln>
+          <a:effectLst/>
+        </p:spPr>
+        <p:style>
+          <a:lnRef idx="1">
+            <a:schemeClr val="accent1"/>
+          </a:lnRef>
+          <a:fillRef idx="3">
+            <a:schemeClr val="accent1"/>
+          </a:fillRef>
+          <a:effectRef idx="2">
+            <a:schemeClr val="accent1"/>
+          </a:effectRef>
+          <a:fontRef idx="minor">
+            <a:schemeClr val="lt1"/>
+          </a:fontRef>
+        </p:style>
+        <p:txBody>
+          <a:bodyPr rtlCol="0" anchor="ctr"/>
+          <a:lstStyle/>
+          <a:p>
+            <a:pPr algn="ctr"/>
+          </a:p>
+        </p:txBody>
+      </p:sp>
+      <p:sp>
+        <p:nvSpPr>
+          <p:cNvPr id="4" name="TextBox 3"/>
+          <p:cNvSpPr txBox="1"/>
+          <p:nvPr/>
+        </p:nvSpPr>
+        <p:spPr>
+          <a:xfrm>
+            <a:off x="548640" y="201168"/>
+            <a:ext cx="11064240" cy="731520"/>
+          </a:xfrm>
+          <a:prstGeom prst="rect">
+            <a:avLst/>
+          </a:prstGeom>
+          <a:noFill/>
+        </p:spPr>
+        <p:txBody>
+          <a:bodyPr wrap="square" anchor="ctr">
+            <a:spAutoFit/>
+          </a:bodyPr>
+          <a:lstStyle/>
+          <a:p>
+            <a:pPr algn="l"/>
+            <a:r>
+              <a:rPr sz="2800" b="1">
+                <a:solidFill>
+                  <a:srgbClr val="FFFFFF"/>
+                </a:solidFill>
+                <a:latin typeface="Calibri"/>
+              </a:rPr>
+              <a:t>The Core of BPE: merge a pair</a:t>
+            </a:r>
+          </a:p>
+        </p:txBody>
+      </p:sp>
+      <p:sp>
+        <p:nvSpPr>
+          <p:cNvPr id="5" name="Rectangle 4"/>
+          <p:cNvSpPr/>
+          <p:nvPr/>
+        </p:nvSpPr>
+        <p:spPr>
+          <a:xfrm>
+            <a:off x="548640" y="1325880"/>
+            <a:ext cx="11064240" cy="4480560"/>
+          </a:xfrm>
+          <a:prstGeom prst="rect">
+            <a:avLst/>
+          </a:prstGeom>
+          <a:solidFill>
+            <a:srgbClr val="1E1E1E"/>
+          </a:solidFill>
+          <a:ln>
+            <a:noFill/>
+          </a:ln>
+          <a:effectLst/>
+        </p:spPr>
+        <p:style>
+          <a:lnRef idx="1">
+            <a:schemeClr val="accent1"/>
+          </a:lnRef>
+          <a:fillRef idx="3">
+            <a:schemeClr val="accent1"/>
+          </a:fillRef>
+          <a:effectRef idx="2">
+            <a:schemeClr val="accent1"/>
+          </a:effectRef>
+          <a:fontRef idx="minor">
+            <a:schemeClr val="lt1"/>
+          </a:fontRef>
+        </p:style>
+        <p:txBody>
+          <a:bodyPr rtlCol="0" anchor="ctr" wrap="square" lIns="182880" tIns="137160"/>
+          <a:lstStyle/>
+          <a:p>
+            <a:pPr algn="ctr"/>
+            <a:r>
+              <a:rPr sz="1500">
+                <a:solidFill>
+                  <a:srgbClr val="E6E6E6"/>
+                </a:solidFill>
+                <a:latin typeface="Consolas"/>
+              </a:rPr>
+              <a:t>def merge(ids, pair, new_id):     # replace every (a,b)</a:t>
+            </a:r>
+          </a:p>
+          <a:p>
+            <a:r>
+              <a:rPr sz="1500">
+                <a:solidFill>
+                  <a:srgbClr val="E6E6E6"/>
+                </a:solidFill>
+                <a:latin typeface="Consolas"/>
+              </a:rPr>
+              <a:t>    a, b = pair; out = []; i = 0</a:t>
+            </a:r>
+          </a:p>
+          <a:p>
+            <a:r>
+              <a:rPr sz="1500">
+                <a:solidFill>
+                  <a:srgbClr val="E6E6E6"/>
+                </a:solidFill>
+                <a:latin typeface="Consolas"/>
+              </a:rPr>
+              <a:t>    while i &lt; len(ids):</a:t>
+            </a:r>
+          </a:p>
+          <a:p>
+            <a:r>
+              <a:rPr sz="1500">
+                <a:solidFill>
+                  <a:srgbClr val="E6E6E6"/>
+                </a:solidFill>
+                <a:latin typeface="Consolas"/>
+              </a:rPr>
+              <a:t>        if i &lt; len(ids)-1 and ids[i]==a and ids[i+1]==b:</a:t>
+            </a:r>
+          </a:p>
+          <a:p>
+            <a:r>
+              <a:rPr sz="1500">
+                <a:solidFill>
+                  <a:srgbClr val="E6E6E6"/>
+                </a:solidFill>
+                <a:latin typeface="Consolas"/>
+              </a:rPr>
+              <a:t>            out.append(new_id); i += 2</a:t>
+            </a:r>
+          </a:p>
+          <a:p>
+            <a:r>
+              <a:rPr sz="1500">
+                <a:solidFill>
+                  <a:srgbClr val="E6E6E6"/>
+                </a:solidFill>
+                <a:latin typeface="Consolas"/>
+              </a:rPr>
+              <a:t>        else:</a:t>
+            </a:r>
+          </a:p>
+          <a:p>
+            <a:r>
+              <a:rPr sz="1500">
+                <a:solidFill>
+                  <a:srgbClr val="E6E6E6"/>
+                </a:solidFill>
+                <a:latin typeface="Consolas"/>
+              </a:rPr>
+              <a:t>            out.append(ids[i]); i += 1</a:t>
+            </a:r>
+          </a:p>
+          <a:p>
+            <a:r>
+              <a:rPr sz="1500">
+                <a:solidFill>
+                  <a:srgbClr val="E6E6E6"/>
+                </a:solidFill>
+                <a:latin typeface="Consolas"/>
+              </a:rPr>
+              <a:t>    return out</a:t>
+            </a:r>
+          </a:p>
+          <a:p>
+            <a:r>
+              <a:rPr sz="1500">
+                <a:solidFill>
+                  <a:srgbClr val="E6E6E6"/>
+                </a:solidFill>
+                <a:latin typeface="Consolas"/>
+              </a:rPr>
+              <a:t> </a:t>
+            </a:r>
+          </a:p>
+          <a:p>
+            <a:r>
+              <a:rPr sz="1500">
+                <a:solidFill>
+                  <a:srgbClr val="E6E6E6"/>
+                </a:solidFill>
+                <a:latin typeface="Consolas"/>
+              </a:rPr>
+              <a:t># loop: count pairs -&gt; merge most frequent -&gt; repeat</a:t>
+            </a:r>
+          </a:p>
+          <a:p>
+            <a:r>
+              <a:rPr sz="1500">
+                <a:solidFill>
+                  <a:srgbClr val="E6E6E6"/>
+                </a:solidFill>
+                <a:latin typeface="Consolas"/>
+              </a:rPr>
+              <a:t># then encode/decode round-trips your own text exactly</a:t>
+            </a:r>
+          </a:p>
+        </p:txBody>
+      </p:sp>
+      <p:sp>
+        <p:nvSpPr>
+          <p:cNvPr id="6" name="TextBox 5"/>
+          <p:cNvSpPr txBox="1"/>
+          <p:nvPr/>
+        </p:nvSpPr>
+        <p:spPr>
+          <a:xfrm>
+            <a:off x="548640" y="5897880"/>
+            <a:ext cx="10515600" cy="457200"/>
+          </a:xfrm>
+          <a:prstGeom prst="rect">
+            <a:avLst/>
+          </a:prstGeom>
+          <a:noFill/>
+        </p:spPr>
+        <p:txBody>
+          <a:bodyPr wrap="square">
+            <a:spAutoFit/>
+          </a:bodyPr>
+          <a:lstStyle/>
+          <a:p>
+            <a:pPr algn="l"/>
+            <a:r>
+              <a:rPr sz="1400" b="0">
+                <a:solidFill>
+                  <a:srgbClr val="6B7280"/>
+                </a:solidFill>
+                <a:latin typeface="Calibri"/>
+              </a:rPr>
+              <a:t>code/03_build_bpe_tokenizer.ipynb — Karpathy minbpe / CS336 style, pure Python.</a:t>
+            </a:r>
+          </a:p>
+        </p:txBody>
+      </p:sp>
+      <p:sp>
+        <p:nvSpPr>
+          <p:cNvPr id="7" name="TextBox 6"/>
+          <p:cNvSpPr txBox="1"/>
+          <p:nvPr/>
+        </p:nvSpPr>
+        <p:spPr>
+          <a:xfrm>
+            <a:off x="365760" y="6446520"/>
+            <a:ext cx="8229600" cy="365760"/>
+          </a:xfrm>
+          <a:prstGeom prst="rect">
+            <a:avLst/>
+          </a:prstGeom>
+          <a:noFill/>
+        </p:spPr>
+        <p:txBody>
+          <a:bodyPr wrap="square">
+            <a:spAutoFit/>
+          </a:bodyPr>
+          <a:lstStyle/>
+          <a:p>
+            <a:pPr algn="l"/>
+            <a:r>
+              <a:rPr sz="1000" b="0">
+                <a:solidFill>
+                  <a:srgbClr val="6B7280"/>
+                </a:solidFill>
+                <a:latin typeface="Calibri"/>
+              </a:rPr>
+              <a:t>Palomar College · CSCI 250 · Fall 2026</a:t>
+            </a:r>
+          </a:p>
+        </p:txBody>
+      </p:sp>
+      <p:sp>
+        <p:nvSpPr>
+          <p:cNvPr id="8" name="TextBox 7"/>
+          <p:cNvSpPr txBox="1"/>
+          <p:nvPr/>
+        </p:nvSpPr>
+        <p:spPr>
+          <a:xfrm>
+            <a:off x="11155680" y="6446520"/>
+            <a:ext cx="822960" cy="365760"/>
+          </a:xfrm>
+          <a:prstGeom prst="rect">
+            <a:avLst/>
+          </a:prstGeom>
+          <a:noFill/>
+        </p:spPr>
+        <p:txBody>
+          <a:bodyPr wrap="square">
+            <a:spAutoFit/>
+          </a:bodyPr>
+          <a:lstStyle/>
+          <a:p>
+            <a:pPr algn="r"/>
+            <a:r>
+              <a:rPr sz="1000" b="0">
+                <a:solidFill>
+                  <a:srgbClr val="6B7280"/>
+                </a:solidFill>
+                <a:latin typeface="Calibri"/>
+              </a:rPr>
+              <a:t>11/16</a:t>
+            </a:r>
+          </a:p>
+        </p:txBody>
+      </p:sp>
+    </p:spTree>
+  </p:cSld>
+  <p:clrMapOvr>
+    <a:masterClrMapping/>
+  </p:clrMapOvr>
+</p:sld>
+</file>
+
+<file path=ppt/slides/slide12.xml><?xml version="1.0" encoding="utf-8"?>
 <p:sld xmlns:a="http://schemas.openxmlformats.org/drawingml/2006/main" xmlns:p="http://schemas.openxmlformats.org/presentationml/2006/main" xmlns:r="http://schemas.openxmlformats.org/officeDocument/2006/relationships">
   <p:cSld>
     <p:bg>
@@ -3615,470 +4036,7 @@
                 </a:solidFill>
                 <a:latin typeface="Calibri"/>
               </a:rPr>
-              <a:t>Capabilities &amp; Failure Modes</a:t>
-            </a:r>
-          </a:p>
-        </p:txBody>
-      </p:sp>
-    </p:spTree>
-  </p:cSld>
-  <p:clrMapOvr>
-    <a:masterClrMapping/>
-  </p:clrMapOvr>
-</p:sld>
-</file>
-
-<file path=ppt/slides/slide12.xml><?xml version="1.0" encoding="utf-8"?>
-<p:sld xmlns:a="http://schemas.openxmlformats.org/drawingml/2006/main" xmlns:p="http://schemas.openxmlformats.org/presentationml/2006/main" xmlns:r="http://schemas.openxmlformats.org/officeDocument/2006/relationships">
-  <p:cSld>
-    <p:bg>
-      <p:bgPr>
-        <a:solidFill>
-          <a:srgbClr val="FFFFFF"/>
-        </a:solidFill>
-        <a:effectLst/>
-      </p:bgPr>
-    </p:bg>
-    <p:spTree>
-      <p:nvGrpSpPr>
-        <p:cNvPr id="1" name=""/>
-        <p:cNvGrpSpPr/>
-        <p:nvPr/>
-      </p:nvGrpSpPr>
-      <p:grpSpPr/>
-      <p:sp>
-        <p:nvSpPr>
-          <p:cNvPr id="2" name="Rectangle 1"/>
-          <p:cNvSpPr/>
-          <p:nvPr/>
-        </p:nvSpPr>
-        <p:spPr>
-          <a:xfrm>
-            <a:off x="0" y="0"/>
-            <a:ext cx="12191695" cy="1051560"/>
-          </a:xfrm>
-          <a:prstGeom prst="rect">
-            <a:avLst/>
-          </a:prstGeom>
-          <a:solidFill>
-            <a:srgbClr val="0B1F3A"/>
-          </a:solidFill>
-          <a:ln>
-            <a:noFill/>
-          </a:ln>
-          <a:effectLst/>
-        </p:spPr>
-        <p:style>
-          <a:lnRef idx="1">
-            <a:schemeClr val="accent1"/>
-          </a:lnRef>
-          <a:fillRef idx="3">
-            <a:schemeClr val="accent1"/>
-          </a:fillRef>
-          <a:effectRef idx="2">
-            <a:schemeClr val="accent1"/>
-          </a:effectRef>
-          <a:fontRef idx="minor">
-            <a:schemeClr val="lt1"/>
-          </a:fontRef>
-        </p:style>
-        <p:txBody>
-          <a:bodyPr rtlCol="0" anchor="ctr"/>
-          <a:lstStyle/>
-          <a:p>
-            <a:pPr algn="ctr"/>
-          </a:p>
-        </p:txBody>
-      </p:sp>
-      <p:sp>
-        <p:nvSpPr>
-          <p:cNvPr id="3" name="Rectangle 2"/>
-          <p:cNvSpPr/>
-          <p:nvPr/>
-        </p:nvSpPr>
-        <p:spPr>
-          <a:xfrm>
-            <a:off x="0" y="1051560"/>
-            <a:ext cx="12191695" cy="54864"/>
-          </a:xfrm>
-          <a:prstGeom prst="rect">
-            <a:avLst/>
-          </a:prstGeom>
-          <a:solidFill>
-            <a:srgbClr val="128C8C"/>
-          </a:solidFill>
-          <a:ln>
-            <a:noFill/>
-          </a:ln>
-          <a:effectLst/>
-        </p:spPr>
-        <p:style>
-          <a:lnRef idx="1">
-            <a:schemeClr val="accent1"/>
-          </a:lnRef>
-          <a:fillRef idx="3">
-            <a:schemeClr val="accent1"/>
-          </a:fillRef>
-          <a:effectRef idx="2">
-            <a:schemeClr val="accent1"/>
-          </a:effectRef>
-          <a:fontRef idx="minor">
-            <a:schemeClr val="lt1"/>
-          </a:fontRef>
-        </p:style>
-        <p:txBody>
-          <a:bodyPr rtlCol="0" anchor="ctr"/>
-          <a:lstStyle/>
-          <a:p>
-            <a:pPr algn="ctr"/>
-          </a:p>
-        </p:txBody>
-      </p:sp>
-      <p:sp>
-        <p:nvSpPr>
-          <p:cNvPr id="4" name="TextBox 3"/>
-          <p:cNvSpPr txBox="1"/>
-          <p:nvPr/>
-        </p:nvSpPr>
-        <p:spPr>
-          <a:xfrm>
-            <a:off x="548640" y="201168"/>
-            <a:ext cx="11064240" cy="731520"/>
-          </a:xfrm>
-          <a:prstGeom prst="rect">
-            <a:avLst/>
-          </a:prstGeom>
-          <a:noFill/>
-        </p:spPr>
-        <p:txBody>
-          <a:bodyPr wrap="square" anchor="ctr">
-            <a:spAutoFit/>
-          </a:bodyPr>
-          <a:lstStyle/>
-          <a:p>
-            <a:pPr algn="l"/>
-            <a:r>
-              <a:rPr sz="2800" b="1">
-                <a:solidFill>
-                  <a:srgbClr val="FFFFFF"/>
-                </a:solidFill>
-                <a:latin typeface="Calibri"/>
-              </a:rPr>
-              <a:t>What LLMs Can &amp; Can't Do</a:t>
-            </a:r>
-          </a:p>
-        </p:txBody>
-      </p:sp>
-      <p:sp>
-        <p:nvSpPr>
-          <p:cNvPr id="5" name="TextBox 4"/>
-          <p:cNvSpPr txBox="1"/>
-          <p:nvPr/>
-        </p:nvSpPr>
-        <p:spPr>
-          <a:xfrm>
-            <a:off x="731520" y="1280160"/>
-            <a:ext cx="5120640" cy="548640"/>
-          </a:xfrm>
-          <a:prstGeom prst="rect">
-            <a:avLst/>
-          </a:prstGeom>
-          <a:noFill/>
-        </p:spPr>
-        <p:txBody>
-          <a:bodyPr wrap="square">
-            <a:spAutoFit/>
-          </a:bodyPr>
-          <a:lstStyle/>
-          <a:p>
-            <a:pPr algn="l"/>
-            <a:r>
-              <a:rPr sz="2000" b="1">
-                <a:solidFill>
-                  <a:srgbClr val="128C8C"/>
-                </a:solidFill>
-                <a:latin typeface="Calibri"/>
-              </a:rPr>
-              <a:t>Strengths</a:t>
-            </a:r>
-          </a:p>
-        </p:txBody>
-      </p:sp>
-      <p:sp>
-        <p:nvSpPr>
-          <p:cNvPr id="6" name="TextBox 5"/>
-          <p:cNvSpPr txBox="1"/>
-          <p:nvPr/>
-        </p:nvSpPr>
-        <p:spPr>
-          <a:xfrm>
-            <a:off x="731520" y="1828800"/>
-            <a:ext cx="5120640" cy="4206240"/>
-          </a:xfrm>
-          <a:prstGeom prst="rect">
-            <a:avLst/>
-          </a:prstGeom>
-          <a:noFill/>
-        </p:spPr>
-        <p:txBody>
-          <a:bodyPr wrap="square">
-            <a:spAutoFit/>
-          </a:bodyPr>
-          <a:lstStyle/>
-          <a:p>
-            <a:pPr>
-              <a:spcAft>
-                <a:spcPts val="800"/>
-              </a:spcAft>
-            </a:pPr>
-            <a:r>
-              <a:rPr sz="1800">
-                <a:solidFill>
-                  <a:srgbClr val="1A1A1A"/>
-                </a:solidFill>
-                <a:latin typeface="Calibri"/>
-              </a:rPr>
-              <a:t>• Summarize, draft, translate</a:t>
-            </a:r>
-          </a:p>
-          <a:p>
-            <a:pPr>
-              <a:spcAft>
-                <a:spcPts val="800"/>
-              </a:spcAft>
-            </a:pPr>
-            <a:r>
-              <a:rPr sz="1800">
-                <a:solidFill>
-                  <a:srgbClr val="1A1A1A"/>
-                </a:solidFill>
-                <a:latin typeface="Calibri"/>
-              </a:rPr>
-              <a:t>• Classify &amp; extract structure</a:t>
-            </a:r>
-          </a:p>
-          <a:p>
-            <a:pPr>
-              <a:spcAft>
-                <a:spcPts val="800"/>
-              </a:spcAft>
-            </a:pPr>
-            <a:r>
-              <a:rPr sz="1800">
-                <a:solidFill>
-                  <a:srgbClr val="1A1A1A"/>
-                </a:solidFill>
-                <a:latin typeface="Calibri"/>
-              </a:rPr>
-              <a:t>• Write &amp; refactor code</a:t>
-            </a:r>
-          </a:p>
-          <a:p>
-            <a:pPr>
-              <a:spcAft>
-                <a:spcPts val="800"/>
-              </a:spcAft>
-            </a:pPr>
-            <a:r>
-              <a:rPr sz="1800">
-                <a:solidFill>
-                  <a:srgbClr val="1A1A1A"/>
-                </a:solidFill>
-                <a:latin typeface="Calibri"/>
-              </a:rPr>
-              <a:t>• Flexible reasoning over text</a:t>
-            </a:r>
-          </a:p>
-        </p:txBody>
-      </p:sp>
-      <p:sp>
-        <p:nvSpPr>
-          <p:cNvPr id="7" name="TextBox 6"/>
-          <p:cNvSpPr txBox="1"/>
-          <p:nvPr/>
-        </p:nvSpPr>
-        <p:spPr>
-          <a:xfrm>
-            <a:off x="6309360" y="1280160"/>
-            <a:ext cx="5120640" cy="548640"/>
-          </a:xfrm>
-          <a:prstGeom prst="rect">
-            <a:avLst/>
-          </a:prstGeom>
-          <a:noFill/>
-        </p:spPr>
-        <p:txBody>
-          <a:bodyPr wrap="square">
-            <a:spAutoFit/>
-          </a:bodyPr>
-          <a:lstStyle/>
-          <a:p>
-            <a:pPr algn="l"/>
-            <a:r>
-              <a:rPr sz="2000" b="1">
-                <a:solidFill>
-                  <a:srgbClr val="128C8C"/>
-                </a:solidFill>
-                <a:latin typeface="Calibri"/>
-              </a:rPr>
-              <a:t>Failure modes</a:t>
-            </a:r>
-          </a:p>
-        </p:txBody>
-      </p:sp>
-      <p:sp>
-        <p:nvSpPr>
-          <p:cNvPr id="8" name="TextBox 7"/>
-          <p:cNvSpPr txBox="1"/>
-          <p:nvPr/>
-        </p:nvSpPr>
-        <p:spPr>
-          <a:xfrm>
-            <a:off x="6309360" y="1828800"/>
-            <a:ext cx="5120640" cy="4206240"/>
-          </a:xfrm>
-          <a:prstGeom prst="rect">
-            <a:avLst/>
-          </a:prstGeom>
-          <a:noFill/>
-        </p:spPr>
-        <p:txBody>
-          <a:bodyPr wrap="square">
-            <a:spAutoFit/>
-          </a:bodyPr>
-          <a:lstStyle/>
-          <a:p>
-            <a:pPr>
-              <a:spcAft>
-                <a:spcPts val="800"/>
-              </a:spcAft>
-            </a:pPr>
-            <a:r>
-              <a:rPr sz="1800">
-                <a:solidFill>
-                  <a:srgbClr val="1A1A1A"/>
-                </a:solidFill>
-                <a:latin typeface="Calibri"/>
-              </a:rPr>
-              <a:t>• Hallucination (confident &amp; wrong)</a:t>
-            </a:r>
-          </a:p>
-          <a:p>
-            <a:pPr>
-              <a:spcAft>
-                <a:spcPts val="800"/>
-              </a:spcAft>
-            </a:pPr>
-            <a:r>
-              <a:rPr sz="1800">
-                <a:solidFill>
-                  <a:srgbClr val="1A1A1A"/>
-                </a:solidFill>
-                <a:latin typeface="Calibri"/>
-              </a:rPr>
-              <a:t>• Knowledge cutoff</a:t>
-            </a:r>
-          </a:p>
-          <a:p>
-            <a:pPr>
-              <a:spcAft>
-                <a:spcPts val="800"/>
-              </a:spcAft>
-            </a:pPr>
-            <a:r>
-              <a:rPr sz="1800">
-                <a:solidFill>
-                  <a:srgbClr val="1A1A1A"/>
-                </a:solidFill>
-                <a:latin typeface="Calibri"/>
-              </a:rPr>
-              <a:t>• Weak exact math / counting</a:t>
-            </a:r>
-          </a:p>
-          <a:p>
-            <a:pPr>
-              <a:spcAft>
-                <a:spcPts val="800"/>
-              </a:spcAft>
-            </a:pPr>
-            <a:r>
-              <a:rPr sz="1800">
-                <a:solidFill>
-                  <a:srgbClr val="1A1A1A"/>
-                </a:solidFill>
-                <a:latin typeface="Calibri"/>
-              </a:rPr>
-              <a:t>• Prompt sensitivity; bias</a:t>
-            </a:r>
-          </a:p>
-        </p:txBody>
-      </p:sp>
-      <p:sp>
-        <p:nvSpPr>
-          <p:cNvPr id="9" name="TextBox 8"/>
-          <p:cNvSpPr txBox="1"/>
-          <p:nvPr/>
-        </p:nvSpPr>
-        <p:spPr>
-          <a:xfrm>
-            <a:off x="365760" y="6446520"/>
-            <a:ext cx="8229600" cy="365760"/>
-          </a:xfrm>
-          <a:prstGeom prst="rect">
-            <a:avLst/>
-          </a:prstGeom>
-          <a:noFill/>
-        </p:spPr>
-        <p:txBody>
-          <a:bodyPr wrap="square">
-            <a:spAutoFit/>
-          </a:bodyPr>
-          <a:lstStyle/>
-          <a:p>
-            <a:pPr algn="l"/>
-            <a:r>
-              <a:rPr sz="1000" b="0">
-                <a:solidFill>
-                  <a:srgbClr val="6B7280"/>
-                </a:solidFill>
-                <a:latin typeface="Calibri"/>
-              </a:rPr>
-              <a:t>Palomar College · CSCI 250 · Fall 2026</a:t>
-            </a:r>
-          </a:p>
-        </p:txBody>
-      </p:sp>
-      <p:sp>
-        <p:nvSpPr>
-          <p:cNvPr id="10" name="TextBox 9"/>
-          <p:cNvSpPr txBox="1"/>
-          <p:nvPr/>
-        </p:nvSpPr>
-        <p:spPr>
-          <a:xfrm>
-            <a:off x="11155680" y="6446520"/>
-            <a:ext cx="822960" cy="365760"/>
-          </a:xfrm>
-          <a:prstGeom prst="rect">
-            <a:avLst/>
-          </a:prstGeom>
-          <a:noFill/>
-        </p:spPr>
-        <p:txBody>
-          <a:bodyPr wrap="square">
-            <a:spAutoFit/>
-          </a:bodyPr>
-          <a:lstStyle/>
-          <a:p>
-            <a:pPr algn="r"/>
-            <a:r>
-              <a:rPr sz="1000" b="0">
-                <a:solidFill>
-                  <a:srgbClr val="6B7280"/>
-                </a:solidFill>
-                <a:latin typeface="Calibri"/>
-              </a:rPr>
-              <a:t>12/21</a:t>
+              <a:t>The Idea Behind Transformers: Attention</a:t>
             </a:r>
           </a:p>
         </p:txBody>
@@ -4227,7 +4185,7 @@
                 </a:solidFill>
                 <a:latin typeface="Calibri"/>
               </a:rPr>
-              <a:t>Mitigating Hallucination</a:t>
+              <a:t>Scaled Dot-Product Attention</a:t>
             </a:r>
           </a:p>
         </p:txBody>
@@ -4266,7 +4224,7 @@
                 </a:solidFill>
                 <a:latin typeface="Calibri"/>
               </a:rPr>
-              <a:t>• Treat output as a confident DRAFT, not a source of truth</a:t>
+              <a:t>• Each word → Q (query), K (key), V (value) vectors</a:t>
             </a:r>
           </a:p>
           <a:p>
@@ -4282,7 +4240,7 @@
                 </a:solidFill>
                 <a:latin typeface="Calibri"/>
               </a:rPr>
-              <a:t>• Ground answers in supplied context (RAG, Week 11)</a:t>
+              <a:t>• scores = Q·Kᵀ / √d  — how much each word matches each other word</a:t>
             </a:r>
           </a:p>
           <a:p>
@@ -4298,7 +4256,7 @@
                 </a:solidFill>
                 <a:latin typeface="Calibri"/>
               </a:rPr>
-              <a:t>• Ask for sources; set temperature=0 for factual tasks</a:t>
+              <a:t>• softmax each row → attention weights that sum to 1</a:t>
             </a:r>
           </a:p>
           <a:p>
@@ -4314,7 +4272,39 @@
                 </a:solidFill>
                 <a:latin typeface="Calibri"/>
               </a:rPr>
-              <a:t>• Give the model tools (Week 13); verify anything important</a:t>
+              <a:t>• output = weights · V — a context-aware mix of the value vectors</a:t>
+            </a:r>
+          </a:p>
+          <a:p>
+            <a:pPr lvl="1">
+              <a:spcAft>
+                <a:spcPts val="800"/>
+              </a:spcAft>
+            </a:pPr>
+            <a:r>
+              <a:rPr sz="1800">
+                <a:solidFill>
+                  <a:srgbClr val="6B7280"/>
+                </a:solidFill>
+                <a:latin typeface="Calibri"/>
+              </a:rPr>
+              <a:t>– Heatmap of the weights shows which words attend to which</a:t>
+            </a:r>
+          </a:p>
+          <a:p>
+            <a:pPr lvl="1">
+              <a:spcAft>
+                <a:spcPts val="800"/>
+              </a:spcAft>
+            </a:pPr>
+            <a:r>
+              <a:rPr sz="1800">
+                <a:solidFill>
+                  <a:srgbClr val="6B7280"/>
+                </a:solidFill>
+                <a:latin typeface="Calibri"/>
+              </a:rPr>
+              <a:t>– Multi-head = run it in parallel; stack layers → a Transformer</a:t>
             </a:r>
           </a:p>
         </p:txBody>
@@ -4384,7 +4374,7 @@
                 </a:solidFill>
                 <a:latin typeface="Calibri"/>
               </a:rPr>
-              <a:t>13/21</a:t>
+              <a:t>13/16</a:t>
             </a:r>
           </a:p>
         </p:txBody>
@@ -4403,7 +4393,7 @@
     <p:bg>
       <p:bgPr>
         <a:solidFill>
-          <a:srgbClr val="128C8C"/>
+          <a:srgbClr val="FFFFFF"/>
         </a:solidFill>
         <a:effectLst/>
       </p:bgPr>
@@ -4417,14 +4407,102 @@
       <p:grpSpPr/>
       <p:sp>
         <p:nvSpPr>
-          <p:cNvPr id="2" name="TextBox 1"/>
+          <p:cNvPr id="2" name="Rectangle 1"/>
+          <p:cNvSpPr/>
+          <p:nvPr/>
+        </p:nvSpPr>
+        <p:spPr>
+          <a:xfrm>
+            <a:off x="0" y="0"/>
+            <a:ext cx="12191695" cy="1051560"/>
+          </a:xfrm>
+          <a:prstGeom prst="rect">
+            <a:avLst/>
+          </a:prstGeom>
+          <a:solidFill>
+            <a:srgbClr val="0B1F3A"/>
+          </a:solidFill>
+          <a:ln>
+            <a:noFill/>
+          </a:ln>
+          <a:effectLst/>
+        </p:spPr>
+        <p:style>
+          <a:lnRef idx="1">
+            <a:schemeClr val="accent1"/>
+          </a:lnRef>
+          <a:fillRef idx="3">
+            <a:schemeClr val="accent1"/>
+          </a:fillRef>
+          <a:effectRef idx="2">
+            <a:schemeClr val="accent1"/>
+          </a:effectRef>
+          <a:fontRef idx="minor">
+            <a:schemeClr val="lt1"/>
+          </a:fontRef>
+        </p:style>
+        <p:txBody>
+          <a:bodyPr rtlCol="0" anchor="ctr"/>
+          <a:lstStyle/>
+          <a:p>
+            <a:pPr algn="ctr"/>
+          </a:p>
+        </p:txBody>
+      </p:sp>
+      <p:sp>
+        <p:nvSpPr>
+          <p:cNvPr id="3" name="Rectangle 2"/>
+          <p:cNvSpPr/>
+          <p:nvPr/>
+        </p:nvSpPr>
+        <p:spPr>
+          <a:xfrm>
+            <a:off x="0" y="1051560"/>
+            <a:ext cx="12191695" cy="54864"/>
+          </a:xfrm>
+          <a:prstGeom prst="rect">
+            <a:avLst/>
+          </a:prstGeom>
+          <a:solidFill>
+            <a:srgbClr val="128C8C"/>
+          </a:solidFill>
+          <a:ln>
+            <a:noFill/>
+          </a:ln>
+          <a:effectLst/>
+        </p:spPr>
+        <p:style>
+          <a:lnRef idx="1">
+            <a:schemeClr val="accent1"/>
+          </a:lnRef>
+          <a:fillRef idx="3">
+            <a:schemeClr val="accent1"/>
+          </a:fillRef>
+          <a:effectRef idx="2">
+            <a:schemeClr val="accent1"/>
+          </a:effectRef>
+          <a:fontRef idx="minor">
+            <a:schemeClr val="lt1"/>
+          </a:fontRef>
+        </p:style>
+        <p:txBody>
+          <a:bodyPr rtlCol="0" anchor="ctr"/>
+          <a:lstStyle/>
+          <a:p>
+            <a:pPr algn="ctr"/>
+          </a:p>
+        </p:txBody>
+      </p:sp>
+      <p:sp>
+        <p:nvSpPr>
+          <p:cNvPr id="4" name="TextBox 3"/>
           <p:cNvSpPr txBox="1"/>
           <p:nvPr/>
         </p:nvSpPr>
         <p:spPr>
           <a:xfrm>
-            <a:off x="822960" y="2743200"/>
-            <a:ext cx="10515600" cy="1371600"/>
+            <a:off x="548640" y="201168"/>
+            <a:ext cx="11064240" cy="731520"/>
           </a:xfrm>
           <a:prstGeom prst="rect">
             <a:avLst/>
@@ -4439,13 +4517,215 @@
           <a:p>
             <a:pPr algn="l"/>
             <a:r>
-              <a:rPr sz="3600" b="1">
+              <a:rPr sz="2800" b="1">
                 <a:solidFill>
                   <a:srgbClr val="FFFFFF"/>
                 </a:solidFill>
                 <a:latin typeface="Calibri"/>
               </a:rPr>
-              <a:t>Under the Hood: Build a BPE Tokenizer</a:t>
+              <a:t>Attention in 3 Lines of NumPy</a:t>
+            </a:r>
+          </a:p>
+        </p:txBody>
+      </p:sp>
+      <p:sp>
+        <p:nvSpPr>
+          <p:cNvPr id="5" name="Rectangle 4"/>
+          <p:cNvSpPr/>
+          <p:nvPr/>
+        </p:nvSpPr>
+        <p:spPr>
+          <a:xfrm>
+            <a:off x="548640" y="1325880"/>
+            <a:ext cx="11064240" cy="4480560"/>
+          </a:xfrm>
+          <a:prstGeom prst="rect">
+            <a:avLst/>
+          </a:prstGeom>
+          <a:solidFill>
+            <a:srgbClr val="1E1E1E"/>
+          </a:solidFill>
+          <a:ln>
+            <a:noFill/>
+          </a:ln>
+          <a:effectLst/>
+        </p:spPr>
+        <p:style>
+          <a:lnRef idx="1">
+            <a:schemeClr val="accent1"/>
+          </a:lnRef>
+          <a:fillRef idx="3">
+            <a:schemeClr val="accent1"/>
+          </a:fillRef>
+          <a:effectRef idx="2">
+            <a:schemeClr val="accent1"/>
+          </a:effectRef>
+          <a:fontRef idx="minor">
+            <a:schemeClr val="lt1"/>
+          </a:fontRef>
+        </p:style>
+        <p:txBody>
+          <a:bodyPr rtlCol="0" anchor="ctr" wrap="square" lIns="182880" tIns="137160"/>
+          <a:lstStyle/>
+          <a:p>
+            <a:pPr algn="ctr"/>
+            <a:r>
+              <a:rPr sz="1500">
+                <a:solidFill>
+                  <a:srgbClr val="E6E6E6"/>
+                </a:solidFill>
+                <a:latin typeface="Consolas"/>
+              </a:rPr>
+              <a:t>scores  = (Q @ K.T) / np.sqrt(d)   # match strength</a:t>
+            </a:r>
+          </a:p>
+          <a:p>
+            <a:r>
+              <a:rPr sz="1500">
+                <a:solidFill>
+                  <a:srgbClr val="E6E6E6"/>
+                </a:solidFill>
+                <a:latin typeface="Consolas"/>
+              </a:rPr>
+              <a:t>weights = softmax_rows(scores)     # rows sum to 1</a:t>
+            </a:r>
+          </a:p>
+          <a:p>
+            <a:r>
+              <a:rPr sz="1500">
+                <a:solidFill>
+                  <a:srgbClr val="E6E6E6"/>
+                </a:solidFill>
+                <a:latin typeface="Consolas"/>
+              </a:rPr>
+              <a:t>output  = weights @ V              # context mix</a:t>
+            </a:r>
+          </a:p>
+          <a:p>
+            <a:r>
+              <a:rPr sz="1500">
+                <a:solidFill>
+                  <a:srgbClr val="E6E6E6"/>
+                </a:solidFill>
+                <a:latin typeface="Consolas"/>
+              </a:rPr>
+              <a:t> </a:t>
+            </a:r>
+          </a:p>
+          <a:p>
+            <a:r>
+              <a:rPr sz="1500">
+                <a:solidFill>
+                  <a:srgbClr val="E6E6E6"/>
+                </a:solidFill>
+                <a:latin typeface="Consolas"/>
+              </a:rPr>
+              <a:t># plot 'weights' as a heatmap -&gt; the engine, made visible</a:t>
+            </a:r>
+          </a:p>
+        </p:txBody>
+      </p:sp>
+      <p:sp>
+        <p:nvSpPr>
+          <p:cNvPr id="6" name="TextBox 5"/>
+          <p:cNvSpPr txBox="1"/>
+          <p:nvPr/>
+        </p:nvSpPr>
+        <p:spPr>
+          <a:xfrm>
+            <a:off x="548640" y="5897880"/>
+            <a:ext cx="10515600" cy="457200"/>
+          </a:xfrm>
+          <a:prstGeom prst="rect">
+            <a:avLst/>
+          </a:prstGeom>
+          <a:noFill/>
+        </p:spPr>
+        <p:txBody>
+          <a:bodyPr wrap="square">
+            <a:spAutoFit/>
+          </a:bodyPr>
+          <a:lstStyle/>
+          <a:p>
+            <a:pPr algn="l"/>
+            <a:r>
+              <a:rPr sz="1400" b="0">
+                <a:solidFill>
+                  <a:srgbClr val="6B7280"/>
+                </a:solidFill>
+                <a:latin typeface="Calibri"/>
+              </a:rPr>
+              <a:t>code/04_attention_from_scratch.ipynb — the operation inside every LLM, in pure NumPy.</a:t>
+            </a:r>
+          </a:p>
+        </p:txBody>
+      </p:sp>
+      <p:sp>
+        <p:nvSpPr>
+          <p:cNvPr id="7" name="TextBox 6"/>
+          <p:cNvSpPr txBox="1"/>
+          <p:nvPr/>
+        </p:nvSpPr>
+        <p:spPr>
+          <a:xfrm>
+            <a:off x="365760" y="6446520"/>
+            <a:ext cx="8229600" cy="365760"/>
+          </a:xfrm>
+          <a:prstGeom prst="rect">
+            <a:avLst/>
+          </a:prstGeom>
+          <a:noFill/>
+        </p:spPr>
+        <p:txBody>
+          <a:bodyPr wrap="square">
+            <a:spAutoFit/>
+          </a:bodyPr>
+          <a:lstStyle/>
+          <a:p>
+            <a:pPr algn="l"/>
+            <a:r>
+              <a:rPr sz="1000" b="0">
+                <a:solidFill>
+                  <a:srgbClr val="6B7280"/>
+                </a:solidFill>
+                <a:latin typeface="Calibri"/>
+              </a:rPr>
+              <a:t>Palomar College · CSCI 250 · Fall 2026</a:t>
+            </a:r>
+          </a:p>
+        </p:txBody>
+      </p:sp>
+      <p:sp>
+        <p:nvSpPr>
+          <p:cNvPr id="8" name="TextBox 7"/>
+          <p:cNvSpPr txBox="1"/>
+          <p:nvPr/>
+        </p:nvSpPr>
+        <p:spPr>
+          <a:xfrm>
+            <a:off x="11155680" y="6446520"/>
+            <a:ext cx="822960" cy="365760"/>
+          </a:xfrm>
+          <a:prstGeom prst="rect">
+            <a:avLst/>
+          </a:prstGeom>
+          <a:noFill/>
+        </p:spPr>
+        <p:txBody>
+          <a:bodyPr wrap="square">
+            <a:spAutoFit/>
+          </a:bodyPr>
+          <a:lstStyle/>
+          <a:p>
+            <a:pPr algn="r"/>
+            <a:r>
+              <a:rPr sz="1000" b="0">
+                <a:solidFill>
+                  <a:srgbClr val="6B7280"/>
+                </a:solidFill>
+                <a:latin typeface="Calibri"/>
+              </a:rPr>
+              <a:t>14/16</a:t>
             </a:r>
           </a:p>
         </p:txBody>
@@ -4594,7 +4874,7 @@
                 </a:solidFill>
                 <a:latin typeface="Calibri"/>
               </a:rPr>
-              <a:t>Byte-Pair Encoding, From Scratch</a:t>
+              <a:t>Three Ways to Run a Model</a:t>
             </a:r>
           </a:p>
         </p:txBody>
@@ -4607,8 +4887,43 @@
         </p:nvSpPr>
         <p:spPr>
           <a:xfrm>
-            <a:off x="731520" y="1371600"/>
-            <a:ext cx="10698480" cy="4754880"/>
+            <a:off x="731520" y="1280160"/>
+            <a:ext cx="5120640" cy="548640"/>
+          </a:xfrm>
+          <a:prstGeom prst="rect">
+            <a:avLst/>
+          </a:prstGeom>
+          <a:noFill/>
+        </p:spPr>
+        <p:txBody>
+          <a:bodyPr wrap="square">
+            <a:spAutoFit/>
+          </a:bodyPr>
+          <a:lstStyle/>
+          <a:p>
+            <a:pPr algn="l"/>
+            <a:r>
+              <a:rPr sz="2000" b="1">
+                <a:solidFill>
+                  <a:srgbClr val="128C8C"/>
+                </a:solidFill>
+                <a:latin typeface="Calibri"/>
+              </a:rPr>
+              <a:t>Cloud APIs (need a key)</a:t>
+            </a:r>
+          </a:p>
+        </p:txBody>
+      </p:sp>
+      <p:sp>
+        <p:nvSpPr>
+          <p:cNvPr id="6" name="TextBox 5"/>
+          <p:cNvSpPr txBox="1"/>
+          <p:nvPr/>
+        </p:nvSpPr>
+        <p:spPr>
+          <a:xfrm>
+            <a:off x="731520" y="1828800"/>
+            <a:ext cx="5120640" cy="4206240"/>
           </a:xfrm>
           <a:prstGeom prst="rect">
             <a:avLst/>
@@ -4627,13 +4942,13 @@
               </a:spcAft>
             </a:pPr>
             <a:r>
-              <a:rPr sz="2000">
+              <a:rPr sz="1800">
                 <a:solidFill>
                   <a:srgbClr val="1A1A1A"/>
                 </a:solidFill>
                 <a:latin typeface="Calibri"/>
               </a:rPr>
-              <a:t>• Start from raw bytes (vocab of 256)</a:t>
+              <a:t>• Anthropic Claude — messages.create</a:t>
             </a:r>
           </a:p>
           <a:p>
@@ -4643,15 +4958,73 @@
               </a:spcAft>
             </a:pPr>
             <a:r>
-              <a:rPr sz="2000">
+              <a:rPr sz="1800">
                 <a:solidFill>
                   <a:srgbClr val="1A1A1A"/>
                 </a:solidFill>
                 <a:latin typeface="Calibri"/>
               </a:rPr>
-              <a:t>• Count every adjacent pair of tokens</a:t>
-            </a:r>
-          </a:p>
+              <a:t>• Google Gemini + AI Studio</a:t>
+            </a:r>
+          </a:p>
+        </p:txBody>
+      </p:sp>
+      <p:sp>
+        <p:nvSpPr>
+          <p:cNvPr id="7" name="TextBox 6"/>
+          <p:cNvSpPr txBox="1"/>
+          <p:nvPr/>
+        </p:nvSpPr>
+        <p:spPr>
+          <a:xfrm>
+            <a:off x="6309360" y="1280160"/>
+            <a:ext cx="5120640" cy="548640"/>
+          </a:xfrm>
+          <a:prstGeom prst="rect">
+            <a:avLst/>
+          </a:prstGeom>
+          <a:noFill/>
+        </p:spPr>
+        <p:txBody>
+          <a:bodyPr wrap="square">
+            <a:spAutoFit/>
+          </a:bodyPr>
+          <a:lstStyle/>
+          <a:p>
+            <a:pPr algn="l"/>
+            <a:r>
+              <a:rPr sz="2000" b="1">
+                <a:solidFill>
+                  <a:srgbClr val="128C8C"/>
+                </a:solidFill>
+                <a:latin typeface="Calibri"/>
+              </a:rPr>
+              <a:t>Local (no key, no cost)</a:t>
+            </a:r>
+          </a:p>
+        </p:txBody>
+      </p:sp>
+      <p:sp>
+        <p:nvSpPr>
+          <p:cNvPr id="8" name="TextBox 7"/>
+          <p:cNvSpPr txBox="1"/>
+          <p:nvPr/>
+        </p:nvSpPr>
+        <p:spPr>
+          <a:xfrm>
+            <a:off x="6309360" y="1828800"/>
+            <a:ext cx="5120640" cy="4206240"/>
+          </a:xfrm>
+          <a:prstGeom prst="rect">
+            <a:avLst/>
+          </a:prstGeom>
+          <a:noFill/>
+        </p:spPr>
+        <p:txBody>
+          <a:bodyPr wrap="square">
+            <a:spAutoFit/>
+          </a:bodyPr>
+          <a:lstStyle/>
           <a:p>
             <a:pPr>
               <a:spcAft>
@@ -4659,17 +5032,17 @@
               </a:spcAft>
             </a:pPr>
             <a:r>
-              <a:rPr sz="2000">
+              <a:rPr sz="1800">
                 <a:solidFill>
                   <a:srgbClr val="1A1A1A"/>
                 </a:solidFill>
                 <a:latin typeface="Calibri"/>
               </a:rPr>
-              <a:t>• Merge the most frequent pair into a new token; repeat</a:t>
-            </a:r>
-          </a:p>
-          <a:p>
-            <a:pPr lvl="1">
+              <a:t>• Ollama (Llama, Mistral, Gemma)</a:t>
+            </a:r>
+          </a:p>
+          <a:p>
+            <a:pPr>
               <a:spcAft>
                 <a:spcPts val="800"/>
               </a:spcAft>
@@ -4677,50 +5050,18 @@
             <a:r>
               <a:rPr sz="1800">
                 <a:solidFill>
-                  <a:srgbClr val="6B7280"/>
-                </a:solidFill>
-                <a:latin typeface="Calibri"/>
-              </a:rPr>
-              <a:t>– encode = replay merges; decode = bytes back → exact round-trip</a:t>
-            </a:r>
-          </a:p>
-          <a:p>
-            <a:pPr lvl="1">
-              <a:spcAft>
-                <a:spcPts val="800"/>
-              </a:spcAft>
-            </a:pPr>
-            <a:r>
-              <a:rPr sz="1800">
-                <a:solidFill>
-                  <a:srgbClr val="6B7280"/>
-                </a:solidFill>
-                <a:latin typeface="Calibri"/>
-              </a:rPr>
-              <a:t>– Tradeoff: bigger vocab = shorter sequences (fewer tokens to pay for)</a:t>
-            </a:r>
-          </a:p>
-          <a:p>
-            <a:pPr lvl="1">
-              <a:spcAft>
-                <a:spcPts val="800"/>
-              </a:spcAft>
-            </a:pPr>
-            <a:r>
-              <a:rPr sz="1800">
-                <a:solidFill>
-                  <a:srgbClr val="6B7280"/>
-                </a:solidFill>
-                <a:latin typeface="Calibri"/>
-              </a:rPr>
-              <a:t>– Why an LLM can't count the r's in 'strawberry': it's one token</a:t>
-            </a:r>
-          </a:p>
-        </p:txBody>
-      </p:sp>
-      <p:sp>
-        <p:nvSpPr>
-          <p:cNvPr id="6" name="TextBox 5"/>
+                  <a:srgbClr val="1A1A1A"/>
+                </a:solidFill>
+                <a:latin typeface="Calibri"/>
+              </a:rPr>
+              <a:t>• Hugging Face transformers</a:t>
+            </a:r>
+          </a:p>
+        </p:txBody>
+      </p:sp>
+      <p:sp>
+        <p:nvSpPr>
+          <p:cNvPr id="9" name="TextBox 8"/>
           <p:cNvSpPr txBox="1"/>
           <p:nvPr/>
         </p:nvSpPr>
@@ -4755,7 +5096,7 @@
       </p:sp>
       <p:sp>
         <p:nvSpPr>
-          <p:cNvPr id="7" name="TextBox 6"/>
+          <p:cNvPr id="10" name="TextBox 9"/>
           <p:cNvSpPr txBox="1"/>
           <p:nvPr/>
         </p:nvSpPr>
@@ -4783,7 +5124,7 @@
                 </a:solidFill>
                 <a:latin typeface="Calibri"/>
               </a:rPr>
-              <a:t>15/21</a:t>
+              <a:t>15/16</a:t>
             </a:r>
           </a:p>
         </p:txBody>
@@ -4802,7 +5143,7 @@
     <p:bg>
       <p:bgPr>
         <a:solidFill>
-          <a:srgbClr val="FFFFFF"/>
+          <a:srgbClr val="0B1F3A"/>
         </a:solidFill>
         <a:effectLst/>
       </p:bgPr>
@@ -4816,45 +5157,36 @@
       <p:grpSpPr/>
       <p:sp>
         <p:nvSpPr>
-          <p:cNvPr id="2" name="Rectangle 1"/>
-          <p:cNvSpPr/>
-          <p:nvPr/>
-        </p:nvSpPr>
-        <p:spPr>
-          <a:xfrm>
-            <a:off x="0" y="0"/>
-            <a:ext cx="12191695" cy="1051560"/>
-          </a:xfrm>
-          <a:prstGeom prst="rect">
-            <a:avLst/>
-          </a:prstGeom>
-          <a:solidFill>
-            <a:srgbClr val="0B1F3A"/>
-          </a:solidFill>
-          <a:ln>
-            <a:noFill/>
-          </a:ln>
-          <a:effectLst/>
-        </p:spPr>
-        <p:style>
-          <a:lnRef idx="1">
-            <a:schemeClr val="accent1"/>
-          </a:lnRef>
-          <a:fillRef idx="3">
-            <a:schemeClr val="accent1"/>
-          </a:fillRef>
-          <a:effectRef idx="2">
-            <a:schemeClr val="accent1"/>
-          </a:effectRef>
-          <a:fontRef idx="minor">
-            <a:schemeClr val="lt1"/>
-          </a:fontRef>
-        </p:style>
-        <p:txBody>
-          <a:bodyPr rtlCol="0" anchor="ctr"/>
-          <a:lstStyle/>
-          <a:p>
-            <a:pPr algn="ctr"/>
+          <p:cNvPr id="2" name="TextBox 1"/>
+          <p:cNvSpPr txBox="1"/>
+          <p:nvPr/>
+        </p:nvSpPr>
+        <p:spPr>
+          <a:xfrm>
+            <a:off x="822960" y="731520"/>
+            <a:ext cx="10515600" cy="822960"/>
+          </a:xfrm>
+          <a:prstGeom prst="rect">
+            <a:avLst/>
+          </a:prstGeom>
+          <a:noFill/>
+        </p:spPr>
+        <p:txBody>
+          <a:bodyPr wrap="square">
+            <a:spAutoFit/>
+          </a:bodyPr>
+          <a:lstStyle/>
+          <a:p>
+            <a:pPr algn="l"/>
+            <a:r>
+              <a:rPr sz="3000" b="1">
+                <a:solidFill>
+                  <a:srgbClr val="FFFFFF"/>
+                </a:solidFill>
+                <a:latin typeface="Calibri"/>
+              </a:rPr>
+              <a:t>This Week — To Do</a:t>
+            </a:r>
           </a:p>
         </p:txBody>
       </p:sp>
@@ -4866,8 +5198,8 @@
         </p:nvSpPr>
         <p:spPr>
           <a:xfrm>
-            <a:off x="0" y="1051560"/>
-            <a:ext cx="12191695" cy="54864"/>
+            <a:off x="822960" y="1600200"/>
+            <a:ext cx="3657600" cy="45720"/>
           </a:xfrm>
           <a:prstGeom prst="rect">
             <a:avLst/>
@@ -4910,206 +5242,8 @@
         </p:nvSpPr>
         <p:spPr>
           <a:xfrm>
-            <a:off x="548640" y="201168"/>
-            <a:ext cx="11064240" cy="731520"/>
-          </a:xfrm>
-          <a:prstGeom prst="rect">
-            <a:avLst/>
-          </a:prstGeom>
-          <a:noFill/>
-        </p:spPr>
-        <p:txBody>
-          <a:bodyPr wrap="square" anchor="ctr">
-            <a:spAutoFit/>
-          </a:bodyPr>
-          <a:lstStyle/>
-          <a:p>
-            <a:pPr algn="l"/>
-            <a:r>
-              <a:rPr sz="2800" b="1">
-                <a:solidFill>
-                  <a:srgbClr val="FFFFFF"/>
-                </a:solidFill>
-                <a:latin typeface="Calibri"/>
-              </a:rPr>
-              <a:t>The Core of BPE: merge a pair</a:t>
-            </a:r>
-          </a:p>
-        </p:txBody>
-      </p:sp>
-      <p:sp>
-        <p:nvSpPr>
-          <p:cNvPr id="5" name="Rectangle 4"/>
-          <p:cNvSpPr/>
-          <p:nvPr/>
-        </p:nvSpPr>
-        <p:spPr>
-          <a:xfrm>
-            <a:off x="548640" y="1325880"/>
-            <a:ext cx="11064240" cy="4480560"/>
-          </a:xfrm>
-          <a:prstGeom prst="rect">
-            <a:avLst/>
-          </a:prstGeom>
-          <a:solidFill>
-            <a:srgbClr val="1E1E1E"/>
-          </a:solidFill>
-          <a:ln>
-            <a:noFill/>
-          </a:ln>
-          <a:effectLst/>
-        </p:spPr>
-        <p:style>
-          <a:lnRef idx="1">
-            <a:schemeClr val="accent1"/>
-          </a:lnRef>
-          <a:fillRef idx="3">
-            <a:schemeClr val="accent1"/>
-          </a:fillRef>
-          <a:effectRef idx="2">
-            <a:schemeClr val="accent1"/>
-          </a:effectRef>
-          <a:fontRef idx="minor">
-            <a:schemeClr val="lt1"/>
-          </a:fontRef>
-        </p:style>
-        <p:txBody>
-          <a:bodyPr rtlCol="0" anchor="ctr" wrap="square" lIns="182880" tIns="137160"/>
-          <a:lstStyle/>
-          <a:p>
-            <a:pPr algn="ctr"/>
-            <a:r>
-              <a:rPr sz="1500">
-                <a:solidFill>
-                  <a:srgbClr val="E6E6E6"/>
-                </a:solidFill>
-                <a:latin typeface="Consolas"/>
-              </a:rPr>
-              <a:t>def merge(ids, pair, new_id):     # replace every (a,b)</a:t>
-            </a:r>
-          </a:p>
-          <a:p>
-            <a:r>
-              <a:rPr sz="1500">
-                <a:solidFill>
-                  <a:srgbClr val="E6E6E6"/>
-                </a:solidFill>
-                <a:latin typeface="Consolas"/>
-              </a:rPr>
-              <a:t>    a, b = pair; out = []; i = 0</a:t>
-            </a:r>
-          </a:p>
-          <a:p>
-            <a:r>
-              <a:rPr sz="1500">
-                <a:solidFill>
-                  <a:srgbClr val="E6E6E6"/>
-                </a:solidFill>
-                <a:latin typeface="Consolas"/>
-              </a:rPr>
-              <a:t>    while i &lt; len(ids):</a:t>
-            </a:r>
-          </a:p>
-          <a:p>
-            <a:r>
-              <a:rPr sz="1500">
-                <a:solidFill>
-                  <a:srgbClr val="E6E6E6"/>
-                </a:solidFill>
-                <a:latin typeface="Consolas"/>
-              </a:rPr>
-              <a:t>        if i &lt; len(ids)-1 and ids[i]==a and ids[i+1]==b:</a:t>
-            </a:r>
-          </a:p>
-          <a:p>
-            <a:r>
-              <a:rPr sz="1500">
-                <a:solidFill>
-                  <a:srgbClr val="E6E6E6"/>
-                </a:solidFill>
-                <a:latin typeface="Consolas"/>
-              </a:rPr>
-              <a:t>            out.append(new_id); i += 2</a:t>
-            </a:r>
-          </a:p>
-          <a:p>
-            <a:r>
-              <a:rPr sz="1500">
-                <a:solidFill>
-                  <a:srgbClr val="E6E6E6"/>
-                </a:solidFill>
-                <a:latin typeface="Consolas"/>
-              </a:rPr>
-              <a:t>        else:</a:t>
-            </a:r>
-          </a:p>
-          <a:p>
-            <a:r>
-              <a:rPr sz="1500">
-                <a:solidFill>
-                  <a:srgbClr val="E6E6E6"/>
-                </a:solidFill>
-                <a:latin typeface="Consolas"/>
-              </a:rPr>
-              <a:t>            out.append(ids[i]); i += 1</a:t>
-            </a:r>
-          </a:p>
-          <a:p>
-            <a:r>
-              <a:rPr sz="1500">
-                <a:solidFill>
-                  <a:srgbClr val="E6E6E6"/>
-                </a:solidFill>
-                <a:latin typeface="Consolas"/>
-              </a:rPr>
-              <a:t>    return out</a:t>
-            </a:r>
-          </a:p>
-          <a:p>
-            <a:r>
-              <a:rPr sz="1500">
-                <a:solidFill>
-                  <a:srgbClr val="E6E6E6"/>
-                </a:solidFill>
-                <a:latin typeface="Consolas"/>
-              </a:rPr>
-              <a:t> </a:t>
-            </a:r>
-          </a:p>
-          <a:p>
-            <a:r>
-              <a:rPr sz="1500">
-                <a:solidFill>
-                  <a:srgbClr val="E6E6E6"/>
-                </a:solidFill>
-                <a:latin typeface="Consolas"/>
-              </a:rPr>
-              <a:t># loop: count pairs -&gt; merge most frequent -&gt; repeat</a:t>
-            </a:r>
-          </a:p>
-          <a:p>
-            <a:r>
-              <a:rPr sz="1500">
-                <a:solidFill>
-                  <a:srgbClr val="E6E6E6"/>
-                </a:solidFill>
-                <a:latin typeface="Consolas"/>
-              </a:rPr>
-              <a:t># then encode/decode round-trips your own text exactly</a:t>
-            </a:r>
-          </a:p>
-        </p:txBody>
-      </p:sp>
-      <p:sp>
-        <p:nvSpPr>
-          <p:cNvPr id="6" name="TextBox 5"/>
-          <p:cNvSpPr txBox="1"/>
-          <p:nvPr/>
-        </p:nvSpPr>
-        <p:spPr>
-          <a:xfrm>
-            <a:off x="548640" y="5897880"/>
-            <a:ext cx="10515600" cy="457200"/>
+            <a:off x="822960" y="1920240"/>
+            <a:ext cx="10515600" cy="4206240"/>
           </a:xfrm>
           <a:prstGeom prst="rect">
             <a:avLst/>
@@ -5122,22 +5256,106 @@
           </a:bodyPr>
           <a:lstStyle/>
           <a:p>
-            <a:pPr algn="l"/>
-            <a:r>
-              <a:rPr sz="1400" b="0">
-                <a:solidFill>
-                  <a:srgbClr val="6B7280"/>
-                </a:solidFill>
-                <a:latin typeface="Calibri"/>
-              </a:rPr>
-              <a:t>code/03_build_bpe_tokenizer.ipynb — Karpathy minbpe / CS336 style, pure Python.</a:t>
-            </a:r>
-          </a:p>
-        </p:txBody>
-      </p:sp>
-      <p:sp>
-        <p:nvSpPr>
-          <p:cNvPr id="7" name="TextBox 6"/>
+            <a:pPr>
+              <a:spcAft>
+                <a:spcPts val="1200"/>
+              </a:spcAft>
+            </a:pPr>
+            <a:r>
+              <a:rPr sz="2200">
+                <a:solidFill>
+                  <a:srgbClr val="FFFFFF"/>
+                </a:solidFill>
+                <a:latin typeface="Calibri"/>
+              </a:rPr>
+              <a:t>✓ Read the Compact Guide to LLMs (tokens, context, sampling)</a:t>
+            </a:r>
+          </a:p>
+          <a:p>
+            <a:pPr>
+              <a:spcAft>
+                <a:spcPts val="1200"/>
+              </a:spcAft>
+            </a:pPr>
+            <a:r>
+              <a:rPr sz="2200">
+                <a:solidFill>
+                  <a:srgbClr val="FFFFFF"/>
+                </a:solidFill>
+                <a:latin typeface="Calibri"/>
+              </a:rPr>
+              <a:t>✓ Run 01_llm_concepts.ipynb + 02_claude_gemini_local.ipynb</a:t>
+            </a:r>
+          </a:p>
+          <a:p>
+            <a:pPr>
+              <a:spcAft>
+                <a:spcPts val="1200"/>
+              </a:spcAft>
+            </a:pPr>
+            <a:r>
+              <a:rPr sz="2200">
+                <a:solidFill>
+                  <a:srgbClr val="FFFFFF"/>
+                </a:solidFill>
+                <a:latin typeface="Calibri"/>
+              </a:rPr>
+              <a:t>✓ Build the BPE tokenizer (03) — fill-ins + round-trip on your text</a:t>
+            </a:r>
+          </a:p>
+          <a:p>
+            <a:pPr>
+              <a:spcAft>
+                <a:spcPts val="1200"/>
+              </a:spcAft>
+            </a:pPr>
+            <a:r>
+              <a:rPr sz="2200">
+                <a:solidFill>
+                  <a:srgbClr val="FFFFFF"/>
+                </a:solidFill>
+                <a:latin typeface="Calibri"/>
+              </a:rPr>
+              <a:t>✓ Build attention (04) — fill-ins + paste your heatmap</a:t>
+            </a:r>
+          </a:p>
+          <a:p>
+            <a:pPr>
+              <a:spcAft>
+                <a:spcPts val="1200"/>
+              </a:spcAft>
+            </a:pPr>
+            <a:r>
+              <a:rPr sz="2200">
+                <a:solidFill>
+                  <a:srgbClr val="FFFFFF"/>
+                </a:solidFill>
+                <a:latin typeface="Calibri"/>
+              </a:rPr>
+              <a:t>✓ Do the hallucination hunt + comparison table</a:t>
+            </a:r>
+          </a:p>
+          <a:p>
+            <a:pPr>
+              <a:spcAft>
+                <a:spcPts val="1200"/>
+              </a:spcAft>
+            </a:pPr>
+            <a:r>
+              <a:rPr sz="2200">
+                <a:solidFill>
+                  <a:srgbClr val="FFFFFF"/>
+                </a:solidFill>
+                <a:latin typeface="Calibri"/>
+              </a:rPr>
+              <a:t>✓ Submit Assignment A7 by Sunday 11:59 PM PT</a:t>
+            </a:r>
+          </a:p>
+        </p:txBody>
+      </p:sp>
+      <p:sp>
+        <p:nvSpPr>
+          <p:cNvPr id="5" name="TextBox 4"/>
           <p:cNvSpPr txBox="1"/>
           <p:nvPr/>
         </p:nvSpPr>
@@ -5172,7 +5390,7 @@
       </p:sp>
       <p:sp>
         <p:nvSpPr>
-          <p:cNvPr id="8" name="TextBox 7"/>
+          <p:cNvPr id="6" name="TextBox 5"/>
           <p:cNvSpPr txBox="1"/>
           <p:nvPr/>
         </p:nvSpPr>
@@ -5200,757 +5418,7 @@
                 </a:solidFill>
                 <a:latin typeface="Calibri"/>
               </a:rPr>
-              <a:t>16/21</a:t>
-            </a:r>
-          </a:p>
-        </p:txBody>
-      </p:sp>
-    </p:spTree>
-  </p:cSld>
-  <p:clrMapOvr>
-    <a:masterClrMapping/>
-  </p:clrMapOvr>
-</p:sld>
-</file>
-
-<file path=ppt/slides/slide17.xml><?xml version="1.0" encoding="utf-8"?>
-<p:sld xmlns:a="http://schemas.openxmlformats.org/drawingml/2006/main" xmlns:p="http://schemas.openxmlformats.org/presentationml/2006/main" xmlns:r="http://schemas.openxmlformats.org/officeDocument/2006/relationships">
-  <p:cSld>
-    <p:bg>
-      <p:bgPr>
-        <a:solidFill>
-          <a:srgbClr val="128C8C"/>
-        </a:solidFill>
-        <a:effectLst/>
-      </p:bgPr>
-    </p:bg>
-    <p:spTree>
-      <p:nvGrpSpPr>
-        <p:cNvPr id="1" name=""/>
-        <p:cNvGrpSpPr/>
-        <p:nvPr/>
-      </p:nvGrpSpPr>
-      <p:grpSpPr/>
-      <p:sp>
-        <p:nvSpPr>
-          <p:cNvPr id="2" name="TextBox 1"/>
-          <p:cNvSpPr txBox="1"/>
-          <p:nvPr/>
-        </p:nvSpPr>
-        <p:spPr>
-          <a:xfrm>
-            <a:off x="822960" y="2743200"/>
-            <a:ext cx="10515600" cy="1371600"/>
-          </a:xfrm>
-          <a:prstGeom prst="rect">
-            <a:avLst/>
-          </a:prstGeom>
-          <a:noFill/>
-        </p:spPr>
-        <p:txBody>
-          <a:bodyPr wrap="square" anchor="ctr">
-            <a:spAutoFit/>
-          </a:bodyPr>
-          <a:lstStyle/>
-          <a:p>
-            <a:pPr algn="l"/>
-            <a:r>
-              <a:rPr sz="3600" b="1">
-                <a:solidFill>
-                  <a:srgbClr val="FFFFFF"/>
-                </a:solidFill>
-                <a:latin typeface="Calibri"/>
-              </a:rPr>
-              <a:t>The Idea Behind Transformers: Attention</a:t>
-            </a:r>
-          </a:p>
-        </p:txBody>
-      </p:sp>
-    </p:spTree>
-  </p:cSld>
-  <p:clrMapOvr>
-    <a:masterClrMapping/>
-  </p:clrMapOvr>
-</p:sld>
-</file>
-
-<file path=ppt/slides/slide18.xml><?xml version="1.0" encoding="utf-8"?>
-<p:sld xmlns:a="http://schemas.openxmlformats.org/drawingml/2006/main" xmlns:p="http://schemas.openxmlformats.org/presentationml/2006/main" xmlns:r="http://schemas.openxmlformats.org/officeDocument/2006/relationships">
-  <p:cSld>
-    <p:bg>
-      <p:bgPr>
-        <a:solidFill>
-          <a:srgbClr val="FFFFFF"/>
-        </a:solidFill>
-        <a:effectLst/>
-      </p:bgPr>
-    </p:bg>
-    <p:spTree>
-      <p:nvGrpSpPr>
-        <p:cNvPr id="1" name=""/>
-        <p:cNvGrpSpPr/>
-        <p:nvPr/>
-      </p:nvGrpSpPr>
-      <p:grpSpPr/>
-      <p:sp>
-        <p:nvSpPr>
-          <p:cNvPr id="2" name="Rectangle 1"/>
-          <p:cNvSpPr/>
-          <p:nvPr/>
-        </p:nvSpPr>
-        <p:spPr>
-          <a:xfrm>
-            <a:off x="0" y="0"/>
-            <a:ext cx="12191695" cy="1051560"/>
-          </a:xfrm>
-          <a:prstGeom prst="rect">
-            <a:avLst/>
-          </a:prstGeom>
-          <a:solidFill>
-            <a:srgbClr val="0B1F3A"/>
-          </a:solidFill>
-          <a:ln>
-            <a:noFill/>
-          </a:ln>
-          <a:effectLst/>
-        </p:spPr>
-        <p:style>
-          <a:lnRef idx="1">
-            <a:schemeClr val="accent1"/>
-          </a:lnRef>
-          <a:fillRef idx="3">
-            <a:schemeClr val="accent1"/>
-          </a:fillRef>
-          <a:effectRef idx="2">
-            <a:schemeClr val="accent1"/>
-          </a:effectRef>
-          <a:fontRef idx="minor">
-            <a:schemeClr val="lt1"/>
-          </a:fontRef>
-        </p:style>
-        <p:txBody>
-          <a:bodyPr rtlCol="0" anchor="ctr"/>
-          <a:lstStyle/>
-          <a:p>
-            <a:pPr algn="ctr"/>
-          </a:p>
-        </p:txBody>
-      </p:sp>
-      <p:sp>
-        <p:nvSpPr>
-          <p:cNvPr id="3" name="Rectangle 2"/>
-          <p:cNvSpPr/>
-          <p:nvPr/>
-        </p:nvSpPr>
-        <p:spPr>
-          <a:xfrm>
-            <a:off x="0" y="1051560"/>
-            <a:ext cx="12191695" cy="54864"/>
-          </a:xfrm>
-          <a:prstGeom prst="rect">
-            <a:avLst/>
-          </a:prstGeom>
-          <a:solidFill>
-            <a:srgbClr val="128C8C"/>
-          </a:solidFill>
-          <a:ln>
-            <a:noFill/>
-          </a:ln>
-          <a:effectLst/>
-        </p:spPr>
-        <p:style>
-          <a:lnRef idx="1">
-            <a:schemeClr val="accent1"/>
-          </a:lnRef>
-          <a:fillRef idx="3">
-            <a:schemeClr val="accent1"/>
-          </a:fillRef>
-          <a:effectRef idx="2">
-            <a:schemeClr val="accent1"/>
-          </a:effectRef>
-          <a:fontRef idx="minor">
-            <a:schemeClr val="lt1"/>
-          </a:fontRef>
-        </p:style>
-        <p:txBody>
-          <a:bodyPr rtlCol="0" anchor="ctr"/>
-          <a:lstStyle/>
-          <a:p>
-            <a:pPr algn="ctr"/>
-          </a:p>
-        </p:txBody>
-      </p:sp>
-      <p:sp>
-        <p:nvSpPr>
-          <p:cNvPr id="4" name="TextBox 3"/>
-          <p:cNvSpPr txBox="1"/>
-          <p:nvPr/>
-        </p:nvSpPr>
-        <p:spPr>
-          <a:xfrm>
-            <a:off x="548640" y="201168"/>
-            <a:ext cx="11064240" cy="731520"/>
-          </a:xfrm>
-          <a:prstGeom prst="rect">
-            <a:avLst/>
-          </a:prstGeom>
-          <a:noFill/>
-        </p:spPr>
-        <p:txBody>
-          <a:bodyPr wrap="square" anchor="ctr">
-            <a:spAutoFit/>
-          </a:bodyPr>
-          <a:lstStyle/>
-          <a:p>
-            <a:pPr algn="l"/>
-            <a:r>
-              <a:rPr sz="2800" b="1">
-                <a:solidFill>
-                  <a:srgbClr val="FFFFFF"/>
-                </a:solidFill>
-                <a:latin typeface="Calibri"/>
-              </a:rPr>
-              <a:t>Scaled Dot-Product Attention</a:t>
-            </a:r>
-          </a:p>
-        </p:txBody>
-      </p:sp>
-      <p:sp>
-        <p:nvSpPr>
-          <p:cNvPr id="5" name="TextBox 4"/>
-          <p:cNvSpPr txBox="1"/>
-          <p:nvPr/>
-        </p:nvSpPr>
-        <p:spPr>
-          <a:xfrm>
-            <a:off x="731520" y="1371600"/>
-            <a:ext cx="10698480" cy="4754880"/>
-          </a:xfrm>
-          <a:prstGeom prst="rect">
-            <a:avLst/>
-          </a:prstGeom>
-          <a:noFill/>
-        </p:spPr>
-        <p:txBody>
-          <a:bodyPr wrap="square">
-            <a:spAutoFit/>
-          </a:bodyPr>
-          <a:lstStyle/>
-          <a:p>
-            <a:pPr>
-              <a:spcAft>
-                <a:spcPts val="800"/>
-              </a:spcAft>
-            </a:pPr>
-            <a:r>
-              <a:rPr sz="2000">
-                <a:solidFill>
-                  <a:srgbClr val="1A1A1A"/>
-                </a:solidFill>
-                <a:latin typeface="Calibri"/>
-              </a:rPr>
-              <a:t>• Each word → Q (query), K (key), V (value) vectors</a:t>
-            </a:r>
-          </a:p>
-          <a:p>
-            <a:pPr>
-              <a:spcAft>
-                <a:spcPts val="800"/>
-              </a:spcAft>
-            </a:pPr>
-            <a:r>
-              <a:rPr sz="2000">
-                <a:solidFill>
-                  <a:srgbClr val="1A1A1A"/>
-                </a:solidFill>
-                <a:latin typeface="Calibri"/>
-              </a:rPr>
-              <a:t>• scores = Q·Kᵀ / √d  — how much each word matches each other word</a:t>
-            </a:r>
-          </a:p>
-          <a:p>
-            <a:pPr>
-              <a:spcAft>
-                <a:spcPts val="800"/>
-              </a:spcAft>
-            </a:pPr>
-            <a:r>
-              <a:rPr sz="2000">
-                <a:solidFill>
-                  <a:srgbClr val="1A1A1A"/>
-                </a:solidFill>
-                <a:latin typeface="Calibri"/>
-              </a:rPr>
-              <a:t>• softmax each row → attention weights that sum to 1</a:t>
-            </a:r>
-          </a:p>
-          <a:p>
-            <a:pPr>
-              <a:spcAft>
-                <a:spcPts val="800"/>
-              </a:spcAft>
-            </a:pPr>
-            <a:r>
-              <a:rPr sz="2000">
-                <a:solidFill>
-                  <a:srgbClr val="1A1A1A"/>
-                </a:solidFill>
-                <a:latin typeface="Calibri"/>
-              </a:rPr>
-              <a:t>• output = weights · V — a context-aware mix of the value vectors</a:t>
-            </a:r>
-          </a:p>
-          <a:p>
-            <a:pPr lvl="1">
-              <a:spcAft>
-                <a:spcPts val="800"/>
-              </a:spcAft>
-            </a:pPr>
-            <a:r>
-              <a:rPr sz="1800">
-                <a:solidFill>
-                  <a:srgbClr val="6B7280"/>
-                </a:solidFill>
-                <a:latin typeface="Calibri"/>
-              </a:rPr>
-              <a:t>– Heatmap of the weights shows which words attend to which</a:t>
-            </a:r>
-          </a:p>
-          <a:p>
-            <a:pPr lvl="1">
-              <a:spcAft>
-                <a:spcPts val="800"/>
-              </a:spcAft>
-            </a:pPr>
-            <a:r>
-              <a:rPr sz="1800">
-                <a:solidFill>
-                  <a:srgbClr val="6B7280"/>
-                </a:solidFill>
-                <a:latin typeface="Calibri"/>
-              </a:rPr>
-              <a:t>– Multi-head = run it in parallel; stack layers → a Transformer</a:t>
-            </a:r>
-          </a:p>
-        </p:txBody>
-      </p:sp>
-      <p:sp>
-        <p:nvSpPr>
-          <p:cNvPr id="6" name="TextBox 5"/>
-          <p:cNvSpPr txBox="1"/>
-          <p:nvPr/>
-        </p:nvSpPr>
-        <p:spPr>
-          <a:xfrm>
-            <a:off x="365760" y="6446520"/>
-            <a:ext cx="8229600" cy="365760"/>
-          </a:xfrm>
-          <a:prstGeom prst="rect">
-            <a:avLst/>
-          </a:prstGeom>
-          <a:noFill/>
-        </p:spPr>
-        <p:txBody>
-          <a:bodyPr wrap="square">
-            <a:spAutoFit/>
-          </a:bodyPr>
-          <a:lstStyle/>
-          <a:p>
-            <a:pPr algn="l"/>
-            <a:r>
-              <a:rPr sz="1000" b="0">
-                <a:solidFill>
-                  <a:srgbClr val="6B7280"/>
-                </a:solidFill>
-                <a:latin typeface="Calibri"/>
-              </a:rPr>
-              <a:t>Palomar College · CSCI 250 · Fall 2026</a:t>
-            </a:r>
-          </a:p>
-        </p:txBody>
-      </p:sp>
-      <p:sp>
-        <p:nvSpPr>
-          <p:cNvPr id="7" name="TextBox 6"/>
-          <p:cNvSpPr txBox="1"/>
-          <p:nvPr/>
-        </p:nvSpPr>
-        <p:spPr>
-          <a:xfrm>
-            <a:off x="11155680" y="6446520"/>
-            <a:ext cx="822960" cy="365760"/>
-          </a:xfrm>
-          <a:prstGeom prst="rect">
-            <a:avLst/>
-          </a:prstGeom>
-          <a:noFill/>
-        </p:spPr>
-        <p:txBody>
-          <a:bodyPr wrap="square">
-            <a:spAutoFit/>
-          </a:bodyPr>
-          <a:lstStyle/>
-          <a:p>
-            <a:pPr algn="r"/>
-            <a:r>
-              <a:rPr sz="1000" b="0">
-                <a:solidFill>
-                  <a:srgbClr val="6B7280"/>
-                </a:solidFill>
-                <a:latin typeface="Calibri"/>
-              </a:rPr>
-              <a:t>18/21</a:t>
-            </a:r>
-          </a:p>
-        </p:txBody>
-      </p:sp>
-    </p:spTree>
-  </p:cSld>
-  <p:clrMapOvr>
-    <a:masterClrMapping/>
-  </p:clrMapOvr>
-</p:sld>
-</file>
-
-<file path=ppt/slides/slide19.xml><?xml version="1.0" encoding="utf-8"?>
-<p:sld xmlns:a="http://schemas.openxmlformats.org/drawingml/2006/main" xmlns:p="http://schemas.openxmlformats.org/presentationml/2006/main" xmlns:r="http://schemas.openxmlformats.org/officeDocument/2006/relationships">
-  <p:cSld>
-    <p:bg>
-      <p:bgPr>
-        <a:solidFill>
-          <a:srgbClr val="FFFFFF"/>
-        </a:solidFill>
-        <a:effectLst/>
-      </p:bgPr>
-    </p:bg>
-    <p:spTree>
-      <p:nvGrpSpPr>
-        <p:cNvPr id="1" name=""/>
-        <p:cNvGrpSpPr/>
-        <p:nvPr/>
-      </p:nvGrpSpPr>
-      <p:grpSpPr/>
-      <p:sp>
-        <p:nvSpPr>
-          <p:cNvPr id="2" name="Rectangle 1"/>
-          <p:cNvSpPr/>
-          <p:nvPr/>
-        </p:nvSpPr>
-        <p:spPr>
-          <a:xfrm>
-            <a:off x="0" y="0"/>
-            <a:ext cx="12191695" cy="1051560"/>
-          </a:xfrm>
-          <a:prstGeom prst="rect">
-            <a:avLst/>
-          </a:prstGeom>
-          <a:solidFill>
-            <a:srgbClr val="0B1F3A"/>
-          </a:solidFill>
-          <a:ln>
-            <a:noFill/>
-          </a:ln>
-          <a:effectLst/>
-        </p:spPr>
-        <p:style>
-          <a:lnRef idx="1">
-            <a:schemeClr val="accent1"/>
-          </a:lnRef>
-          <a:fillRef idx="3">
-            <a:schemeClr val="accent1"/>
-          </a:fillRef>
-          <a:effectRef idx="2">
-            <a:schemeClr val="accent1"/>
-          </a:effectRef>
-          <a:fontRef idx="minor">
-            <a:schemeClr val="lt1"/>
-          </a:fontRef>
-        </p:style>
-        <p:txBody>
-          <a:bodyPr rtlCol="0" anchor="ctr"/>
-          <a:lstStyle/>
-          <a:p>
-            <a:pPr algn="ctr"/>
-          </a:p>
-        </p:txBody>
-      </p:sp>
-      <p:sp>
-        <p:nvSpPr>
-          <p:cNvPr id="3" name="Rectangle 2"/>
-          <p:cNvSpPr/>
-          <p:nvPr/>
-        </p:nvSpPr>
-        <p:spPr>
-          <a:xfrm>
-            <a:off x="0" y="1051560"/>
-            <a:ext cx="12191695" cy="54864"/>
-          </a:xfrm>
-          <a:prstGeom prst="rect">
-            <a:avLst/>
-          </a:prstGeom>
-          <a:solidFill>
-            <a:srgbClr val="128C8C"/>
-          </a:solidFill>
-          <a:ln>
-            <a:noFill/>
-          </a:ln>
-          <a:effectLst/>
-        </p:spPr>
-        <p:style>
-          <a:lnRef idx="1">
-            <a:schemeClr val="accent1"/>
-          </a:lnRef>
-          <a:fillRef idx="3">
-            <a:schemeClr val="accent1"/>
-          </a:fillRef>
-          <a:effectRef idx="2">
-            <a:schemeClr val="accent1"/>
-          </a:effectRef>
-          <a:fontRef idx="minor">
-            <a:schemeClr val="lt1"/>
-          </a:fontRef>
-        </p:style>
-        <p:txBody>
-          <a:bodyPr rtlCol="0" anchor="ctr"/>
-          <a:lstStyle/>
-          <a:p>
-            <a:pPr algn="ctr"/>
-          </a:p>
-        </p:txBody>
-      </p:sp>
-      <p:sp>
-        <p:nvSpPr>
-          <p:cNvPr id="4" name="TextBox 3"/>
-          <p:cNvSpPr txBox="1"/>
-          <p:nvPr/>
-        </p:nvSpPr>
-        <p:spPr>
-          <a:xfrm>
-            <a:off x="548640" y="201168"/>
-            <a:ext cx="11064240" cy="731520"/>
-          </a:xfrm>
-          <a:prstGeom prst="rect">
-            <a:avLst/>
-          </a:prstGeom>
-          <a:noFill/>
-        </p:spPr>
-        <p:txBody>
-          <a:bodyPr wrap="square" anchor="ctr">
-            <a:spAutoFit/>
-          </a:bodyPr>
-          <a:lstStyle/>
-          <a:p>
-            <a:pPr algn="l"/>
-            <a:r>
-              <a:rPr sz="2800" b="1">
-                <a:solidFill>
-                  <a:srgbClr val="FFFFFF"/>
-                </a:solidFill>
-                <a:latin typeface="Calibri"/>
-              </a:rPr>
-              <a:t>Attention in 3 Lines of NumPy</a:t>
-            </a:r>
-          </a:p>
-        </p:txBody>
-      </p:sp>
-      <p:sp>
-        <p:nvSpPr>
-          <p:cNvPr id="5" name="Rectangle 4"/>
-          <p:cNvSpPr/>
-          <p:nvPr/>
-        </p:nvSpPr>
-        <p:spPr>
-          <a:xfrm>
-            <a:off x="548640" y="1325880"/>
-            <a:ext cx="11064240" cy="4480560"/>
-          </a:xfrm>
-          <a:prstGeom prst="rect">
-            <a:avLst/>
-          </a:prstGeom>
-          <a:solidFill>
-            <a:srgbClr val="1E1E1E"/>
-          </a:solidFill>
-          <a:ln>
-            <a:noFill/>
-          </a:ln>
-          <a:effectLst/>
-        </p:spPr>
-        <p:style>
-          <a:lnRef idx="1">
-            <a:schemeClr val="accent1"/>
-          </a:lnRef>
-          <a:fillRef idx="3">
-            <a:schemeClr val="accent1"/>
-          </a:fillRef>
-          <a:effectRef idx="2">
-            <a:schemeClr val="accent1"/>
-          </a:effectRef>
-          <a:fontRef idx="minor">
-            <a:schemeClr val="lt1"/>
-          </a:fontRef>
-        </p:style>
-        <p:txBody>
-          <a:bodyPr rtlCol="0" anchor="ctr" wrap="square" lIns="182880" tIns="137160"/>
-          <a:lstStyle/>
-          <a:p>
-            <a:pPr algn="ctr"/>
-            <a:r>
-              <a:rPr sz="1500">
-                <a:solidFill>
-                  <a:srgbClr val="E6E6E6"/>
-                </a:solidFill>
-                <a:latin typeface="Consolas"/>
-              </a:rPr>
-              <a:t>scores  = (Q @ K.T) / np.sqrt(d)   # match strength</a:t>
-            </a:r>
-          </a:p>
-          <a:p>
-            <a:r>
-              <a:rPr sz="1500">
-                <a:solidFill>
-                  <a:srgbClr val="E6E6E6"/>
-                </a:solidFill>
-                <a:latin typeface="Consolas"/>
-              </a:rPr>
-              <a:t>weights = softmax_rows(scores)     # rows sum to 1</a:t>
-            </a:r>
-          </a:p>
-          <a:p>
-            <a:r>
-              <a:rPr sz="1500">
-                <a:solidFill>
-                  <a:srgbClr val="E6E6E6"/>
-                </a:solidFill>
-                <a:latin typeface="Consolas"/>
-              </a:rPr>
-              <a:t>output  = weights @ V              # context mix</a:t>
-            </a:r>
-          </a:p>
-          <a:p>
-            <a:r>
-              <a:rPr sz="1500">
-                <a:solidFill>
-                  <a:srgbClr val="E6E6E6"/>
-                </a:solidFill>
-                <a:latin typeface="Consolas"/>
-              </a:rPr>
-              <a:t> </a:t>
-            </a:r>
-          </a:p>
-          <a:p>
-            <a:r>
-              <a:rPr sz="1500">
-                <a:solidFill>
-                  <a:srgbClr val="E6E6E6"/>
-                </a:solidFill>
-                <a:latin typeface="Consolas"/>
-              </a:rPr>
-              <a:t># plot 'weights' as a heatmap -&gt; the engine, made visible</a:t>
-            </a:r>
-          </a:p>
-        </p:txBody>
-      </p:sp>
-      <p:sp>
-        <p:nvSpPr>
-          <p:cNvPr id="6" name="TextBox 5"/>
-          <p:cNvSpPr txBox="1"/>
-          <p:nvPr/>
-        </p:nvSpPr>
-        <p:spPr>
-          <a:xfrm>
-            <a:off x="548640" y="5897880"/>
-            <a:ext cx="10515600" cy="457200"/>
-          </a:xfrm>
-          <a:prstGeom prst="rect">
-            <a:avLst/>
-          </a:prstGeom>
-          <a:noFill/>
-        </p:spPr>
-        <p:txBody>
-          <a:bodyPr wrap="square">
-            <a:spAutoFit/>
-          </a:bodyPr>
-          <a:lstStyle/>
-          <a:p>
-            <a:pPr algn="l"/>
-            <a:r>
-              <a:rPr sz="1400" b="0">
-                <a:solidFill>
-                  <a:srgbClr val="6B7280"/>
-                </a:solidFill>
-                <a:latin typeface="Calibri"/>
-              </a:rPr>
-              <a:t>code/04_attention_from_scratch.ipynb — the operation inside every LLM, in pure NumPy.</a:t>
-            </a:r>
-          </a:p>
-        </p:txBody>
-      </p:sp>
-      <p:sp>
-        <p:nvSpPr>
-          <p:cNvPr id="7" name="TextBox 6"/>
-          <p:cNvSpPr txBox="1"/>
-          <p:nvPr/>
-        </p:nvSpPr>
-        <p:spPr>
-          <a:xfrm>
-            <a:off x="365760" y="6446520"/>
-            <a:ext cx="8229600" cy="365760"/>
-          </a:xfrm>
-          <a:prstGeom prst="rect">
-            <a:avLst/>
-          </a:prstGeom>
-          <a:noFill/>
-        </p:spPr>
-        <p:txBody>
-          <a:bodyPr wrap="square">
-            <a:spAutoFit/>
-          </a:bodyPr>
-          <a:lstStyle/>
-          <a:p>
-            <a:pPr algn="l"/>
-            <a:r>
-              <a:rPr sz="1000" b="0">
-                <a:solidFill>
-                  <a:srgbClr val="6B7280"/>
-                </a:solidFill>
-                <a:latin typeface="Calibri"/>
-              </a:rPr>
-              <a:t>Palomar College · CSCI 250 · Fall 2026</a:t>
-            </a:r>
-          </a:p>
-        </p:txBody>
-      </p:sp>
-      <p:sp>
-        <p:nvSpPr>
-          <p:cNvPr id="8" name="TextBox 7"/>
-          <p:cNvSpPr txBox="1"/>
-          <p:nvPr/>
-        </p:nvSpPr>
-        <p:spPr>
-          <a:xfrm>
-            <a:off x="11155680" y="6446520"/>
-            <a:ext cx="822960" cy="365760"/>
-          </a:xfrm>
-          <a:prstGeom prst="rect">
-            <a:avLst/>
-          </a:prstGeom>
-          <a:noFill/>
-        </p:spPr>
-        <p:txBody>
-          <a:bodyPr wrap="square">
-            <a:spAutoFit/>
-          </a:bodyPr>
-          <a:lstStyle/>
-          <a:p>
-            <a:pPr algn="r"/>
-            <a:r>
-              <a:rPr sz="1000" b="0">
-                <a:solidFill>
-                  <a:srgbClr val="6B7280"/>
-                </a:solidFill>
-                <a:latin typeface="Calibri"/>
-              </a:rPr>
-              <a:t>19/21</a:t>
+              <a:t>16/16</a:t>
             </a:r>
           </a:p>
         </p:txBody>
@@ -6304,700 +5772,7 @@
                 </a:solidFill>
                 <a:latin typeface="Calibri"/>
               </a:rPr>
-              <a:t>2/21</a:t>
-            </a:r>
-          </a:p>
-        </p:txBody>
-      </p:sp>
-    </p:spTree>
-  </p:cSld>
-  <p:clrMapOvr>
-    <a:masterClrMapping/>
-  </p:clrMapOvr>
-</p:sld>
-</file>
-
-<file path=ppt/slides/slide20.xml><?xml version="1.0" encoding="utf-8"?>
-<p:sld xmlns:a="http://schemas.openxmlformats.org/drawingml/2006/main" xmlns:p="http://schemas.openxmlformats.org/presentationml/2006/main" xmlns:r="http://schemas.openxmlformats.org/officeDocument/2006/relationships">
-  <p:cSld>
-    <p:bg>
-      <p:bgPr>
-        <a:solidFill>
-          <a:srgbClr val="FFFFFF"/>
-        </a:solidFill>
-        <a:effectLst/>
-      </p:bgPr>
-    </p:bg>
-    <p:spTree>
-      <p:nvGrpSpPr>
-        <p:cNvPr id="1" name=""/>
-        <p:cNvGrpSpPr/>
-        <p:nvPr/>
-      </p:nvGrpSpPr>
-      <p:grpSpPr/>
-      <p:sp>
-        <p:nvSpPr>
-          <p:cNvPr id="2" name="Rectangle 1"/>
-          <p:cNvSpPr/>
-          <p:nvPr/>
-        </p:nvSpPr>
-        <p:spPr>
-          <a:xfrm>
-            <a:off x="0" y="0"/>
-            <a:ext cx="12191695" cy="1051560"/>
-          </a:xfrm>
-          <a:prstGeom prst="rect">
-            <a:avLst/>
-          </a:prstGeom>
-          <a:solidFill>
-            <a:srgbClr val="0B1F3A"/>
-          </a:solidFill>
-          <a:ln>
-            <a:noFill/>
-          </a:ln>
-          <a:effectLst/>
-        </p:spPr>
-        <p:style>
-          <a:lnRef idx="1">
-            <a:schemeClr val="accent1"/>
-          </a:lnRef>
-          <a:fillRef idx="3">
-            <a:schemeClr val="accent1"/>
-          </a:fillRef>
-          <a:effectRef idx="2">
-            <a:schemeClr val="accent1"/>
-          </a:effectRef>
-          <a:fontRef idx="minor">
-            <a:schemeClr val="lt1"/>
-          </a:fontRef>
-        </p:style>
-        <p:txBody>
-          <a:bodyPr rtlCol="0" anchor="ctr"/>
-          <a:lstStyle/>
-          <a:p>
-            <a:pPr algn="ctr"/>
-          </a:p>
-        </p:txBody>
-      </p:sp>
-      <p:sp>
-        <p:nvSpPr>
-          <p:cNvPr id="3" name="Rectangle 2"/>
-          <p:cNvSpPr/>
-          <p:nvPr/>
-        </p:nvSpPr>
-        <p:spPr>
-          <a:xfrm>
-            <a:off x="0" y="1051560"/>
-            <a:ext cx="12191695" cy="54864"/>
-          </a:xfrm>
-          <a:prstGeom prst="rect">
-            <a:avLst/>
-          </a:prstGeom>
-          <a:solidFill>
-            <a:srgbClr val="128C8C"/>
-          </a:solidFill>
-          <a:ln>
-            <a:noFill/>
-          </a:ln>
-          <a:effectLst/>
-        </p:spPr>
-        <p:style>
-          <a:lnRef idx="1">
-            <a:schemeClr val="accent1"/>
-          </a:lnRef>
-          <a:fillRef idx="3">
-            <a:schemeClr val="accent1"/>
-          </a:fillRef>
-          <a:effectRef idx="2">
-            <a:schemeClr val="accent1"/>
-          </a:effectRef>
-          <a:fontRef idx="minor">
-            <a:schemeClr val="lt1"/>
-          </a:fontRef>
-        </p:style>
-        <p:txBody>
-          <a:bodyPr rtlCol="0" anchor="ctr"/>
-          <a:lstStyle/>
-          <a:p>
-            <a:pPr algn="ctr"/>
-          </a:p>
-        </p:txBody>
-      </p:sp>
-      <p:sp>
-        <p:nvSpPr>
-          <p:cNvPr id="4" name="TextBox 3"/>
-          <p:cNvSpPr txBox="1"/>
-          <p:nvPr/>
-        </p:nvSpPr>
-        <p:spPr>
-          <a:xfrm>
-            <a:off x="548640" y="201168"/>
-            <a:ext cx="11064240" cy="731520"/>
-          </a:xfrm>
-          <a:prstGeom prst="rect">
-            <a:avLst/>
-          </a:prstGeom>
-          <a:noFill/>
-        </p:spPr>
-        <p:txBody>
-          <a:bodyPr wrap="square" anchor="ctr">
-            <a:spAutoFit/>
-          </a:bodyPr>
-          <a:lstStyle/>
-          <a:p>
-            <a:pPr algn="l"/>
-            <a:r>
-              <a:rPr sz="2800" b="1">
-                <a:solidFill>
-                  <a:srgbClr val="FFFFFF"/>
-                </a:solidFill>
-                <a:latin typeface="Calibri"/>
-              </a:rPr>
-              <a:t>Three Ways to Run a Model</a:t>
-            </a:r>
-          </a:p>
-        </p:txBody>
-      </p:sp>
-      <p:sp>
-        <p:nvSpPr>
-          <p:cNvPr id="5" name="TextBox 4"/>
-          <p:cNvSpPr txBox="1"/>
-          <p:nvPr/>
-        </p:nvSpPr>
-        <p:spPr>
-          <a:xfrm>
-            <a:off x="731520" y="1280160"/>
-            <a:ext cx="5120640" cy="548640"/>
-          </a:xfrm>
-          <a:prstGeom prst="rect">
-            <a:avLst/>
-          </a:prstGeom>
-          <a:noFill/>
-        </p:spPr>
-        <p:txBody>
-          <a:bodyPr wrap="square">
-            <a:spAutoFit/>
-          </a:bodyPr>
-          <a:lstStyle/>
-          <a:p>
-            <a:pPr algn="l"/>
-            <a:r>
-              <a:rPr sz="2000" b="1">
-                <a:solidFill>
-                  <a:srgbClr val="128C8C"/>
-                </a:solidFill>
-                <a:latin typeface="Calibri"/>
-              </a:rPr>
-              <a:t>Cloud APIs (need a key)</a:t>
-            </a:r>
-          </a:p>
-        </p:txBody>
-      </p:sp>
-      <p:sp>
-        <p:nvSpPr>
-          <p:cNvPr id="6" name="TextBox 5"/>
-          <p:cNvSpPr txBox="1"/>
-          <p:nvPr/>
-        </p:nvSpPr>
-        <p:spPr>
-          <a:xfrm>
-            <a:off x="731520" y="1828800"/>
-            <a:ext cx="5120640" cy="4206240"/>
-          </a:xfrm>
-          <a:prstGeom prst="rect">
-            <a:avLst/>
-          </a:prstGeom>
-          <a:noFill/>
-        </p:spPr>
-        <p:txBody>
-          <a:bodyPr wrap="square">
-            <a:spAutoFit/>
-          </a:bodyPr>
-          <a:lstStyle/>
-          <a:p>
-            <a:pPr>
-              <a:spcAft>
-                <a:spcPts val="800"/>
-              </a:spcAft>
-            </a:pPr>
-            <a:r>
-              <a:rPr sz="1800">
-                <a:solidFill>
-                  <a:srgbClr val="1A1A1A"/>
-                </a:solidFill>
-                <a:latin typeface="Calibri"/>
-              </a:rPr>
-              <a:t>• Anthropic Claude — messages.create</a:t>
-            </a:r>
-          </a:p>
-          <a:p>
-            <a:pPr>
-              <a:spcAft>
-                <a:spcPts val="800"/>
-              </a:spcAft>
-            </a:pPr>
-            <a:r>
-              <a:rPr sz="1800">
-                <a:solidFill>
-                  <a:srgbClr val="1A1A1A"/>
-                </a:solidFill>
-                <a:latin typeface="Calibri"/>
-              </a:rPr>
-              <a:t>• Google Gemini + AI Studio</a:t>
-            </a:r>
-          </a:p>
-        </p:txBody>
-      </p:sp>
-      <p:sp>
-        <p:nvSpPr>
-          <p:cNvPr id="7" name="TextBox 6"/>
-          <p:cNvSpPr txBox="1"/>
-          <p:nvPr/>
-        </p:nvSpPr>
-        <p:spPr>
-          <a:xfrm>
-            <a:off x="6309360" y="1280160"/>
-            <a:ext cx="5120640" cy="548640"/>
-          </a:xfrm>
-          <a:prstGeom prst="rect">
-            <a:avLst/>
-          </a:prstGeom>
-          <a:noFill/>
-        </p:spPr>
-        <p:txBody>
-          <a:bodyPr wrap="square">
-            <a:spAutoFit/>
-          </a:bodyPr>
-          <a:lstStyle/>
-          <a:p>
-            <a:pPr algn="l"/>
-            <a:r>
-              <a:rPr sz="2000" b="1">
-                <a:solidFill>
-                  <a:srgbClr val="128C8C"/>
-                </a:solidFill>
-                <a:latin typeface="Calibri"/>
-              </a:rPr>
-              <a:t>Local (no key, no cost)</a:t>
-            </a:r>
-          </a:p>
-        </p:txBody>
-      </p:sp>
-      <p:sp>
-        <p:nvSpPr>
-          <p:cNvPr id="8" name="TextBox 7"/>
-          <p:cNvSpPr txBox="1"/>
-          <p:nvPr/>
-        </p:nvSpPr>
-        <p:spPr>
-          <a:xfrm>
-            <a:off x="6309360" y="1828800"/>
-            <a:ext cx="5120640" cy="4206240"/>
-          </a:xfrm>
-          <a:prstGeom prst="rect">
-            <a:avLst/>
-          </a:prstGeom>
-          <a:noFill/>
-        </p:spPr>
-        <p:txBody>
-          <a:bodyPr wrap="square">
-            <a:spAutoFit/>
-          </a:bodyPr>
-          <a:lstStyle/>
-          <a:p>
-            <a:pPr>
-              <a:spcAft>
-                <a:spcPts val="800"/>
-              </a:spcAft>
-            </a:pPr>
-            <a:r>
-              <a:rPr sz="1800">
-                <a:solidFill>
-                  <a:srgbClr val="1A1A1A"/>
-                </a:solidFill>
-                <a:latin typeface="Calibri"/>
-              </a:rPr>
-              <a:t>• Ollama (Llama, Mistral, Gemma)</a:t>
-            </a:r>
-          </a:p>
-          <a:p>
-            <a:pPr>
-              <a:spcAft>
-                <a:spcPts val="800"/>
-              </a:spcAft>
-            </a:pPr>
-            <a:r>
-              <a:rPr sz="1800">
-                <a:solidFill>
-                  <a:srgbClr val="1A1A1A"/>
-                </a:solidFill>
-                <a:latin typeface="Calibri"/>
-              </a:rPr>
-              <a:t>• Hugging Face transformers</a:t>
-            </a:r>
-          </a:p>
-        </p:txBody>
-      </p:sp>
-      <p:sp>
-        <p:nvSpPr>
-          <p:cNvPr id="9" name="TextBox 8"/>
-          <p:cNvSpPr txBox="1"/>
-          <p:nvPr/>
-        </p:nvSpPr>
-        <p:spPr>
-          <a:xfrm>
-            <a:off x="365760" y="6446520"/>
-            <a:ext cx="8229600" cy="365760"/>
-          </a:xfrm>
-          <a:prstGeom prst="rect">
-            <a:avLst/>
-          </a:prstGeom>
-          <a:noFill/>
-        </p:spPr>
-        <p:txBody>
-          <a:bodyPr wrap="square">
-            <a:spAutoFit/>
-          </a:bodyPr>
-          <a:lstStyle/>
-          <a:p>
-            <a:pPr algn="l"/>
-            <a:r>
-              <a:rPr sz="1000" b="0">
-                <a:solidFill>
-                  <a:srgbClr val="6B7280"/>
-                </a:solidFill>
-                <a:latin typeface="Calibri"/>
-              </a:rPr>
-              <a:t>Palomar College · CSCI 250 · Fall 2026</a:t>
-            </a:r>
-          </a:p>
-        </p:txBody>
-      </p:sp>
-      <p:sp>
-        <p:nvSpPr>
-          <p:cNvPr id="10" name="TextBox 9"/>
-          <p:cNvSpPr txBox="1"/>
-          <p:nvPr/>
-        </p:nvSpPr>
-        <p:spPr>
-          <a:xfrm>
-            <a:off x="11155680" y="6446520"/>
-            <a:ext cx="822960" cy="365760"/>
-          </a:xfrm>
-          <a:prstGeom prst="rect">
-            <a:avLst/>
-          </a:prstGeom>
-          <a:noFill/>
-        </p:spPr>
-        <p:txBody>
-          <a:bodyPr wrap="square">
-            <a:spAutoFit/>
-          </a:bodyPr>
-          <a:lstStyle/>
-          <a:p>
-            <a:pPr algn="r"/>
-            <a:r>
-              <a:rPr sz="1000" b="0">
-                <a:solidFill>
-                  <a:srgbClr val="6B7280"/>
-                </a:solidFill>
-                <a:latin typeface="Calibri"/>
-              </a:rPr>
-              <a:t>20/21</a:t>
-            </a:r>
-          </a:p>
-        </p:txBody>
-      </p:sp>
-    </p:spTree>
-  </p:cSld>
-  <p:clrMapOvr>
-    <a:masterClrMapping/>
-  </p:clrMapOvr>
-</p:sld>
-</file>
-
-<file path=ppt/slides/slide21.xml><?xml version="1.0" encoding="utf-8"?>
-<p:sld xmlns:a="http://schemas.openxmlformats.org/drawingml/2006/main" xmlns:p="http://schemas.openxmlformats.org/presentationml/2006/main" xmlns:r="http://schemas.openxmlformats.org/officeDocument/2006/relationships">
-  <p:cSld>
-    <p:bg>
-      <p:bgPr>
-        <a:solidFill>
-          <a:srgbClr val="0B1F3A"/>
-        </a:solidFill>
-        <a:effectLst/>
-      </p:bgPr>
-    </p:bg>
-    <p:spTree>
-      <p:nvGrpSpPr>
-        <p:cNvPr id="1" name=""/>
-        <p:cNvGrpSpPr/>
-        <p:nvPr/>
-      </p:nvGrpSpPr>
-      <p:grpSpPr/>
-      <p:sp>
-        <p:nvSpPr>
-          <p:cNvPr id="2" name="TextBox 1"/>
-          <p:cNvSpPr txBox="1"/>
-          <p:nvPr/>
-        </p:nvSpPr>
-        <p:spPr>
-          <a:xfrm>
-            <a:off x="822960" y="731520"/>
-            <a:ext cx="10515600" cy="822960"/>
-          </a:xfrm>
-          <a:prstGeom prst="rect">
-            <a:avLst/>
-          </a:prstGeom>
-          <a:noFill/>
-        </p:spPr>
-        <p:txBody>
-          <a:bodyPr wrap="square">
-            <a:spAutoFit/>
-          </a:bodyPr>
-          <a:lstStyle/>
-          <a:p>
-            <a:pPr algn="l"/>
-            <a:r>
-              <a:rPr sz="3000" b="1">
-                <a:solidFill>
-                  <a:srgbClr val="FFFFFF"/>
-                </a:solidFill>
-                <a:latin typeface="Calibri"/>
-              </a:rPr>
-              <a:t>This Week — To Do</a:t>
-            </a:r>
-          </a:p>
-        </p:txBody>
-      </p:sp>
-      <p:sp>
-        <p:nvSpPr>
-          <p:cNvPr id="3" name="Rectangle 2"/>
-          <p:cNvSpPr/>
-          <p:nvPr/>
-        </p:nvSpPr>
-        <p:spPr>
-          <a:xfrm>
-            <a:off x="822960" y="1600200"/>
-            <a:ext cx="3657600" cy="45720"/>
-          </a:xfrm>
-          <a:prstGeom prst="rect">
-            <a:avLst/>
-          </a:prstGeom>
-          <a:solidFill>
-            <a:srgbClr val="128C8C"/>
-          </a:solidFill>
-          <a:ln>
-            <a:noFill/>
-          </a:ln>
-          <a:effectLst/>
-        </p:spPr>
-        <p:style>
-          <a:lnRef idx="1">
-            <a:schemeClr val="accent1"/>
-          </a:lnRef>
-          <a:fillRef idx="3">
-            <a:schemeClr val="accent1"/>
-          </a:fillRef>
-          <a:effectRef idx="2">
-            <a:schemeClr val="accent1"/>
-          </a:effectRef>
-          <a:fontRef idx="minor">
-            <a:schemeClr val="lt1"/>
-          </a:fontRef>
-        </p:style>
-        <p:txBody>
-          <a:bodyPr rtlCol="0" anchor="ctr"/>
-          <a:lstStyle/>
-          <a:p>
-            <a:pPr algn="ctr"/>
-          </a:p>
-        </p:txBody>
-      </p:sp>
-      <p:sp>
-        <p:nvSpPr>
-          <p:cNvPr id="4" name="TextBox 3"/>
-          <p:cNvSpPr txBox="1"/>
-          <p:nvPr/>
-        </p:nvSpPr>
-        <p:spPr>
-          <a:xfrm>
-            <a:off x="822960" y="1920240"/>
-            <a:ext cx="10515600" cy="4206240"/>
-          </a:xfrm>
-          <a:prstGeom prst="rect">
-            <a:avLst/>
-          </a:prstGeom>
-          <a:noFill/>
-        </p:spPr>
-        <p:txBody>
-          <a:bodyPr wrap="square">
-            <a:spAutoFit/>
-          </a:bodyPr>
-          <a:lstStyle/>
-          <a:p>
-            <a:pPr>
-              <a:spcAft>
-                <a:spcPts val="1200"/>
-              </a:spcAft>
-            </a:pPr>
-            <a:r>
-              <a:rPr sz="2200">
-                <a:solidFill>
-                  <a:srgbClr val="FFFFFF"/>
-                </a:solidFill>
-                <a:latin typeface="Calibri"/>
-              </a:rPr>
-              <a:t>✓ Read the Compact Guide to LLMs (tokens, context, sampling)</a:t>
-            </a:r>
-          </a:p>
-          <a:p>
-            <a:pPr>
-              <a:spcAft>
-                <a:spcPts val="1200"/>
-              </a:spcAft>
-            </a:pPr>
-            <a:r>
-              <a:rPr sz="2200">
-                <a:solidFill>
-                  <a:srgbClr val="FFFFFF"/>
-                </a:solidFill>
-                <a:latin typeface="Calibri"/>
-              </a:rPr>
-              <a:t>✓ Run 01_llm_concepts.ipynb + 02_claude_gemini_local.ipynb</a:t>
-            </a:r>
-          </a:p>
-          <a:p>
-            <a:pPr>
-              <a:spcAft>
-                <a:spcPts val="1200"/>
-              </a:spcAft>
-            </a:pPr>
-            <a:r>
-              <a:rPr sz="2200">
-                <a:solidFill>
-                  <a:srgbClr val="FFFFFF"/>
-                </a:solidFill>
-                <a:latin typeface="Calibri"/>
-              </a:rPr>
-              <a:t>✓ Build the BPE tokenizer (03) — fill-ins + round-trip on your text</a:t>
-            </a:r>
-          </a:p>
-          <a:p>
-            <a:pPr>
-              <a:spcAft>
-                <a:spcPts val="1200"/>
-              </a:spcAft>
-            </a:pPr>
-            <a:r>
-              <a:rPr sz="2200">
-                <a:solidFill>
-                  <a:srgbClr val="FFFFFF"/>
-                </a:solidFill>
-                <a:latin typeface="Calibri"/>
-              </a:rPr>
-              <a:t>✓ Build attention (04) — fill-ins + paste your heatmap</a:t>
-            </a:r>
-          </a:p>
-          <a:p>
-            <a:pPr>
-              <a:spcAft>
-                <a:spcPts val="1200"/>
-              </a:spcAft>
-            </a:pPr>
-            <a:r>
-              <a:rPr sz="2200">
-                <a:solidFill>
-                  <a:srgbClr val="FFFFFF"/>
-                </a:solidFill>
-                <a:latin typeface="Calibri"/>
-              </a:rPr>
-              <a:t>✓ Do the hallucination hunt + comparison table</a:t>
-            </a:r>
-          </a:p>
-          <a:p>
-            <a:pPr>
-              <a:spcAft>
-                <a:spcPts val="1200"/>
-              </a:spcAft>
-            </a:pPr>
-            <a:r>
-              <a:rPr sz="2200">
-                <a:solidFill>
-                  <a:srgbClr val="FFFFFF"/>
-                </a:solidFill>
-                <a:latin typeface="Calibri"/>
-              </a:rPr>
-              <a:t>✓ Submit Assignment S1 by Sunday 11:59 PM PT</a:t>
-            </a:r>
-          </a:p>
-        </p:txBody>
-      </p:sp>
-      <p:sp>
-        <p:nvSpPr>
-          <p:cNvPr id="5" name="TextBox 4"/>
-          <p:cNvSpPr txBox="1"/>
-          <p:nvPr/>
-        </p:nvSpPr>
-        <p:spPr>
-          <a:xfrm>
-            <a:off x="365760" y="6446520"/>
-            <a:ext cx="8229600" cy="365760"/>
-          </a:xfrm>
-          <a:prstGeom prst="rect">
-            <a:avLst/>
-          </a:prstGeom>
-          <a:noFill/>
-        </p:spPr>
-        <p:txBody>
-          <a:bodyPr wrap="square">
-            <a:spAutoFit/>
-          </a:bodyPr>
-          <a:lstStyle/>
-          <a:p>
-            <a:pPr algn="l"/>
-            <a:r>
-              <a:rPr sz="1000" b="0">
-                <a:solidFill>
-                  <a:srgbClr val="6B7280"/>
-                </a:solidFill>
-                <a:latin typeface="Calibri"/>
-              </a:rPr>
-              <a:t>Palomar College · CSCI 250 · Fall 2026</a:t>
-            </a:r>
-          </a:p>
-        </p:txBody>
-      </p:sp>
-      <p:sp>
-        <p:nvSpPr>
-          <p:cNvPr id="6" name="TextBox 5"/>
-          <p:cNvSpPr txBox="1"/>
-          <p:nvPr/>
-        </p:nvSpPr>
-        <p:spPr>
-          <a:xfrm>
-            <a:off x="11155680" y="6446520"/>
-            <a:ext cx="822960" cy="365760"/>
-          </a:xfrm>
-          <a:prstGeom prst="rect">
-            <a:avLst/>
-          </a:prstGeom>
-          <a:noFill/>
-        </p:spPr>
-        <p:txBody>
-          <a:bodyPr wrap="square">
-            <a:spAutoFit/>
-          </a:bodyPr>
-          <a:lstStyle/>
-          <a:p>
-            <a:pPr algn="r"/>
-            <a:r>
-              <a:rPr sz="1000" b="0">
-                <a:solidFill>
-                  <a:srgbClr val="6B7280"/>
-                </a:solidFill>
-                <a:latin typeface="Calibri"/>
-              </a:rPr>
-              <a:t>21/21</a:t>
+              <a:t>2/16</a:t>
             </a:r>
           </a:p>
         </p:txBody>
@@ -7380,7 +6155,7 @@
                 </a:solidFill>
                 <a:latin typeface="Calibri"/>
               </a:rPr>
-              <a:t>4/21</a:t>
+              <a:t>4/16</a:t>
             </a:r>
           </a:p>
         </p:txBody>
@@ -7399,7 +6174,7 @@
     <p:bg>
       <p:bgPr>
         <a:solidFill>
-          <a:srgbClr val="128C8C"/>
+          <a:srgbClr val="FFFFFF"/>
         </a:solidFill>
         <a:effectLst/>
       </p:bgPr>
@@ -7413,14 +6188,102 @@
       <p:grpSpPr/>
       <p:sp>
         <p:nvSpPr>
-          <p:cNvPr id="2" name="TextBox 1"/>
+          <p:cNvPr id="2" name="Rectangle 1"/>
+          <p:cNvSpPr/>
+          <p:nvPr/>
+        </p:nvSpPr>
+        <p:spPr>
+          <a:xfrm>
+            <a:off x="0" y="0"/>
+            <a:ext cx="12191695" cy="1051560"/>
+          </a:xfrm>
+          <a:prstGeom prst="rect">
+            <a:avLst/>
+          </a:prstGeom>
+          <a:solidFill>
+            <a:srgbClr val="0B1F3A"/>
+          </a:solidFill>
+          <a:ln>
+            <a:noFill/>
+          </a:ln>
+          <a:effectLst/>
+        </p:spPr>
+        <p:style>
+          <a:lnRef idx="1">
+            <a:schemeClr val="accent1"/>
+          </a:lnRef>
+          <a:fillRef idx="3">
+            <a:schemeClr val="accent1"/>
+          </a:fillRef>
+          <a:effectRef idx="2">
+            <a:schemeClr val="accent1"/>
+          </a:effectRef>
+          <a:fontRef idx="minor">
+            <a:schemeClr val="lt1"/>
+          </a:fontRef>
+        </p:style>
+        <p:txBody>
+          <a:bodyPr rtlCol="0" anchor="ctr"/>
+          <a:lstStyle/>
+          <a:p>
+            <a:pPr algn="ctr"/>
+          </a:p>
+        </p:txBody>
+      </p:sp>
+      <p:sp>
+        <p:nvSpPr>
+          <p:cNvPr id="3" name="Rectangle 2"/>
+          <p:cNvSpPr/>
+          <p:nvPr/>
+        </p:nvSpPr>
+        <p:spPr>
+          <a:xfrm>
+            <a:off x="0" y="1051560"/>
+            <a:ext cx="12191695" cy="54864"/>
+          </a:xfrm>
+          <a:prstGeom prst="rect">
+            <a:avLst/>
+          </a:prstGeom>
+          <a:solidFill>
+            <a:srgbClr val="128C8C"/>
+          </a:solidFill>
+          <a:ln>
+            <a:noFill/>
+          </a:ln>
+          <a:effectLst/>
+        </p:spPr>
+        <p:style>
+          <a:lnRef idx="1">
+            <a:schemeClr val="accent1"/>
+          </a:lnRef>
+          <a:fillRef idx="3">
+            <a:schemeClr val="accent1"/>
+          </a:fillRef>
+          <a:effectRef idx="2">
+            <a:schemeClr val="accent1"/>
+          </a:effectRef>
+          <a:fontRef idx="minor">
+            <a:schemeClr val="lt1"/>
+          </a:fontRef>
+        </p:style>
+        <p:txBody>
+          <a:bodyPr rtlCol="0" anchor="ctr"/>
+          <a:lstStyle/>
+          <a:p>
+            <a:pPr algn="ctr"/>
+          </a:p>
+        </p:txBody>
+      </p:sp>
+      <p:sp>
+        <p:nvSpPr>
+          <p:cNvPr id="4" name="TextBox 3"/>
           <p:cNvSpPr txBox="1"/>
           <p:nvPr/>
         </p:nvSpPr>
         <p:spPr>
           <a:xfrm>
-            <a:off x="822960" y="2743200"/>
-            <a:ext cx="10515600" cy="1371600"/>
+            <a:off x="548640" y="201168"/>
+            <a:ext cx="11064240" cy="731520"/>
           </a:xfrm>
           <a:prstGeom prst="rect">
             <a:avLst/>
@@ -7435,13 +6298,218 @@
           <a:p>
             <a:pPr algn="l"/>
             <a:r>
-              <a:rPr sz="3600" b="1">
+              <a:rPr sz="2800" b="1">
                 <a:solidFill>
                   <a:srgbClr val="FFFFFF"/>
                 </a:solidFill>
                 <a:latin typeface="Calibri"/>
               </a:rPr>
-              <a:t>Tokens &amp; Context</a:t>
+              <a:t>Tokens &amp; the Context Window</a:t>
+            </a:r>
+          </a:p>
+        </p:txBody>
+      </p:sp>
+      <p:sp>
+        <p:nvSpPr>
+          <p:cNvPr id="5" name="TextBox 4"/>
+          <p:cNvSpPr txBox="1"/>
+          <p:nvPr/>
+        </p:nvSpPr>
+        <p:spPr>
+          <a:xfrm>
+            <a:off x="731520" y="1371600"/>
+            <a:ext cx="10698480" cy="4754880"/>
+          </a:xfrm>
+          <a:prstGeom prst="rect">
+            <a:avLst/>
+          </a:prstGeom>
+          <a:noFill/>
+        </p:spPr>
+        <p:txBody>
+          <a:bodyPr wrap="square">
+            <a:spAutoFit/>
+          </a:bodyPr>
+          <a:lstStyle/>
+          <a:p>
+            <a:pPr>
+              <a:spcAft>
+                <a:spcPts val="800"/>
+              </a:spcAft>
+            </a:pPr>
+            <a:r>
+              <a:rPr sz="2000">
+                <a:solidFill>
+                  <a:srgbClr val="1A1A1A"/>
+                </a:solidFill>
+                <a:latin typeface="Calibri"/>
+              </a:rPr>
+              <a:t>• Models see tokens (sub-word IDs), not characters or words</a:t>
+            </a:r>
+          </a:p>
+          <a:p>
+            <a:pPr>
+              <a:spcAft>
+                <a:spcPts val="800"/>
+              </a:spcAft>
+            </a:pPr>
+            <a:r>
+              <a:rPr sz="2000">
+                <a:solidFill>
+                  <a:srgbClr val="1A1A1A"/>
+                </a:solidFill>
+                <a:latin typeface="Calibri"/>
+              </a:rPr>
+              <a:t>• Rule of thumb: 1 token ≈ 4 chars ≈ 0.75 words; rare words split into several</a:t>
+            </a:r>
+          </a:p>
+          <a:p>
+            <a:pPr>
+              <a:spcAft>
+                <a:spcPts val="800"/>
+              </a:spcAft>
+            </a:pPr>
+            <a:r>
+              <a:rPr sz="2000">
+                <a:solidFill>
+                  <a:srgbClr val="1A1A1A"/>
+                </a:solidFill>
+                <a:latin typeface="Calibri"/>
+              </a:rPr>
+              <a:t>• You pay per token; max_tokens caps the response</a:t>
+            </a:r>
+          </a:p>
+          <a:p>
+            <a:pPr>
+              <a:spcAft>
+                <a:spcPts val="800"/>
+              </a:spcAft>
+            </a:pPr>
+            <a:r>
+              <a:rPr sz="2000">
+                <a:solidFill>
+                  <a:srgbClr val="1A1A1A"/>
+                </a:solidFill>
+                <a:latin typeface="Calibri"/>
+              </a:rPr>
+              <a:t>• Context window = max tokens the model can attend to at once</a:t>
+            </a:r>
+          </a:p>
+          <a:p>
+            <a:pPr lvl="1">
+              <a:spcAft>
+                <a:spcPts val="800"/>
+              </a:spcAft>
+            </a:pPr>
+            <a:r>
+              <a:rPr sz="1800">
+                <a:solidFill>
+                  <a:srgbClr val="6B7280"/>
+                </a:solidFill>
+                <a:latin typeface="Calibri"/>
+              </a:rPr>
+              <a:t>– Prompt + generated reply must both fit inside it</a:t>
+            </a:r>
+          </a:p>
+          <a:p>
+            <a:pPr lvl="1">
+              <a:spcAft>
+                <a:spcPts val="800"/>
+              </a:spcAft>
+            </a:pPr>
+            <a:r>
+              <a:rPr sz="1800">
+                <a:solidFill>
+                  <a:srgbClr val="6B7280"/>
+                </a:solidFill>
+                <a:latin typeface="Calibri"/>
+              </a:rPr>
+              <a:t>– No memory between API calls — the client replays history</a:t>
+            </a:r>
+          </a:p>
+          <a:p>
+            <a:pPr lvl="1">
+              <a:spcAft>
+                <a:spcPts val="800"/>
+              </a:spcAft>
+            </a:pPr>
+            <a:r>
+              <a:rPr sz="1800">
+                <a:solidFill>
+                  <a:srgbClr val="6B7280"/>
+                </a:solidFill>
+                <a:latin typeface="Calibri"/>
+              </a:rPr>
+              <a:t>– Long docs need chunking → RAG (Week 11)</a:t>
+            </a:r>
+          </a:p>
+        </p:txBody>
+      </p:sp>
+      <p:sp>
+        <p:nvSpPr>
+          <p:cNvPr id="6" name="TextBox 5"/>
+          <p:cNvSpPr txBox="1"/>
+          <p:nvPr/>
+        </p:nvSpPr>
+        <p:spPr>
+          <a:xfrm>
+            <a:off x="365760" y="6446520"/>
+            <a:ext cx="8229600" cy="365760"/>
+          </a:xfrm>
+          <a:prstGeom prst="rect">
+            <a:avLst/>
+          </a:prstGeom>
+          <a:noFill/>
+        </p:spPr>
+        <p:txBody>
+          <a:bodyPr wrap="square">
+            <a:spAutoFit/>
+          </a:bodyPr>
+          <a:lstStyle/>
+          <a:p>
+            <a:pPr algn="l"/>
+            <a:r>
+              <a:rPr sz="1000" b="0">
+                <a:solidFill>
+                  <a:srgbClr val="6B7280"/>
+                </a:solidFill>
+                <a:latin typeface="Calibri"/>
+              </a:rPr>
+              <a:t>Palomar College · CSCI 250 · Fall 2026</a:t>
+            </a:r>
+          </a:p>
+        </p:txBody>
+      </p:sp>
+      <p:sp>
+        <p:nvSpPr>
+          <p:cNvPr id="7" name="TextBox 6"/>
+          <p:cNvSpPr txBox="1"/>
+          <p:nvPr/>
+        </p:nvSpPr>
+        <p:spPr>
+          <a:xfrm>
+            <a:off x="11155680" y="6446520"/>
+            <a:ext cx="822960" cy="365760"/>
+          </a:xfrm>
+          <a:prstGeom prst="rect">
+            <a:avLst/>
+          </a:prstGeom>
+          <a:noFill/>
+        </p:spPr>
+        <p:txBody>
+          <a:bodyPr wrap="square">
+            <a:spAutoFit/>
+          </a:bodyPr>
+          <a:lstStyle/>
+          <a:p>
+            <a:pPr algn="r"/>
+            <a:r>
+              <a:rPr sz="1000" b="0">
+                <a:solidFill>
+                  <a:srgbClr val="6B7280"/>
+                </a:solidFill>
+                <a:latin typeface="Calibri"/>
+              </a:rPr>
+              <a:t>5/16</a:t>
             </a:r>
           </a:p>
         </p:txBody>
@@ -7590,21 +6658,151 @@
                 </a:solidFill>
                 <a:latin typeface="Calibri"/>
               </a:rPr>
-              <a:t>Tokens &amp; Tokenization</a:t>
-            </a:r>
-          </a:p>
-        </p:txBody>
-      </p:sp>
-      <p:sp>
-        <p:nvSpPr>
-          <p:cNvPr id="5" name="TextBox 4"/>
+              <a:t>Sampling Parameters</a:t>
+            </a:r>
+          </a:p>
+        </p:txBody>
+      </p:sp>
+      <p:sp>
+        <p:nvSpPr>
+          <p:cNvPr id="5" name="Rectangle 4"/>
+          <p:cNvSpPr/>
+          <p:nvPr/>
+        </p:nvSpPr>
+        <p:spPr>
+          <a:xfrm>
+            <a:off x="548640" y="1325880"/>
+            <a:ext cx="11064240" cy="4480560"/>
+          </a:xfrm>
+          <a:prstGeom prst="rect">
+            <a:avLst/>
+          </a:prstGeom>
+          <a:solidFill>
+            <a:srgbClr val="1E1E1E"/>
+          </a:solidFill>
+          <a:ln>
+            <a:noFill/>
+          </a:ln>
+          <a:effectLst/>
+        </p:spPr>
+        <p:style>
+          <a:lnRef idx="1">
+            <a:schemeClr val="accent1"/>
+          </a:lnRef>
+          <a:fillRef idx="3">
+            <a:schemeClr val="accent1"/>
+          </a:fillRef>
+          <a:effectRef idx="2">
+            <a:schemeClr val="accent1"/>
+          </a:effectRef>
+          <a:fontRef idx="minor">
+            <a:schemeClr val="lt1"/>
+          </a:fontRef>
+        </p:style>
+        <p:txBody>
+          <a:bodyPr rtlCol="0" anchor="ctr" wrap="square" lIns="182880" tIns="137160"/>
+          <a:lstStyle/>
+          <a:p>
+            <a:pPr algn="ctr"/>
+            <a:r>
+              <a:rPr sz="1500">
+                <a:solidFill>
+                  <a:srgbClr val="E6E6E6"/>
+                </a:solidFill>
+                <a:latin typeface="Consolas"/>
+              </a:rPr>
+              <a:t>msg = client.messages.create(</a:t>
+            </a:r>
+          </a:p>
+          <a:p>
+            <a:r>
+              <a:rPr sz="1500">
+                <a:solidFill>
+                  <a:srgbClr val="E6E6E6"/>
+                </a:solidFill>
+                <a:latin typeface="Consolas"/>
+              </a:rPr>
+              <a:t>    model="claude-sonnet-4-6",</a:t>
+            </a:r>
+          </a:p>
+          <a:p>
+            <a:r>
+              <a:rPr sz="1500">
+                <a:solidFill>
+                  <a:srgbClr val="E6E6E6"/>
+                </a:solidFill>
+                <a:latin typeface="Consolas"/>
+              </a:rPr>
+              <a:t>    max_tokens=200,       # caps the RESPONSE length + cost</a:t>
+            </a:r>
+          </a:p>
+          <a:p>
+            <a:r>
+              <a:rPr sz="1500">
+                <a:solidFill>
+                  <a:srgbClr val="E6E6E6"/>
+                </a:solidFill>
+                <a:latin typeface="Consolas"/>
+              </a:rPr>
+              <a:t>    temperature=0.0,      # 0 = focused; ~1.0 = creative</a:t>
+            </a:r>
+          </a:p>
+          <a:p>
+            <a:r>
+              <a:rPr sz="1500">
+                <a:solidFill>
+                  <a:srgbClr val="E6E6E6"/>
+                </a:solidFill>
+                <a:latin typeface="Consolas"/>
+              </a:rPr>
+              <a:t>    messages=[{"role": "user",</a:t>
+            </a:r>
+          </a:p>
+          <a:p>
+            <a:r>
+              <a:rPr sz="1500">
+                <a:solidFill>
+                  <a:srgbClr val="E6E6E6"/>
+                </a:solidFill>
+                <a:latin typeface="Consolas"/>
+              </a:rPr>
+              <a:t>               "content": "List 3 uses of LLMs."}],</a:t>
+            </a:r>
+          </a:p>
+          <a:p>
+            <a:r>
+              <a:rPr sz="1500">
+                <a:solidFill>
+                  <a:srgbClr val="E6E6E6"/>
+                </a:solidFill>
+                <a:latin typeface="Consolas"/>
+              </a:rPr>
+              <a:t>)</a:t>
+            </a:r>
+          </a:p>
+          <a:p>
+            <a:r>
+              <a:rPr sz="1500">
+                <a:solidFill>
+                  <a:srgbClr val="E6E6E6"/>
+                </a:solidFill>
+                <a:latin typeface="Consolas"/>
+              </a:rPr>
+              <a:t>print(msg.content[0].text)</a:t>
+            </a:r>
+          </a:p>
+        </p:txBody>
+      </p:sp>
+      <p:sp>
+        <p:nvSpPr>
+          <p:cNvPr id="6" name="TextBox 5"/>
           <p:cNvSpPr txBox="1"/>
           <p:nvPr/>
         </p:nvSpPr>
         <p:spPr>
           <a:xfrm>
-            <a:off x="731520" y="1371600"/>
-            <a:ext cx="10698480" cy="4754880"/>
+            <a:off x="548640" y="5897880"/>
+            <a:ext cx="10515600" cy="457200"/>
           </a:xfrm>
           <a:prstGeom prst="rect">
             <a:avLst/>
@@ -7617,90 +6815,22 @@
           </a:bodyPr>
           <a:lstStyle/>
           <a:p>
-            <a:pPr>
-              <a:spcAft>
-                <a:spcPts val="800"/>
-              </a:spcAft>
-            </a:pPr>
-            <a:r>
-              <a:rPr sz="2000">
-                <a:solidFill>
-                  <a:srgbClr val="1A1A1A"/>
-                </a:solidFill>
-                <a:latin typeface="Calibri"/>
-              </a:rPr>
-              <a:t>• Models see tokens (sub-word IDs), not characters or words</a:t>
-            </a:r>
-          </a:p>
-          <a:p>
-            <a:pPr>
-              <a:spcAft>
-                <a:spcPts val="800"/>
-              </a:spcAft>
-            </a:pPr>
-            <a:r>
-              <a:rPr sz="2000">
-                <a:solidFill>
-                  <a:srgbClr val="1A1A1A"/>
-                </a:solidFill>
-                <a:latin typeface="Calibri"/>
-              </a:rPr>
-              <a:t>• Rule of thumb: 1 token ≈ 4 chars ≈ 0.75 words</a:t>
-            </a:r>
-          </a:p>
-          <a:p>
-            <a:pPr>
-              <a:spcAft>
-                <a:spcPts val="800"/>
-              </a:spcAft>
-            </a:pPr>
-            <a:r>
-              <a:rPr sz="2000">
-                <a:solidFill>
-                  <a:srgbClr val="1A1A1A"/>
-                </a:solidFill>
-                <a:latin typeface="Calibri"/>
-              </a:rPr>
-              <a:t>• Common words = 1 token; rare words split into several</a:t>
-            </a:r>
-          </a:p>
-          <a:p>
-            <a:pPr lvl="1">
-              <a:spcAft>
-                <a:spcPts val="800"/>
-              </a:spcAft>
-            </a:pPr>
-            <a:r>
-              <a:rPr sz="1800">
+            <a:pPr algn="l"/>
+            <a:r>
+              <a:rPr sz="1400" b="0">
                 <a:solidFill>
                   <a:srgbClr val="6B7280"/>
                 </a:solidFill>
                 <a:latin typeface="Calibri"/>
               </a:rPr>
-              <a:t>– You pay per token; max_tokens caps the response</a:t>
-            </a:r>
-          </a:p>
-          <a:p>
-            <a:pPr lvl="1">
-              <a:spcAft>
-                <a:spcPts val="800"/>
-              </a:spcAft>
-            </a:pPr>
-            <a:r>
-              <a:rPr sz="1800">
-                <a:solidFill>
-                  <a:srgbClr val="6B7280"/>
-                </a:solidFill>
-                <a:latin typeface="Calibri"/>
-              </a:rPr>
-              <a:t>– Prompt + reply must fit the context window</a:t>
-            </a:r>
-          </a:p>
-        </p:txBody>
-      </p:sp>
-      <p:sp>
-        <p:nvSpPr>
-          <p:cNvPr id="6" name="TextBox 5"/>
+              <a:t>temp=0 for extraction/code; temp~0.7–1.0 for brainstorming. top-p = nucleus sampling.</a:t>
+            </a:r>
+          </a:p>
+        </p:txBody>
+      </p:sp>
+      <p:sp>
+        <p:nvSpPr>
+          <p:cNvPr id="7" name="TextBox 6"/>
           <p:cNvSpPr txBox="1"/>
           <p:nvPr/>
         </p:nvSpPr>
@@ -7735,7 +6865,7 @@
       </p:sp>
       <p:sp>
         <p:nvSpPr>
-          <p:cNvPr id="7" name="TextBox 6"/>
+          <p:cNvPr id="8" name="TextBox 7"/>
           <p:cNvSpPr txBox="1"/>
           <p:nvPr/>
         </p:nvSpPr>
@@ -7763,7 +6893,7 @@
                 </a:solidFill>
                 <a:latin typeface="Calibri"/>
               </a:rPr>
-              <a:t>6/21</a:t>
+              <a:t>6/16</a:t>
             </a:r>
           </a:p>
         </p:txBody>
@@ -7912,21 +7042,96 @@
                 </a:solidFill>
                 <a:latin typeface="Calibri"/>
               </a:rPr>
-              <a:t>The Context Window</a:t>
-            </a:r>
-          </a:p>
-        </p:txBody>
-      </p:sp>
-      <p:sp>
-        <p:nvSpPr>
-          <p:cNvPr id="5" name="TextBox 4"/>
+              <a:t>In-Context Learning (Few-Shot)</a:t>
+            </a:r>
+          </a:p>
+        </p:txBody>
+      </p:sp>
+      <p:sp>
+        <p:nvSpPr>
+          <p:cNvPr id="5" name="Rectangle 4"/>
+          <p:cNvSpPr/>
+          <p:nvPr/>
+        </p:nvSpPr>
+        <p:spPr>
+          <a:xfrm>
+            <a:off x="548640" y="1325880"/>
+            <a:ext cx="11064240" cy="4480560"/>
+          </a:xfrm>
+          <a:prstGeom prst="rect">
+            <a:avLst/>
+          </a:prstGeom>
+          <a:solidFill>
+            <a:srgbClr val="1E1E1E"/>
+          </a:solidFill>
+          <a:ln>
+            <a:noFill/>
+          </a:ln>
+          <a:effectLst/>
+        </p:spPr>
+        <p:style>
+          <a:lnRef idx="1">
+            <a:schemeClr val="accent1"/>
+          </a:lnRef>
+          <a:fillRef idx="3">
+            <a:schemeClr val="accent1"/>
+          </a:fillRef>
+          <a:effectRef idx="2">
+            <a:schemeClr val="accent1"/>
+          </a:effectRef>
+          <a:fontRef idx="minor">
+            <a:schemeClr val="lt1"/>
+          </a:fontRef>
+        </p:style>
+        <p:txBody>
+          <a:bodyPr rtlCol="0" anchor="ctr" wrap="square" lIns="182880" tIns="137160"/>
+          <a:lstStyle/>
+          <a:p>
+            <a:pPr algn="ctr"/>
+            <a:r>
+              <a:rPr sz="1500">
+                <a:solidFill>
+                  <a:srgbClr val="E6E6E6"/>
+                </a:solidFill>
+                <a:latin typeface="Consolas"/>
+              </a:rPr>
+              <a:t>Review: "Loved every minute." -&gt; positive</a:t>
+            </a:r>
+          </a:p>
+          <a:p>
+            <a:r>
+              <a:rPr sz="1500">
+                <a:solidFill>
+                  <a:srgbClr val="E6E6E6"/>
+                </a:solidFill>
+                <a:latin typeface="Consolas"/>
+              </a:rPr>
+              <a:t>Review: "A complete waste of time." -&gt; negative</a:t>
+            </a:r>
+          </a:p>
+          <a:p>
+            <a:r>
+              <a:rPr sz="1500">
+                <a:solidFill>
+                  <a:srgbClr val="E6E6E6"/>
+                </a:solidFill>
+                <a:latin typeface="Consolas"/>
+              </a:rPr>
+              <a:t>Review: "The acting saved a dull script." -&gt;</a:t>
+            </a:r>
+          </a:p>
+        </p:txBody>
+      </p:sp>
+      <p:sp>
+        <p:nvSpPr>
+          <p:cNvPr id="6" name="TextBox 5"/>
           <p:cNvSpPr txBox="1"/>
           <p:nvPr/>
         </p:nvSpPr>
         <p:spPr>
           <a:xfrm>
-            <a:off x="731520" y="1371600"/>
-            <a:ext cx="10698480" cy="4754880"/>
+            <a:off x="548640" y="5897880"/>
+            <a:ext cx="10515600" cy="457200"/>
           </a:xfrm>
           <a:prstGeom prst="rect">
             <a:avLst/>
@@ -7939,74 +7144,22 @@
           </a:bodyPr>
           <a:lstStyle/>
           <a:p>
-            <a:pPr>
-              <a:spcAft>
-                <a:spcPts val="800"/>
-              </a:spcAft>
-            </a:pPr>
-            <a:r>
-              <a:rPr sz="2000">
-                <a:solidFill>
-                  <a:srgbClr val="1A1A1A"/>
-                </a:solidFill>
-                <a:latin typeface="Calibri"/>
-              </a:rPr>
-              <a:t>• Max tokens the model can attend to at once</a:t>
-            </a:r>
-          </a:p>
-          <a:p>
-            <a:pPr>
-              <a:spcAft>
-                <a:spcPts val="800"/>
-              </a:spcAft>
-            </a:pPr>
-            <a:r>
-              <a:rPr sz="2000">
-                <a:solidFill>
-                  <a:srgbClr val="1A1A1A"/>
-                </a:solidFill>
-                <a:latin typeface="Calibri"/>
-              </a:rPr>
-              <a:t>• Prompt + generated reply must fit inside it</a:t>
-            </a:r>
-          </a:p>
-          <a:p>
-            <a:pPr>
-              <a:spcAft>
-                <a:spcPts val="800"/>
-              </a:spcAft>
-            </a:pPr>
-            <a:r>
-              <a:rPr sz="2000">
-                <a:solidFill>
-                  <a:srgbClr val="1A1A1A"/>
-                </a:solidFill>
-                <a:latin typeface="Calibri"/>
-              </a:rPr>
-              <a:t>• No memory between API calls — the client replays history</a:t>
-            </a:r>
-          </a:p>
-          <a:p>
-            <a:pPr lvl="1">
-              <a:spcAft>
-                <a:spcPts val="800"/>
-              </a:spcAft>
-            </a:pPr>
-            <a:r>
-              <a:rPr sz="1800">
+            <a:pPr algn="l"/>
+            <a:r>
+              <a:rPr sz="1400" b="0">
                 <a:solidFill>
                   <a:srgbClr val="6B7280"/>
                 </a:solidFill>
                 <a:latin typeface="Calibri"/>
               </a:rPr>
-              <a:t>– Long docs need chunking → RAG (Week 11)</a:t>
-            </a:r>
-          </a:p>
-        </p:txBody>
-      </p:sp>
-      <p:sp>
-        <p:nvSpPr>
-          <p:cNvPr id="6" name="TextBox 5"/>
+              <a:t>Examples in the prompt teach the task + output format — no retraining. Foundation for Week 9.</a:t>
+            </a:r>
+          </a:p>
+        </p:txBody>
+      </p:sp>
+      <p:sp>
+        <p:nvSpPr>
+          <p:cNvPr id="7" name="TextBox 6"/>
           <p:cNvSpPr txBox="1"/>
           <p:nvPr/>
         </p:nvSpPr>
@@ -8041,7 +7194,7 @@
       </p:sp>
       <p:sp>
         <p:nvSpPr>
-          <p:cNvPr id="7" name="TextBox 6"/>
+          <p:cNvPr id="8" name="TextBox 7"/>
           <p:cNvSpPr txBox="1"/>
           <p:nvPr/>
         </p:nvSpPr>
@@ -8069,7 +7222,7 @@
                 </a:solidFill>
                 <a:latin typeface="Calibri"/>
               </a:rPr>
-              <a:t>7/21</a:t>
+              <a:t>7/16</a:t>
             </a:r>
           </a:p>
         </p:txBody>
@@ -8088,7 +7241,7 @@
     <p:bg>
       <p:bgPr>
         <a:solidFill>
-          <a:srgbClr val="128C8C"/>
+          <a:srgbClr val="FFFFFF"/>
         </a:solidFill>
         <a:effectLst/>
       </p:bgPr>
@@ -8102,14 +7255,102 @@
       <p:grpSpPr/>
       <p:sp>
         <p:nvSpPr>
-          <p:cNvPr id="2" name="TextBox 1"/>
+          <p:cNvPr id="2" name="Rectangle 1"/>
+          <p:cNvSpPr/>
+          <p:nvPr/>
+        </p:nvSpPr>
+        <p:spPr>
+          <a:xfrm>
+            <a:off x="0" y="0"/>
+            <a:ext cx="12191695" cy="1051560"/>
+          </a:xfrm>
+          <a:prstGeom prst="rect">
+            <a:avLst/>
+          </a:prstGeom>
+          <a:solidFill>
+            <a:srgbClr val="0B1F3A"/>
+          </a:solidFill>
+          <a:ln>
+            <a:noFill/>
+          </a:ln>
+          <a:effectLst/>
+        </p:spPr>
+        <p:style>
+          <a:lnRef idx="1">
+            <a:schemeClr val="accent1"/>
+          </a:lnRef>
+          <a:fillRef idx="3">
+            <a:schemeClr val="accent1"/>
+          </a:fillRef>
+          <a:effectRef idx="2">
+            <a:schemeClr val="accent1"/>
+          </a:effectRef>
+          <a:fontRef idx="minor">
+            <a:schemeClr val="lt1"/>
+          </a:fontRef>
+        </p:style>
+        <p:txBody>
+          <a:bodyPr rtlCol="0" anchor="ctr"/>
+          <a:lstStyle/>
+          <a:p>
+            <a:pPr algn="ctr"/>
+          </a:p>
+        </p:txBody>
+      </p:sp>
+      <p:sp>
+        <p:nvSpPr>
+          <p:cNvPr id="3" name="Rectangle 2"/>
+          <p:cNvSpPr/>
+          <p:nvPr/>
+        </p:nvSpPr>
+        <p:spPr>
+          <a:xfrm>
+            <a:off x="0" y="1051560"/>
+            <a:ext cx="12191695" cy="54864"/>
+          </a:xfrm>
+          <a:prstGeom prst="rect">
+            <a:avLst/>
+          </a:prstGeom>
+          <a:solidFill>
+            <a:srgbClr val="128C8C"/>
+          </a:solidFill>
+          <a:ln>
+            <a:noFill/>
+          </a:ln>
+          <a:effectLst/>
+        </p:spPr>
+        <p:style>
+          <a:lnRef idx="1">
+            <a:schemeClr val="accent1"/>
+          </a:lnRef>
+          <a:fillRef idx="3">
+            <a:schemeClr val="accent1"/>
+          </a:fillRef>
+          <a:effectRef idx="2">
+            <a:schemeClr val="accent1"/>
+          </a:effectRef>
+          <a:fontRef idx="minor">
+            <a:schemeClr val="lt1"/>
+          </a:fontRef>
+        </p:style>
+        <p:txBody>
+          <a:bodyPr rtlCol="0" anchor="ctr"/>
+          <a:lstStyle/>
+          <a:p>
+            <a:pPr algn="ctr"/>
+          </a:p>
+        </p:txBody>
+      </p:sp>
+      <p:sp>
+        <p:nvSpPr>
+          <p:cNvPr id="4" name="TextBox 3"/>
           <p:cNvSpPr txBox="1"/>
           <p:nvPr/>
         </p:nvSpPr>
         <p:spPr>
           <a:xfrm>
-            <a:off x="822960" y="2743200"/>
-            <a:ext cx="10515600" cy="1371600"/>
+            <a:off x="548640" y="201168"/>
+            <a:ext cx="11064240" cy="731520"/>
           </a:xfrm>
           <a:prstGeom prst="rect">
             <a:avLst/>
@@ -8124,13 +7365,327 @@
           <a:p>
             <a:pPr algn="l"/>
             <a:r>
-              <a:rPr sz="3600" b="1">
+              <a:rPr sz="2800" b="1">
                 <a:solidFill>
                   <a:srgbClr val="FFFFFF"/>
                 </a:solidFill>
                 <a:latin typeface="Calibri"/>
               </a:rPr>
-              <a:t>Controlling Output</a:t>
+              <a:t>What LLMs Can &amp; Can't Do</a:t>
+            </a:r>
+          </a:p>
+        </p:txBody>
+      </p:sp>
+      <p:sp>
+        <p:nvSpPr>
+          <p:cNvPr id="5" name="TextBox 4"/>
+          <p:cNvSpPr txBox="1"/>
+          <p:nvPr/>
+        </p:nvSpPr>
+        <p:spPr>
+          <a:xfrm>
+            <a:off x="731520" y="1280160"/>
+            <a:ext cx="5120640" cy="548640"/>
+          </a:xfrm>
+          <a:prstGeom prst="rect">
+            <a:avLst/>
+          </a:prstGeom>
+          <a:noFill/>
+        </p:spPr>
+        <p:txBody>
+          <a:bodyPr wrap="square">
+            <a:spAutoFit/>
+          </a:bodyPr>
+          <a:lstStyle/>
+          <a:p>
+            <a:pPr algn="l"/>
+            <a:r>
+              <a:rPr sz="2000" b="1">
+                <a:solidFill>
+                  <a:srgbClr val="128C8C"/>
+                </a:solidFill>
+                <a:latin typeface="Calibri"/>
+              </a:rPr>
+              <a:t>Strengths</a:t>
+            </a:r>
+          </a:p>
+        </p:txBody>
+      </p:sp>
+      <p:sp>
+        <p:nvSpPr>
+          <p:cNvPr id="6" name="TextBox 5"/>
+          <p:cNvSpPr txBox="1"/>
+          <p:nvPr/>
+        </p:nvSpPr>
+        <p:spPr>
+          <a:xfrm>
+            <a:off x="731520" y="1828800"/>
+            <a:ext cx="5120640" cy="4206240"/>
+          </a:xfrm>
+          <a:prstGeom prst="rect">
+            <a:avLst/>
+          </a:prstGeom>
+          <a:noFill/>
+        </p:spPr>
+        <p:txBody>
+          <a:bodyPr wrap="square">
+            <a:spAutoFit/>
+          </a:bodyPr>
+          <a:lstStyle/>
+          <a:p>
+            <a:pPr>
+              <a:spcAft>
+                <a:spcPts val="800"/>
+              </a:spcAft>
+            </a:pPr>
+            <a:r>
+              <a:rPr sz="1800">
+                <a:solidFill>
+                  <a:srgbClr val="1A1A1A"/>
+                </a:solidFill>
+                <a:latin typeface="Calibri"/>
+              </a:rPr>
+              <a:t>• Summarize, draft, translate</a:t>
+            </a:r>
+          </a:p>
+          <a:p>
+            <a:pPr>
+              <a:spcAft>
+                <a:spcPts val="800"/>
+              </a:spcAft>
+            </a:pPr>
+            <a:r>
+              <a:rPr sz="1800">
+                <a:solidFill>
+                  <a:srgbClr val="1A1A1A"/>
+                </a:solidFill>
+                <a:latin typeface="Calibri"/>
+              </a:rPr>
+              <a:t>• Classify &amp; extract structure</a:t>
+            </a:r>
+          </a:p>
+          <a:p>
+            <a:pPr>
+              <a:spcAft>
+                <a:spcPts val="800"/>
+              </a:spcAft>
+            </a:pPr>
+            <a:r>
+              <a:rPr sz="1800">
+                <a:solidFill>
+                  <a:srgbClr val="1A1A1A"/>
+                </a:solidFill>
+                <a:latin typeface="Calibri"/>
+              </a:rPr>
+              <a:t>• Write &amp; refactor code</a:t>
+            </a:r>
+          </a:p>
+          <a:p>
+            <a:pPr>
+              <a:spcAft>
+                <a:spcPts val="800"/>
+              </a:spcAft>
+            </a:pPr>
+            <a:r>
+              <a:rPr sz="1800">
+                <a:solidFill>
+                  <a:srgbClr val="1A1A1A"/>
+                </a:solidFill>
+                <a:latin typeface="Calibri"/>
+              </a:rPr>
+              <a:t>• Flexible reasoning over text</a:t>
+            </a:r>
+          </a:p>
+        </p:txBody>
+      </p:sp>
+      <p:sp>
+        <p:nvSpPr>
+          <p:cNvPr id="7" name="TextBox 6"/>
+          <p:cNvSpPr txBox="1"/>
+          <p:nvPr/>
+        </p:nvSpPr>
+        <p:spPr>
+          <a:xfrm>
+            <a:off x="6309360" y="1280160"/>
+            <a:ext cx="5120640" cy="548640"/>
+          </a:xfrm>
+          <a:prstGeom prst="rect">
+            <a:avLst/>
+          </a:prstGeom>
+          <a:noFill/>
+        </p:spPr>
+        <p:txBody>
+          <a:bodyPr wrap="square">
+            <a:spAutoFit/>
+          </a:bodyPr>
+          <a:lstStyle/>
+          <a:p>
+            <a:pPr algn="l"/>
+            <a:r>
+              <a:rPr sz="2000" b="1">
+                <a:solidFill>
+                  <a:srgbClr val="128C8C"/>
+                </a:solidFill>
+                <a:latin typeface="Calibri"/>
+              </a:rPr>
+              <a:t>Failure modes</a:t>
+            </a:r>
+          </a:p>
+        </p:txBody>
+      </p:sp>
+      <p:sp>
+        <p:nvSpPr>
+          <p:cNvPr id="8" name="TextBox 7"/>
+          <p:cNvSpPr txBox="1"/>
+          <p:nvPr/>
+        </p:nvSpPr>
+        <p:spPr>
+          <a:xfrm>
+            <a:off x="6309360" y="1828800"/>
+            <a:ext cx="5120640" cy="4206240"/>
+          </a:xfrm>
+          <a:prstGeom prst="rect">
+            <a:avLst/>
+          </a:prstGeom>
+          <a:noFill/>
+        </p:spPr>
+        <p:txBody>
+          <a:bodyPr wrap="square">
+            <a:spAutoFit/>
+          </a:bodyPr>
+          <a:lstStyle/>
+          <a:p>
+            <a:pPr>
+              <a:spcAft>
+                <a:spcPts val="800"/>
+              </a:spcAft>
+            </a:pPr>
+            <a:r>
+              <a:rPr sz="1800">
+                <a:solidFill>
+                  <a:srgbClr val="1A1A1A"/>
+                </a:solidFill>
+                <a:latin typeface="Calibri"/>
+              </a:rPr>
+              <a:t>• Hallucination (confident &amp; wrong)</a:t>
+            </a:r>
+          </a:p>
+          <a:p>
+            <a:pPr>
+              <a:spcAft>
+                <a:spcPts val="800"/>
+              </a:spcAft>
+            </a:pPr>
+            <a:r>
+              <a:rPr sz="1800">
+                <a:solidFill>
+                  <a:srgbClr val="1A1A1A"/>
+                </a:solidFill>
+                <a:latin typeface="Calibri"/>
+              </a:rPr>
+              <a:t>• Knowledge cutoff</a:t>
+            </a:r>
+          </a:p>
+          <a:p>
+            <a:pPr>
+              <a:spcAft>
+                <a:spcPts val="800"/>
+              </a:spcAft>
+            </a:pPr>
+            <a:r>
+              <a:rPr sz="1800">
+                <a:solidFill>
+                  <a:srgbClr val="1A1A1A"/>
+                </a:solidFill>
+                <a:latin typeface="Calibri"/>
+              </a:rPr>
+              <a:t>• Weak exact math / counting</a:t>
+            </a:r>
+          </a:p>
+          <a:p>
+            <a:pPr>
+              <a:spcAft>
+                <a:spcPts val="800"/>
+              </a:spcAft>
+            </a:pPr>
+            <a:r>
+              <a:rPr sz="1800">
+                <a:solidFill>
+                  <a:srgbClr val="1A1A1A"/>
+                </a:solidFill>
+                <a:latin typeface="Calibri"/>
+              </a:rPr>
+              <a:t>• Prompt sensitivity; bias</a:t>
+            </a:r>
+          </a:p>
+        </p:txBody>
+      </p:sp>
+      <p:sp>
+        <p:nvSpPr>
+          <p:cNvPr id="9" name="TextBox 8"/>
+          <p:cNvSpPr txBox="1"/>
+          <p:nvPr/>
+        </p:nvSpPr>
+        <p:spPr>
+          <a:xfrm>
+            <a:off x="365760" y="6446520"/>
+            <a:ext cx="8229600" cy="365760"/>
+          </a:xfrm>
+          <a:prstGeom prst="rect">
+            <a:avLst/>
+          </a:prstGeom>
+          <a:noFill/>
+        </p:spPr>
+        <p:txBody>
+          <a:bodyPr wrap="square">
+            <a:spAutoFit/>
+          </a:bodyPr>
+          <a:lstStyle/>
+          <a:p>
+            <a:pPr algn="l"/>
+            <a:r>
+              <a:rPr sz="1000" b="0">
+                <a:solidFill>
+                  <a:srgbClr val="6B7280"/>
+                </a:solidFill>
+                <a:latin typeface="Calibri"/>
+              </a:rPr>
+              <a:t>Palomar College · CSCI 250 · Fall 2026</a:t>
+            </a:r>
+          </a:p>
+        </p:txBody>
+      </p:sp>
+      <p:sp>
+        <p:nvSpPr>
+          <p:cNvPr id="10" name="TextBox 9"/>
+          <p:cNvSpPr txBox="1"/>
+          <p:nvPr/>
+        </p:nvSpPr>
+        <p:spPr>
+          <a:xfrm>
+            <a:off x="11155680" y="6446520"/>
+            <a:ext cx="822960" cy="365760"/>
+          </a:xfrm>
+          <a:prstGeom prst="rect">
+            <a:avLst/>
+          </a:prstGeom>
+          <a:noFill/>
+        </p:spPr>
+        <p:txBody>
+          <a:bodyPr wrap="square">
+            <a:spAutoFit/>
+          </a:bodyPr>
+          <a:lstStyle/>
+          <a:p>
+            <a:pPr algn="r"/>
+            <a:r>
+              <a:rPr sz="1000" b="0">
+                <a:solidFill>
+                  <a:srgbClr val="6B7280"/>
+                </a:solidFill>
+                <a:latin typeface="Calibri"/>
+              </a:rPr>
+              <a:t>8/16</a:t>
             </a:r>
           </a:p>
         </p:txBody>
@@ -8279,151 +7834,21 @@
                 </a:solidFill>
                 <a:latin typeface="Calibri"/>
               </a:rPr>
-              <a:t>Sampling Parameters</a:t>
-            </a:r>
-          </a:p>
-        </p:txBody>
-      </p:sp>
-      <p:sp>
-        <p:nvSpPr>
-          <p:cNvPr id="5" name="Rectangle 4"/>
-          <p:cNvSpPr/>
-          <p:nvPr/>
-        </p:nvSpPr>
-        <p:spPr>
-          <a:xfrm>
-            <a:off x="548640" y="1325880"/>
-            <a:ext cx="11064240" cy="4480560"/>
-          </a:xfrm>
-          <a:prstGeom prst="rect">
-            <a:avLst/>
-          </a:prstGeom>
-          <a:solidFill>
-            <a:srgbClr val="1E1E1E"/>
-          </a:solidFill>
-          <a:ln>
-            <a:noFill/>
-          </a:ln>
-          <a:effectLst/>
-        </p:spPr>
-        <p:style>
-          <a:lnRef idx="1">
-            <a:schemeClr val="accent1"/>
-          </a:lnRef>
-          <a:fillRef idx="3">
-            <a:schemeClr val="accent1"/>
-          </a:fillRef>
-          <a:effectRef idx="2">
-            <a:schemeClr val="accent1"/>
-          </a:effectRef>
-          <a:fontRef idx="minor">
-            <a:schemeClr val="lt1"/>
-          </a:fontRef>
-        </p:style>
-        <p:txBody>
-          <a:bodyPr rtlCol="0" anchor="ctr" wrap="square" lIns="182880" tIns="137160"/>
-          <a:lstStyle/>
-          <a:p>
-            <a:pPr algn="ctr"/>
-            <a:r>
-              <a:rPr sz="1500">
-                <a:solidFill>
-                  <a:srgbClr val="E6E6E6"/>
-                </a:solidFill>
-                <a:latin typeface="Consolas"/>
-              </a:rPr>
-              <a:t>msg = client.messages.create(</a:t>
-            </a:r>
-          </a:p>
-          <a:p>
-            <a:r>
-              <a:rPr sz="1500">
-                <a:solidFill>
-                  <a:srgbClr val="E6E6E6"/>
-                </a:solidFill>
-                <a:latin typeface="Consolas"/>
-              </a:rPr>
-              <a:t>    model="claude-sonnet-4-6",</a:t>
-            </a:r>
-          </a:p>
-          <a:p>
-            <a:r>
-              <a:rPr sz="1500">
-                <a:solidFill>
-                  <a:srgbClr val="E6E6E6"/>
-                </a:solidFill>
-                <a:latin typeface="Consolas"/>
-              </a:rPr>
-              <a:t>    max_tokens=200,       # caps the RESPONSE length + cost</a:t>
-            </a:r>
-          </a:p>
-          <a:p>
-            <a:r>
-              <a:rPr sz="1500">
-                <a:solidFill>
-                  <a:srgbClr val="E6E6E6"/>
-                </a:solidFill>
-                <a:latin typeface="Consolas"/>
-              </a:rPr>
-              <a:t>    temperature=0.0,      # 0 = focused; ~1.0 = creative</a:t>
-            </a:r>
-          </a:p>
-          <a:p>
-            <a:r>
-              <a:rPr sz="1500">
-                <a:solidFill>
-                  <a:srgbClr val="E6E6E6"/>
-                </a:solidFill>
-                <a:latin typeface="Consolas"/>
-              </a:rPr>
-              <a:t>    messages=[{"role": "user",</a:t>
-            </a:r>
-          </a:p>
-          <a:p>
-            <a:r>
-              <a:rPr sz="1500">
-                <a:solidFill>
-                  <a:srgbClr val="E6E6E6"/>
-                </a:solidFill>
-                <a:latin typeface="Consolas"/>
-              </a:rPr>
-              <a:t>               "content": "List 3 uses of LLMs."}],</a:t>
-            </a:r>
-          </a:p>
-          <a:p>
-            <a:r>
-              <a:rPr sz="1500">
-                <a:solidFill>
-                  <a:srgbClr val="E6E6E6"/>
-                </a:solidFill>
-                <a:latin typeface="Consolas"/>
-              </a:rPr>
-              <a:t>)</a:t>
-            </a:r>
-          </a:p>
-          <a:p>
-            <a:r>
-              <a:rPr sz="1500">
-                <a:solidFill>
-                  <a:srgbClr val="E6E6E6"/>
-                </a:solidFill>
-                <a:latin typeface="Consolas"/>
-              </a:rPr>
-              <a:t>print(msg.content[0].text)</a:t>
-            </a:r>
-          </a:p>
-        </p:txBody>
-      </p:sp>
-      <p:sp>
-        <p:nvSpPr>
-          <p:cNvPr id="6" name="TextBox 5"/>
+              <a:t>Mitigating Hallucination</a:t>
+            </a:r>
+          </a:p>
+        </p:txBody>
+      </p:sp>
+      <p:sp>
+        <p:nvSpPr>
+          <p:cNvPr id="5" name="TextBox 4"/>
           <p:cNvSpPr txBox="1"/>
           <p:nvPr/>
         </p:nvSpPr>
         <p:spPr>
           <a:xfrm>
-            <a:off x="548640" y="5897880"/>
-            <a:ext cx="10515600" cy="457200"/>
+            <a:off x="731520" y="1371600"/>
+            <a:ext cx="10698480" cy="4754880"/>
           </a:xfrm>
           <a:prstGeom prst="rect">
             <a:avLst/>
@@ -8436,22 +7861,74 @@
           </a:bodyPr>
           <a:lstStyle/>
           <a:p>
-            <a:pPr algn="l"/>
-            <a:r>
-              <a:rPr sz="1400" b="0">
-                <a:solidFill>
-                  <a:srgbClr val="6B7280"/>
-                </a:solidFill>
-                <a:latin typeface="Calibri"/>
-              </a:rPr>
-              <a:t>temp=0 for extraction/code; temp~0.7–1.0 for brainstorming. top-p = nucleus sampling.</a:t>
-            </a:r>
-          </a:p>
-        </p:txBody>
-      </p:sp>
-      <p:sp>
-        <p:nvSpPr>
-          <p:cNvPr id="7" name="TextBox 6"/>
+            <a:pPr>
+              <a:spcAft>
+                <a:spcPts val="800"/>
+              </a:spcAft>
+            </a:pPr>
+            <a:r>
+              <a:rPr sz="2000">
+                <a:solidFill>
+                  <a:srgbClr val="1A1A1A"/>
+                </a:solidFill>
+                <a:latin typeface="Calibri"/>
+              </a:rPr>
+              <a:t>• Treat output as a confident DRAFT, not a source of truth</a:t>
+            </a:r>
+          </a:p>
+          <a:p>
+            <a:pPr>
+              <a:spcAft>
+                <a:spcPts val="800"/>
+              </a:spcAft>
+            </a:pPr>
+            <a:r>
+              <a:rPr sz="2000">
+                <a:solidFill>
+                  <a:srgbClr val="1A1A1A"/>
+                </a:solidFill>
+                <a:latin typeface="Calibri"/>
+              </a:rPr>
+              <a:t>• Ground answers in supplied context (RAG, Week 11)</a:t>
+            </a:r>
+          </a:p>
+          <a:p>
+            <a:pPr>
+              <a:spcAft>
+                <a:spcPts val="800"/>
+              </a:spcAft>
+            </a:pPr>
+            <a:r>
+              <a:rPr sz="2000">
+                <a:solidFill>
+                  <a:srgbClr val="1A1A1A"/>
+                </a:solidFill>
+                <a:latin typeface="Calibri"/>
+              </a:rPr>
+              <a:t>• Ask for sources; set temperature=0 for factual tasks</a:t>
+            </a:r>
+          </a:p>
+          <a:p>
+            <a:pPr>
+              <a:spcAft>
+                <a:spcPts val="800"/>
+              </a:spcAft>
+            </a:pPr>
+            <a:r>
+              <a:rPr sz="2000">
+                <a:solidFill>
+                  <a:srgbClr val="1A1A1A"/>
+                </a:solidFill>
+                <a:latin typeface="Calibri"/>
+              </a:rPr>
+              <a:t>• Give the model tools (Week 13); verify anything important</a:t>
+            </a:r>
+          </a:p>
+        </p:txBody>
+      </p:sp>
+      <p:sp>
+        <p:nvSpPr>
+          <p:cNvPr id="6" name="TextBox 5"/>
           <p:cNvSpPr txBox="1"/>
           <p:nvPr/>
         </p:nvSpPr>
@@ -8486,7 +7963,7 @@
       </p:sp>
       <p:sp>
         <p:nvSpPr>
-          <p:cNvPr id="8" name="TextBox 7"/>
+          <p:cNvPr id="7" name="TextBox 6"/>
           <p:cNvSpPr txBox="1"/>
           <p:nvPr/>
         </p:nvSpPr>
@@ -8514,7 +7991,7 @@
                 </a:solidFill>
                 <a:latin typeface="Calibri"/>
               </a:rPr>
-              <a:t>9/21</a:t>
+              <a:t>9/16</a:t>
             </a:r>
           </a:p>
         </p:txBody>

--- a/CSCI250-Fall2026/content/Week08_LLM-Concepts/slides.pptx
+++ b/CSCI250-Fall2026/content/Week08_LLM-Concepts/slides.pptx
@@ -21,6 +21,8 @@
     <p:sldId id="269" r:id="rId20"/>
     <p:sldId id="270" r:id="rId21"/>
     <p:sldId id="271" r:id="rId22"/>
+    <p:sldId id="272" r:id="rId23"/>
+    <p:sldId id="273" r:id="rId24"/>
   </p:sldIdLst>
   <p:sldSz cx="12191695" cy="6858000" type="screen4x3"/>
   <p:notesSz cx="6858000" cy="9144000"/>
@@ -3369,7 +3371,7 @@
                 </a:solidFill>
                 <a:latin typeface="Calibri"/>
               </a:rPr>
-              <a:t>Under the Hood: Byte-Pair Encoding, From Scratch</a:t>
+              <a:t>Mitigating Hallucination</a:t>
             </a:r>
           </a:p>
         </p:txBody>
@@ -3408,7 +3410,7 @@
                 </a:solidFill>
                 <a:latin typeface="Calibri"/>
               </a:rPr>
-              <a:t>• Start from raw bytes (vocab of 256)</a:t>
+              <a:t>• Treat output as a confident DRAFT, not a source of truth</a:t>
             </a:r>
           </a:p>
           <a:p>
@@ -3424,7 +3426,7 @@
                 </a:solidFill>
                 <a:latin typeface="Calibri"/>
               </a:rPr>
-              <a:t>• Count every adjacent pair of tokens</a:t>
+              <a:t>• Ground answers in supplied context (RAG, Week 11)</a:t>
             </a:r>
           </a:p>
           <a:p>
@@ -3440,55 +3442,23 @@
                 </a:solidFill>
                 <a:latin typeface="Calibri"/>
               </a:rPr>
-              <a:t>• Merge the most frequent pair into a new token; repeat</a:t>
-            </a:r>
-          </a:p>
-          <a:p>
-            <a:pPr lvl="1">
+              <a:t>• Ask for sources; set temperature=0 for factual tasks</a:t>
+            </a:r>
+          </a:p>
+          <a:p>
+            <a:pPr>
               <a:spcAft>
                 <a:spcPts val="800"/>
               </a:spcAft>
             </a:pPr>
             <a:r>
-              <a:rPr sz="1800">
-                <a:solidFill>
-                  <a:srgbClr val="6B7280"/>
-                </a:solidFill>
-                <a:latin typeface="Calibri"/>
-              </a:rPr>
-              <a:t>– encode = replay merges; decode = bytes back → exact round-trip</a:t>
-            </a:r>
-          </a:p>
-          <a:p>
-            <a:pPr lvl="1">
-              <a:spcAft>
-                <a:spcPts val="800"/>
-              </a:spcAft>
-            </a:pPr>
-            <a:r>
-              <a:rPr sz="1800">
-                <a:solidFill>
-                  <a:srgbClr val="6B7280"/>
-                </a:solidFill>
-                <a:latin typeface="Calibri"/>
-              </a:rPr>
-              <a:t>– Tradeoff: bigger vocab = shorter sequences (fewer tokens to pay for)</a:t>
-            </a:r>
-          </a:p>
-          <a:p>
-            <a:pPr lvl="1">
-              <a:spcAft>
-                <a:spcPts val="800"/>
-              </a:spcAft>
-            </a:pPr>
-            <a:r>
-              <a:rPr sz="1800">
-                <a:solidFill>
-                  <a:srgbClr val="6B7280"/>
-                </a:solidFill>
-                <a:latin typeface="Calibri"/>
-              </a:rPr>
-              <a:t>– Why an LLM can't count the r's in 'strawberry': it's one token</a:t>
+              <a:rPr sz="2000">
+                <a:solidFill>
+                  <a:srgbClr val="1A1A1A"/>
+                </a:solidFill>
+                <a:latin typeface="Calibri"/>
+              </a:rPr>
+              <a:t>• Give the model tools (Week 13); verify anything important</a:t>
             </a:r>
           </a:p>
         </p:txBody>
@@ -3558,7 +3528,7 @@
                 </a:solidFill>
                 <a:latin typeface="Calibri"/>
               </a:rPr>
-              <a:t>10/16</a:t>
+              <a:t>10/18</a:t>
             </a:r>
           </a:p>
         </p:txBody>
@@ -3707,184 +3677,21 @@
                 </a:solidFill>
                 <a:latin typeface="Calibri"/>
               </a:rPr>
-              <a:t>The Core of BPE: merge a pair</a:t>
-            </a:r>
-          </a:p>
-        </p:txBody>
-      </p:sp>
-      <p:sp>
-        <p:nvSpPr>
-          <p:cNvPr id="5" name="Rectangle 4"/>
-          <p:cNvSpPr/>
-          <p:nvPr/>
-        </p:nvSpPr>
-        <p:spPr>
-          <a:xfrm>
-            <a:off x="548640" y="1325880"/>
-            <a:ext cx="11064240" cy="4480560"/>
-          </a:xfrm>
-          <a:prstGeom prst="rect">
-            <a:avLst/>
-          </a:prstGeom>
-          <a:solidFill>
-            <a:srgbClr val="1E1E1E"/>
-          </a:solidFill>
-          <a:ln>
-            <a:noFill/>
-          </a:ln>
-          <a:effectLst/>
-        </p:spPr>
-        <p:style>
-          <a:lnRef idx="1">
-            <a:schemeClr val="accent1"/>
-          </a:lnRef>
-          <a:fillRef idx="3">
-            <a:schemeClr val="accent1"/>
-          </a:fillRef>
-          <a:effectRef idx="2">
-            <a:schemeClr val="accent1"/>
-          </a:effectRef>
-          <a:fontRef idx="minor">
-            <a:schemeClr val="lt1"/>
-          </a:fontRef>
-        </p:style>
-        <p:txBody>
-          <a:bodyPr rtlCol="0" anchor="ctr" wrap="square" lIns="182880" tIns="137160"/>
-          <a:lstStyle/>
-          <a:p>
-            <a:pPr algn="ctr"/>
-            <a:r>
-              <a:rPr sz="1500">
-                <a:solidFill>
-                  <a:srgbClr val="E6E6E6"/>
-                </a:solidFill>
-                <a:latin typeface="Consolas"/>
-              </a:rPr>
-              <a:t>def merge(ids, pair, new_id):     # replace every (a,b)</a:t>
-            </a:r>
-          </a:p>
-          <a:p>
-            <a:r>
-              <a:rPr sz="1500">
-                <a:solidFill>
-                  <a:srgbClr val="E6E6E6"/>
-                </a:solidFill>
-                <a:latin typeface="Consolas"/>
-              </a:rPr>
-              <a:t>    a, b = pair; out = []; i = 0</a:t>
-            </a:r>
-          </a:p>
-          <a:p>
-            <a:r>
-              <a:rPr sz="1500">
-                <a:solidFill>
-                  <a:srgbClr val="E6E6E6"/>
-                </a:solidFill>
-                <a:latin typeface="Consolas"/>
-              </a:rPr>
-              <a:t>    while i &lt; len(ids):</a:t>
-            </a:r>
-          </a:p>
-          <a:p>
-            <a:r>
-              <a:rPr sz="1500">
-                <a:solidFill>
-                  <a:srgbClr val="E6E6E6"/>
-                </a:solidFill>
-                <a:latin typeface="Consolas"/>
-              </a:rPr>
-              <a:t>        if i &lt; len(ids)-1 and ids[i]==a and ids[i+1]==b:</a:t>
-            </a:r>
-          </a:p>
-          <a:p>
-            <a:r>
-              <a:rPr sz="1500">
-                <a:solidFill>
-                  <a:srgbClr val="E6E6E6"/>
-                </a:solidFill>
-                <a:latin typeface="Consolas"/>
-              </a:rPr>
-              <a:t>            out.append(new_id); i += 2</a:t>
-            </a:r>
-          </a:p>
-          <a:p>
-            <a:r>
-              <a:rPr sz="1500">
-                <a:solidFill>
-                  <a:srgbClr val="E6E6E6"/>
-                </a:solidFill>
-                <a:latin typeface="Consolas"/>
-              </a:rPr>
-              <a:t>        else:</a:t>
-            </a:r>
-          </a:p>
-          <a:p>
-            <a:r>
-              <a:rPr sz="1500">
-                <a:solidFill>
-                  <a:srgbClr val="E6E6E6"/>
-                </a:solidFill>
-                <a:latin typeface="Consolas"/>
-              </a:rPr>
-              <a:t>            out.append(ids[i]); i += 1</a:t>
-            </a:r>
-          </a:p>
-          <a:p>
-            <a:r>
-              <a:rPr sz="1500">
-                <a:solidFill>
-                  <a:srgbClr val="E6E6E6"/>
-                </a:solidFill>
-                <a:latin typeface="Consolas"/>
-              </a:rPr>
-              <a:t>    return out</a:t>
-            </a:r>
-          </a:p>
-          <a:p>
-            <a:r>
-              <a:rPr sz="1500">
-                <a:solidFill>
-                  <a:srgbClr val="E6E6E6"/>
-                </a:solidFill>
-                <a:latin typeface="Consolas"/>
-              </a:rPr>
-              <a:t> </a:t>
-            </a:r>
-          </a:p>
-          <a:p>
-            <a:r>
-              <a:rPr sz="1500">
-                <a:solidFill>
-                  <a:srgbClr val="E6E6E6"/>
-                </a:solidFill>
-                <a:latin typeface="Consolas"/>
-              </a:rPr>
-              <a:t># loop: count pairs -&gt; merge most frequent -&gt; repeat</a:t>
-            </a:r>
-          </a:p>
-          <a:p>
-            <a:r>
-              <a:rPr sz="1500">
-                <a:solidFill>
-                  <a:srgbClr val="E6E6E6"/>
-                </a:solidFill>
-                <a:latin typeface="Consolas"/>
-              </a:rPr>
-              <a:t># then encode/decode round-trips your own text exactly</a:t>
-            </a:r>
-          </a:p>
-        </p:txBody>
-      </p:sp>
-      <p:sp>
-        <p:nvSpPr>
-          <p:cNvPr id="6" name="TextBox 5"/>
+              <a:t>Under the Hood: Byte-Pair Encoding, From Scratch</a:t>
+            </a:r>
+          </a:p>
+        </p:txBody>
+      </p:sp>
+      <p:sp>
+        <p:nvSpPr>
+          <p:cNvPr id="5" name="TextBox 4"/>
           <p:cNvSpPr txBox="1"/>
           <p:nvPr/>
         </p:nvSpPr>
         <p:spPr>
           <a:xfrm>
-            <a:off x="548640" y="5897880"/>
-            <a:ext cx="10515600" cy="457200"/>
+            <a:off x="731520" y="1371600"/>
+            <a:ext cx="10698480" cy="4754880"/>
           </a:xfrm>
           <a:prstGeom prst="rect">
             <a:avLst/>
@@ -3897,22 +3704,106 @@
           </a:bodyPr>
           <a:lstStyle/>
           <a:p>
-            <a:pPr algn="l"/>
-            <a:r>
-              <a:rPr sz="1400" b="0">
+            <a:pPr>
+              <a:spcAft>
+                <a:spcPts val="800"/>
+              </a:spcAft>
+            </a:pPr>
+            <a:r>
+              <a:rPr sz="2000">
+                <a:solidFill>
+                  <a:srgbClr val="1A1A1A"/>
+                </a:solidFill>
+                <a:latin typeface="Calibri"/>
+              </a:rPr>
+              <a:t>• Start from raw bytes (vocab of 256)</a:t>
+            </a:r>
+          </a:p>
+          <a:p>
+            <a:pPr>
+              <a:spcAft>
+                <a:spcPts val="800"/>
+              </a:spcAft>
+            </a:pPr>
+            <a:r>
+              <a:rPr sz="2000">
+                <a:solidFill>
+                  <a:srgbClr val="1A1A1A"/>
+                </a:solidFill>
+                <a:latin typeface="Calibri"/>
+              </a:rPr>
+              <a:t>• Count every adjacent pair of tokens</a:t>
+            </a:r>
+          </a:p>
+          <a:p>
+            <a:pPr>
+              <a:spcAft>
+                <a:spcPts val="800"/>
+              </a:spcAft>
+            </a:pPr>
+            <a:r>
+              <a:rPr sz="2000">
+                <a:solidFill>
+                  <a:srgbClr val="1A1A1A"/>
+                </a:solidFill>
+                <a:latin typeface="Calibri"/>
+              </a:rPr>
+              <a:t>• Merge the most frequent pair into a new token; repeat</a:t>
+            </a:r>
+          </a:p>
+          <a:p>
+            <a:pPr lvl="1">
+              <a:spcAft>
+                <a:spcPts val="800"/>
+              </a:spcAft>
+            </a:pPr>
+            <a:r>
+              <a:rPr sz="1800">
                 <a:solidFill>
                   <a:srgbClr val="6B7280"/>
                 </a:solidFill>
                 <a:latin typeface="Calibri"/>
               </a:rPr>
-              <a:t>code/03_build_bpe_tokenizer.ipynb — Karpathy minbpe / CS336 style, pure Python.</a:t>
-            </a:r>
-          </a:p>
-        </p:txBody>
-      </p:sp>
-      <p:sp>
-        <p:nvSpPr>
-          <p:cNvPr id="7" name="TextBox 6"/>
+              <a:t>– encode = replay merges; decode = bytes back → exact round-trip</a:t>
+            </a:r>
+          </a:p>
+          <a:p>
+            <a:pPr lvl="1">
+              <a:spcAft>
+                <a:spcPts val="800"/>
+              </a:spcAft>
+            </a:pPr>
+            <a:r>
+              <a:rPr sz="1800">
+                <a:solidFill>
+                  <a:srgbClr val="6B7280"/>
+                </a:solidFill>
+                <a:latin typeface="Calibri"/>
+              </a:rPr>
+              <a:t>– Tradeoff: bigger vocab = shorter sequences (fewer tokens to pay for)</a:t>
+            </a:r>
+          </a:p>
+          <a:p>
+            <a:pPr lvl="1">
+              <a:spcAft>
+                <a:spcPts val="800"/>
+              </a:spcAft>
+            </a:pPr>
+            <a:r>
+              <a:rPr sz="1800">
+                <a:solidFill>
+                  <a:srgbClr val="6B7280"/>
+                </a:solidFill>
+                <a:latin typeface="Calibri"/>
+              </a:rPr>
+              <a:t>– Why an LLM can't count the r's in 'strawberry': it's one token</a:t>
+            </a:r>
+          </a:p>
+        </p:txBody>
+      </p:sp>
+      <p:sp>
+        <p:nvSpPr>
+          <p:cNvPr id="6" name="TextBox 5"/>
           <p:cNvSpPr txBox="1"/>
           <p:nvPr/>
         </p:nvSpPr>
@@ -3947,7 +3838,7 @@
       </p:sp>
       <p:sp>
         <p:nvSpPr>
-          <p:cNvPr id="8" name="TextBox 7"/>
+          <p:cNvPr id="7" name="TextBox 6"/>
           <p:cNvSpPr txBox="1"/>
           <p:nvPr/>
         </p:nvSpPr>
@@ -3975,7 +3866,7 @@
                 </a:solidFill>
                 <a:latin typeface="Calibri"/>
               </a:rPr>
-              <a:t>11/16</a:t>
+              <a:t>11/18</a:t>
             </a:r>
           </a:p>
         </p:txBody>
@@ -3989,6 +3880,423 @@
 </file>
 
 <file path=ppt/slides/slide12.xml><?xml version="1.0" encoding="utf-8"?>
+<p:sld xmlns:a="http://schemas.openxmlformats.org/drawingml/2006/main" xmlns:p="http://schemas.openxmlformats.org/presentationml/2006/main" xmlns:r="http://schemas.openxmlformats.org/officeDocument/2006/relationships">
+  <p:cSld>
+    <p:bg>
+      <p:bgPr>
+        <a:solidFill>
+          <a:srgbClr val="FFFFFF"/>
+        </a:solidFill>
+        <a:effectLst/>
+      </p:bgPr>
+    </p:bg>
+    <p:spTree>
+      <p:nvGrpSpPr>
+        <p:cNvPr id="1" name=""/>
+        <p:cNvGrpSpPr/>
+        <p:nvPr/>
+      </p:nvGrpSpPr>
+      <p:grpSpPr/>
+      <p:sp>
+        <p:nvSpPr>
+          <p:cNvPr id="2" name="Rectangle 1"/>
+          <p:cNvSpPr/>
+          <p:nvPr/>
+        </p:nvSpPr>
+        <p:spPr>
+          <a:xfrm>
+            <a:off x="0" y="0"/>
+            <a:ext cx="12191695" cy="1051560"/>
+          </a:xfrm>
+          <a:prstGeom prst="rect">
+            <a:avLst/>
+          </a:prstGeom>
+          <a:solidFill>
+            <a:srgbClr val="0B1F3A"/>
+          </a:solidFill>
+          <a:ln>
+            <a:noFill/>
+          </a:ln>
+          <a:effectLst/>
+        </p:spPr>
+        <p:style>
+          <a:lnRef idx="1">
+            <a:schemeClr val="accent1"/>
+          </a:lnRef>
+          <a:fillRef idx="3">
+            <a:schemeClr val="accent1"/>
+          </a:fillRef>
+          <a:effectRef idx="2">
+            <a:schemeClr val="accent1"/>
+          </a:effectRef>
+          <a:fontRef idx="minor">
+            <a:schemeClr val="lt1"/>
+          </a:fontRef>
+        </p:style>
+        <p:txBody>
+          <a:bodyPr rtlCol="0" anchor="ctr"/>
+          <a:lstStyle/>
+          <a:p>
+            <a:pPr algn="ctr"/>
+          </a:p>
+        </p:txBody>
+      </p:sp>
+      <p:sp>
+        <p:nvSpPr>
+          <p:cNvPr id="3" name="Rectangle 2"/>
+          <p:cNvSpPr/>
+          <p:nvPr/>
+        </p:nvSpPr>
+        <p:spPr>
+          <a:xfrm>
+            <a:off x="0" y="1051560"/>
+            <a:ext cx="12191695" cy="54864"/>
+          </a:xfrm>
+          <a:prstGeom prst="rect">
+            <a:avLst/>
+          </a:prstGeom>
+          <a:solidFill>
+            <a:srgbClr val="128C8C"/>
+          </a:solidFill>
+          <a:ln>
+            <a:noFill/>
+          </a:ln>
+          <a:effectLst/>
+        </p:spPr>
+        <p:style>
+          <a:lnRef idx="1">
+            <a:schemeClr val="accent1"/>
+          </a:lnRef>
+          <a:fillRef idx="3">
+            <a:schemeClr val="accent1"/>
+          </a:fillRef>
+          <a:effectRef idx="2">
+            <a:schemeClr val="accent1"/>
+          </a:effectRef>
+          <a:fontRef idx="minor">
+            <a:schemeClr val="lt1"/>
+          </a:fontRef>
+        </p:style>
+        <p:txBody>
+          <a:bodyPr rtlCol="0" anchor="ctr"/>
+          <a:lstStyle/>
+          <a:p>
+            <a:pPr algn="ctr"/>
+          </a:p>
+        </p:txBody>
+      </p:sp>
+      <p:sp>
+        <p:nvSpPr>
+          <p:cNvPr id="4" name="TextBox 3"/>
+          <p:cNvSpPr txBox="1"/>
+          <p:nvPr/>
+        </p:nvSpPr>
+        <p:spPr>
+          <a:xfrm>
+            <a:off x="548640" y="201168"/>
+            <a:ext cx="11064240" cy="731520"/>
+          </a:xfrm>
+          <a:prstGeom prst="rect">
+            <a:avLst/>
+          </a:prstGeom>
+          <a:noFill/>
+        </p:spPr>
+        <p:txBody>
+          <a:bodyPr wrap="square" anchor="ctr">
+            <a:spAutoFit/>
+          </a:bodyPr>
+          <a:lstStyle/>
+          <a:p>
+            <a:pPr algn="l"/>
+            <a:r>
+              <a:rPr sz="2800" b="1">
+                <a:solidFill>
+                  <a:srgbClr val="FFFFFF"/>
+                </a:solidFill>
+                <a:latin typeface="Calibri"/>
+              </a:rPr>
+              <a:t>The Core of BPE: merge a pair</a:t>
+            </a:r>
+          </a:p>
+        </p:txBody>
+      </p:sp>
+      <p:sp>
+        <p:nvSpPr>
+          <p:cNvPr id="5" name="Rectangle 4"/>
+          <p:cNvSpPr/>
+          <p:nvPr/>
+        </p:nvSpPr>
+        <p:spPr>
+          <a:xfrm>
+            <a:off x="548640" y="1325880"/>
+            <a:ext cx="11064240" cy="4480560"/>
+          </a:xfrm>
+          <a:prstGeom prst="rect">
+            <a:avLst/>
+          </a:prstGeom>
+          <a:solidFill>
+            <a:srgbClr val="1E1E1E"/>
+          </a:solidFill>
+          <a:ln>
+            <a:noFill/>
+          </a:ln>
+          <a:effectLst/>
+        </p:spPr>
+        <p:style>
+          <a:lnRef idx="1">
+            <a:schemeClr val="accent1"/>
+          </a:lnRef>
+          <a:fillRef idx="3">
+            <a:schemeClr val="accent1"/>
+          </a:fillRef>
+          <a:effectRef idx="2">
+            <a:schemeClr val="accent1"/>
+          </a:effectRef>
+          <a:fontRef idx="minor">
+            <a:schemeClr val="lt1"/>
+          </a:fontRef>
+        </p:style>
+        <p:txBody>
+          <a:bodyPr rtlCol="0" anchor="ctr" wrap="square" lIns="182880" tIns="137160"/>
+          <a:lstStyle/>
+          <a:p>
+            <a:pPr algn="ctr"/>
+            <a:r>
+              <a:rPr sz="1500">
+                <a:solidFill>
+                  <a:srgbClr val="E6E6E6"/>
+                </a:solidFill>
+                <a:latin typeface="Consolas"/>
+              </a:rPr>
+              <a:t>def merge(ids, pair, new_id):     # replace every (a,b)</a:t>
+            </a:r>
+          </a:p>
+          <a:p>
+            <a:r>
+              <a:rPr sz="1500">
+                <a:solidFill>
+                  <a:srgbClr val="E6E6E6"/>
+                </a:solidFill>
+                <a:latin typeface="Consolas"/>
+              </a:rPr>
+              <a:t>    a, b = pair; out = []; i = 0</a:t>
+            </a:r>
+          </a:p>
+          <a:p>
+            <a:r>
+              <a:rPr sz="1500">
+                <a:solidFill>
+                  <a:srgbClr val="E6E6E6"/>
+                </a:solidFill>
+                <a:latin typeface="Consolas"/>
+              </a:rPr>
+              <a:t>    while i &lt; len(ids):</a:t>
+            </a:r>
+          </a:p>
+          <a:p>
+            <a:r>
+              <a:rPr sz="1500">
+                <a:solidFill>
+                  <a:srgbClr val="E6E6E6"/>
+                </a:solidFill>
+                <a:latin typeface="Consolas"/>
+              </a:rPr>
+              <a:t>        if i &lt; len(ids)-1 and ids[i]==a and ids[i+1]==b:</a:t>
+            </a:r>
+          </a:p>
+          <a:p>
+            <a:r>
+              <a:rPr sz="1500">
+                <a:solidFill>
+                  <a:srgbClr val="E6E6E6"/>
+                </a:solidFill>
+                <a:latin typeface="Consolas"/>
+              </a:rPr>
+              <a:t>            out.append(new_id); i += 2</a:t>
+            </a:r>
+          </a:p>
+          <a:p>
+            <a:r>
+              <a:rPr sz="1500">
+                <a:solidFill>
+                  <a:srgbClr val="E6E6E6"/>
+                </a:solidFill>
+                <a:latin typeface="Consolas"/>
+              </a:rPr>
+              <a:t>        else:</a:t>
+            </a:r>
+          </a:p>
+          <a:p>
+            <a:r>
+              <a:rPr sz="1500">
+                <a:solidFill>
+                  <a:srgbClr val="E6E6E6"/>
+                </a:solidFill>
+                <a:latin typeface="Consolas"/>
+              </a:rPr>
+              <a:t>            out.append(ids[i]); i += 1</a:t>
+            </a:r>
+          </a:p>
+          <a:p>
+            <a:r>
+              <a:rPr sz="1500">
+                <a:solidFill>
+                  <a:srgbClr val="E6E6E6"/>
+                </a:solidFill>
+                <a:latin typeface="Consolas"/>
+              </a:rPr>
+              <a:t>    return out</a:t>
+            </a:r>
+          </a:p>
+          <a:p>
+            <a:r>
+              <a:rPr sz="1500">
+                <a:solidFill>
+                  <a:srgbClr val="E6E6E6"/>
+                </a:solidFill>
+                <a:latin typeface="Consolas"/>
+              </a:rPr>
+              <a:t> </a:t>
+            </a:r>
+          </a:p>
+          <a:p>
+            <a:r>
+              <a:rPr sz="1500">
+                <a:solidFill>
+                  <a:srgbClr val="E6E6E6"/>
+                </a:solidFill>
+                <a:latin typeface="Consolas"/>
+              </a:rPr>
+              <a:t># loop: count pairs -&gt; merge most frequent -&gt; repeat</a:t>
+            </a:r>
+          </a:p>
+          <a:p>
+            <a:r>
+              <a:rPr sz="1500">
+                <a:solidFill>
+                  <a:srgbClr val="E6E6E6"/>
+                </a:solidFill>
+                <a:latin typeface="Consolas"/>
+              </a:rPr>
+              <a:t># then encode/decode round-trips your own text exactly</a:t>
+            </a:r>
+          </a:p>
+        </p:txBody>
+      </p:sp>
+      <p:sp>
+        <p:nvSpPr>
+          <p:cNvPr id="6" name="TextBox 5"/>
+          <p:cNvSpPr txBox="1"/>
+          <p:nvPr/>
+        </p:nvSpPr>
+        <p:spPr>
+          <a:xfrm>
+            <a:off x="548640" y="5897880"/>
+            <a:ext cx="10515600" cy="457200"/>
+          </a:xfrm>
+          <a:prstGeom prst="rect">
+            <a:avLst/>
+          </a:prstGeom>
+          <a:noFill/>
+        </p:spPr>
+        <p:txBody>
+          <a:bodyPr wrap="square">
+            <a:spAutoFit/>
+          </a:bodyPr>
+          <a:lstStyle/>
+          <a:p>
+            <a:pPr algn="l"/>
+            <a:r>
+              <a:rPr sz="1400" b="0">
+                <a:solidFill>
+                  <a:srgbClr val="6B7280"/>
+                </a:solidFill>
+                <a:latin typeface="Calibri"/>
+              </a:rPr>
+              <a:t>code/03 — Karpathy minbpe / CS336 style, pure Python. Scope cap: production BPE re-scans until no merge applies.</a:t>
+            </a:r>
+          </a:p>
+        </p:txBody>
+      </p:sp>
+      <p:sp>
+        <p:nvSpPr>
+          <p:cNvPr id="7" name="TextBox 6"/>
+          <p:cNvSpPr txBox="1"/>
+          <p:nvPr/>
+        </p:nvSpPr>
+        <p:spPr>
+          <a:xfrm>
+            <a:off x="365760" y="6446520"/>
+            <a:ext cx="8229600" cy="365760"/>
+          </a:xfrm>
+          <a:prstGeom prst="rect">
+            <a:avLst/>
+          </a:prstGeom>
+          <a:noFill/>
+        </p:spPr>
+        <p:txBody>
+          <a:bodyPr wrap="square">
+            <a:spAutoFit/>
+          </a:bodyPr>
+          <a:lstStyle/>
+          <a:p>
+            <a:pPr algn="l"/>
+            <a:r>
+              <a:rPr sz="1000" b="0">
+                <a:solidFill>
+                  <a:srgbClr val="6B7280"/>
+                </a:solidFill>
+                <a:latin typeface="Calibri"/>
+              </a:rPr>
+              <a:t>Palomar College · CSCI 250 · Fall 2026</a:t>
+            </a:r>
+          </a:p>
+        </p:txBody>
+      </p:sp>
+      <p:sp>
+        <p:nvSpPr>
+          <p:cNvPr id="8" name="TextBox 7"/>
+          <p:cNvSpPr txBox="1"/>
+          <p:nvPr/>
+        </p:nvSpPr>
+        <p:spPr>
+          <a:xfrm>
+            <a:off x="11155680" y="6446520"/>
+            <a:ext cx="822960" cy="365760"/>
+          </a:xfrm>
+          <a:prstGeom prst="rect">
+            <a:avLst/>
+          </a:prstGeom>
+          <a:noFill/>
+        </p:spPr>
+        <p:txBody>
+          <a:bodyPr wrap="square">
+            <a:spAutoFit/>
+          </a:bodyPr>
+          <a:lstStyle/>
+          <a:p>
+            <a:pPr algn="r"/>
+            <a:r>
+              <a:rPr sz="1000" b="0">
+                <a:solidFill>
+                  <a:srgbClr val="6B7280"/>
+                </a:solidFill>
+                <a:latin typeface="Calibri"/>
+              </a:rPr>
+              <a:t>12/18</a:t>
+            </a:r>
+          </a:p>
+        </p:txBody>
+      </p:sp>
+    </p:spTree>
+  </p:cSld>
+  <p:clrMapOvr>
+    <a:masterClrMapping/>
+  </p:clrMapOvr>
+</p:sld>
+</file>
+
+<file path=ppt/slides/slide13.xml><?xml version="1.0" encoding="utf-8"?>
 <p:sld xmlns:a="http://schemas.openxmlformats.org/drawingml/2006/main" xmlns:p="http://schemas.openxmlformats.org/presentationml/2006/main" xmlns:r="http://schemas.openxmlformats.org/officeDocument/2006/relationships">
   <p:cSld>
     <p:bg>
@@ -4037,344 +4345,6 @@
                 <a:latin typeface="Calibri"/>
               </a:rPr>
               <a:t>The Idea Behind Transformers: Attention</a:t>
-            </a:r>
-          </a:p>
-        </p:txBody>
-      </p:sp>
-    </p:spTree>
-  </p:cSld>
-  <p:clrMapOvr>
-    <a:masterClrMapping/>
-  </p:clrMapOvr>
-</p:sld>
-</file>
-
-<file path=ppt/slides/slide13.xml><?xml version="1.0" encoding="utf-8"?>
-<p:sld xmlns:a="http://schemas.openxmlformats.org/drawingml/2006/main" xmlns:p="http://schemas.openxmlformats.org/presentationml/2006/main" xmlns:r="http://schemas.openxmlformats.org/officeDocument/2006/relationships">
-  <p:cSld>
-    <p:bg>
-      <p:bgPr>
-        <a:solidFill>
-          <a:srgbClr val="FFFFFF"/>
-        </a:solidFill>
-        <a:effectLst/>
-      </p:bgPr>
-    </p:bg>
-    <p:spTree>
-      <p:nvGrpSpPr>
-        <p:cNvPr id="1" name=""/>
-        <p:cNvGrpSpPr/>
-        <p:nvPr/>
-      </p:nvGrpSpPr>
-      <p:grpSpPr/>
-      <p:sp>
-        <p:nvSpPr>
-          <p:cNvPr id="2" name="Rectangle 1"/>
-          <p:cNvSpPr/>
-          <p:nvPr/>
-        </p:nvSpPr>
-        <p:spPr>
-          <a:xfrm>
-            <a:off x="0" y="0"/>
-            <a:ext cx="12191695" cy="1051560"/>
-          </a:xfrm>
-          <a:prstGeom prst="rect">
-            <a:avLst/>
-          </a:prstGeom>
-          <a:solidFill>
-            <a:srgbClr val="0B1F3A"/>
-          </a:solidFill>
-          <a:ln>
-            <a:noFill/>
-          </a:ln>
-          <a:effectLst/>
-        </p:spPr>
-        <p:style>
-          <a:lnRef idx="1">
-            <a:schemeClr val="accent1"/>
-          </a:lnRef>
-          <a:fillRef idx="3">
-            <a:schemeClr val="accent1"/>
-          </a:fillRef>
-          <a:effectRef idx="2">
-            <a:schemeClr val="accent1"/>
-          </a:effectRef>
-          <a:fontRef idx="minor">
-            <a:schemeClr val="lt1"/>
-          </a:fontRef>
-        </p:style>
-        <p:txBody>
-          <a:bodyPr rtlCol="0" anchor="ctr"/>
-          <a:lstStyle/>
-          <a:p>
-            <a:pPr algn="ctr"/>
-          </a:p>
-        </p:txBody>
-      </p:sp>
-      <p:sp>
-        <p:nvSpPr>
-          <p:cNvPr id="3" name="Rectangle 2"/>
-          <p:cNvSpPr/>
-          <p:nvPr/>
-        </p:nvSpPr>
-        <p:spPr>
-          <a:xfrm>
-            <a:off x="0" y="1051560"/>
-            <a:ext cx="12191695" cy="54864"/>
-          </a:xfrm>
-          <a:prstGeom prst="rect">
-            <a:avLst/>
-          </a:prstGeom>
-          <a:solidFill>
-            <a:srgbClr val="128C8C"/>
-          </a:solidFill>
-          <a:ln>
-            <a:noFill/>
-          </a:ln>
-          <a:effectLst/>
-        </p:spPr>
-        <p:style>
-          <a:lnRef idx="1">
-            <a:schemeClr val="accent1"/>
-          </a:lnRef>
-          <a:fillRef idx="3">
-            <a:schemeClr val="accent1"/>
-          </a:fillRef>
-          <a:effectRef idx="2">
-            <a:schemeClr val="accent1"/>
-          </a:effectRef>
-          <a:fontRef idx="minor">
-            <a:schemeClr val="lt1"/>
-          </a:fontRef>
-        </p:style>
-        <p:txBody>
-          <a:bodyPr rtlCol="0" anchor="ctr"/>
-          <a:lstStyle/>
-          <a:p>
-            <a:pPr algn="ctr"/>
-          </a:p>
-        </p:txBody>
-      </p:sp>
-      <p:sp>
-        <p:nvSpPr>
-          <p:cNvPr id="4" name="TextBox 3"/>
-          <p:cNvSpPr txBox="1"/>
-          <p:nvPr/>
-        </p:nvSpPr>
-        <p:spPr>
-          <a:xfrm>
-            <a:off x="548640" y="201168"/>
-            <a:ext cx="11064240" cy="731520"/>
-          </a:xfrm>
-          <a:prstGeom prst="rect">
-            <a:avLst/>
-          </a:prstGeom>
-          <a:noFill/>
-        </p:spPr>
-        <p:txBody>
-          <a:bodyPr wrap="square" anchor="ctr">
-            <a:spAutoFit/>
-          </a:bodyPr>
-          <a:lstStyle/>
-          <a:p>
-            <a:pPr algn="l"/>
-            <a:r>
-              <a:rPr sz="2800" b="1">
-                <a:solidFill>
-                  <a:srgbClr val="FFFFFF"/>
-                </a:solidFill>
-                <a:latin typeface="Calibri"/>
-              </a:rPr>
-              <a:t>Scaled Dot-Product Attention</a:t>
-            </a:r>
-          </a:p>
-        </p:txBody>
-      </p:sp>
-      <p:sp>
-        <p:nvSpPr>
-          <p:cNvPr id="5" name="TextBox 4"/>
-          <p:cNvSpPr txBox="1"/>
-          <p:nvPr/>
-        </p:nvSpPr>
-        <p:spPr>
-          <a:xfrm>
-            <a:off x="731520" y="1371600"/>
-            <a:ext cx="10698480" cy="4754880"/>
-          </a:xfrm>
-          <a:prstGeom prst="rect">
-            <a:avLst/>
-          </a:prstGeom>
-          <a:noFill/>
-        </p:spPr>
-        <p:txBody>
-          <a:bodyPr wrap="square">
-            <a:spAutoFit/>
-          </a:bodyPr>
-          <a:lstStyle/>
-          <a:p>
-            <a:pPr>
-              <a:spcAft>
-                <a:spcPts val="800"/>
-              </a:spcAft>
-            </a:pPr>
-            <a:r>
-              <a:rPr sz="2000">
-                <a:solidFill>
-                  <a:srgbClr val="1A1A1A"/>
-                </a:solidFill>
-                <a:latin typeface="Calibri"/>
-              </a:rPr>
-              <a:t>• Each word → Q (query), K (key), V (value) vectors</a:t>
-            </a:r>
-          </a:p>
-          <a:p>
-            <a:pPr>
-              <a:spcAft>
-                <a:spcPts val="800"/>
-              </a:spcAft>
-            </a:pPr>
-            <a:r>
-              <a:rPr sz="2000">
-                <a:solidFill>
-                  <a:srgbClr val="1A1A1A"/>
-                </a:solidFill>
-                <a:latin typeface="Calibri"/>
-              </a:rPr>
-              <a:t>• scores = Q·Kᵀ / √d  — how much each word matches each other word</a:t>
-            </a:r>
-          </a:p>
-          <a:p>
-            <a:pPr>
-              <a:spcAft>
-                <a:spcPts val="800"/>
-              </a:spcAft>
-            </a:pPr>
-            <a:r>
-              <a:rPr sz="2000">
-                <a:solidFill>
-                  <a:srgbClr val="1A1A1A"/>
-                </a:solidFill>
-                <a:latin typeface="Calibri"/>
-              </a:rPr>
-              <a:t>• softmax each row → attention weights that sum to 1</a:t>
-            </a:r>
-          </a:p>
-          <a:p>
-            <a:pPr>
-              <a:spcAft>
-                <a:spcPts val="800"/>
-              </a:spcAft>
-            </a:pPr>
-            <a:r>
-              <a:rPr sz="2000">
-                <a:solidFill>
-                  <a:srgbClr val="1A1A1A"/>
-                </a:solidFill>
-                <a:latin typeface="Calibri"/>
-              </a:rPr>
-              <a:t>• output = weights · V — a context-aware mix of the value vectors</a:t>
-            </a:r>
-          </a:p>
-          <a:p>
-            <a:pPr lvl="1">
-              <a:spcAft>
-                <a:spcPts val="800"/>
-              </a:spcAft>
-            </a:pPr>
-            <a:r>
-              <a:rPr sz="1800">
-                <a:solidFill>
-                  <a:srgbClr val="6B7280"/>
-                </a:solidFill>
-                <a:latin typeface="Calibri"/>
-              </a:rPr>
-              <a:t>– Heatmap of the weights shows which words attend to which</a:t>
-            </a:r>
-          </a:p>
-          <a:p>
-            <a:pPr lvl="1">
-              <a:spcAft>
-                <a:spcPts val="800"/>
-              </a:spcAft>
-            </a:pPr>
-            <a:r>
-              <a:rPr sz="1800">
-                <a:solidFill>
-                  <a:srgbClr val="6B7280"/>
-                </a:solidFill>
-                <a:latin typeface="Calibri"/>
-              </a:rPr>
-              <a:t>– Multi-head = run it in parallel; stack layers → a Transformer</a:t>
-            </a:r>
-          </a:p>
-        </p:txBody>
-      </p:sp>
-      <p:sp>
-        <p:nvSpPr>
-          <p:cNvPr id="6" name="TextBox 5"/>
-          <p:cNvSpPr txBox="1"/>
-          <p:nvPr/>
-        </p:nvSpPr>
-        <p:spPr>
-          <a:xfrm>
-            <a:off x="365760" y="6446520"/>
-            <a:ext cx="8229600" cy="365760"/>
-          </a:xfrm>
-          <a:prstGeom prst="rect">
-            <a:avLst/>
-          </a:prstGeom>
-          <a:noFill/>
-        </p:spPr>
-        <p:txBody>
-          <a:bodyPr wrap="square">
-            <a:spAutoFit/>
-          </a:bodyPr>
-          <a:lstStyle/>
-          <a:p>
-            <a:pPr algn="l"/>
-            <a:r>
-              <a:rPr sz="1000" b="0">
-                <a:solidFill>
-                  <a:srgbClr val="6B7280"/>
-                </a:solidFill>
-                <a:latin typeface="Calibri"/>
-              </a:rPr>
-              <a:t>Palomar College · CSCI 250 · Fall 2026</a:t>
-            </a:r>
-          </a:p>
-        </p:txBody>
-      </p:sp>
-      <p:sp>
-        <p:nvSpPr>
-          <p:cNvPr id="7" name="TextBox 6"/>
-          <p:cNvSpPr txBox="1"/>
-          <p:nvPr/>
-        </p:nvSpPr>
-        <p:spPr>
-          <a:xfrm>
-            <a:off x="11155680" y="6446520"/>
-            <a:ext cx="822960" cy="365760"/>
-          </a:xfrm>
-          <a:prstGeom prst="rect">
-            <a:avLst/>
-          </a:prstGeom>
-          <a:noFill/>
-        </p:spPr>
-        <p:txBody>
-          <a:bodyPr wrap="square">
-            <a:spAutoFit/>
-          </a:bodyPr>
-          <a:lstStyle/>
-          <a:p>
-            <a:pPr algn="r"/>
-            <a:r>
-              <a:rPr sz="1000" b="0">
-                <a:solidFill>
-                  <a:srgbClr val="6B7280"/>
-                </a:solidFill>
-                <a:latin typeface="Calibri"/>
-              </a:rPr>
-              <a:t>13/16</a:t>
             </a:r>
           </a:p>
         </p:txBody>
@@ -4523,118 +4493,21 @@
                 </a:solidFill>
                 <a:latin typeface="Calibri"/>
               </a:rPr>
-              <a:t>Attention in 3 Lines of NumPy</a:t>
-            </a:r>
-          </a:p>
-        </p:txBody>
-      </p:sp>
-      <p:sp>
-        <p:nvSpPr>
-          <p:cNvPr id="5" name="Rectangle 4"/>
-          <p:cNvSpPr/>
-          <p:nvPr/>
-        </p:nvSpPr>
-        <p:spPr>
-          <a:xfrm>
-            <a:off x="548640" y="1325880"/>
-            <a:ext cx="11064240" cy="4480560"/>
-          </a:xfrm>
-          <a:prstGeom prst="rect">
-            <a:avLst/>
-          </a:prstGeom>
-          <a:solidFill>
-            <a:srgbClr val="1E1E1E"/>
-          </a:solidFill>
-          <a:ln>
-            <a:noFill/>
-          </a:ln>
-          <a:effectLst/>
-        </p:spPr>
-        <p:style>
-          <a:lnRef idx="1">
-            <a:schemeClr val="accent1"/>
-          </a:lnRef>
-          <a:fillRef idx="3">
-            <a:schemeClr val="accent1"/>
-          </a:fillRef>
-          <a:effectRef idx="2">
-            <a:schemeClr val="accent1"/>
-          </a:effectRef>
-          <a:fontRef idx="minor">
-            <a:schemeClr val="lt1"/>
-          </a:fontRef>
-        </p:style>
-        <p:txBody>
-          <a:bodyPr rtlCol="0" anchor="ctr" wrap="square" lIns="182880" tIns="137160"/>
-          <a:lstStyle/>
-          <a:p>
-            <a:pPr algn="ctr"/>
-            <a:r>
-              <a:rPr sz="1500">
-                <a:solidFill>
-                  <a:srgbClr val="E6E6E6"/>
-                </a:solidFill>
-                <a:latin typeface="Consolas"/>
-              </a:rPr>
-              <a:t>scores  = (Q @ K.T) / np.sqrt(d)   # match strength</a:t>
-            </a:r>
-          </a:p>
-          <a:p>
-            <a:r>
-              <a:rPr sz="1500">
-                <a:solidFill>
-                  <a:srgbClr val="E6E6E6"/>
-                </a:solidFill>
-                <a:latin typeface="Consolas"/>
-              </a:rPr>
-              <a:t>weights = softmax_rows(scores)     # rows sum to 1</a:t>
-            </a:r>
-          </a:p>
-          <a:p>
-            <a:r>
-              <a:rPr sz="1500">
-                <a:solidFill>
-                  <a:srgbClr val="E6E6E6"/>
-                </a:solidFill>
-                <a:latin typeface="Consolas"/>
-              </a:rPr>
-              <a:t>output  = weights @ V              # context mix</a:t>
-            </a:r>
-          </a:p>
-          <a:p>
-            <a:r>
-              <a:rPr sz="1500">
-                <a:solidFill>
-                  <a:srgbClr val="E6E6E6"/>
-                </a:solidFill>
-                <a:latin typeface="Consolas"/>
-              </a:rPr>
-              <a:t> </a:t>
-            </a:r>
-          </a:p>
-          <a:p>
-            <a:r>
-              <a:rPr sz="1500">
-                <a:solidFill>
-                  <a:srgbClr val="E6E6E6"/>
-                </a:solidFill>
-                <a:latin typeface="Consolas"/>
-              </a:rPr>
-              <a:t># plot 'weights' as a heatmap -&gt; the engine, made visible</a:t>
-            </a:r>
-          </a:p>
-        </p:txBody>
-      </p:sp>
-      <p:sp>
-        <p:nvSpPr>
-          <p:cNvPr id="6" name="TextBox 5"/>
+              <a:t>Scaled Dot-Product Attention</a:t>
+            </a:r>
+          </a:p>
+        </p:txBody>
+      </p:sp>
+      <p:sp>
+        <p:nvSpPr>
+          <p:cNvPr id="5" name="TextBox 4"/>
           <p:cNvSpPr txBox="1"/>
           <p:nvPr/>
         </p:nvSpPr>
         <p:spPr>
           <a:xfrm>
-            <a:off x="548640" y="5897880"/>
-            <a:ext cx="10515600" cy="457200"/>
+            <a:off x="731520" y="1371600"/>
+            <a:ext cx="10698480" cy="4754880"/>
           </a:xfrm>
           <a:prstGeom prst="rect">
             <a:avLst/>
@@ -4647,22 +4520,106 @@
           </a:bodyPr>
           <a:lstStyle/>
           <a:p>
-            <a:pPr algn="l"/>
-            <a:r>
-              <a:rPr sz="1400" b="0">
+            <a:pPr>
+              <a:spcAft>
+                <a:spcPts val="800"/>
+              </a:spcAft>
+            </a:pPr>
+            <a:r>
+              <a:rPr sz="2000">
+                <a:solidFill>
+                  <a:srgbClr val="1A1A1A"/>
+                </a:solidFill>
+                <a:latin typeface="Calibri"/>
+              </a:rPr>
+              <a:t>• Each word → Q (query), K (key), V (value) vectors</a:t>
+            </a:r>
+          </a:p>
+          <a:p>
+            <a:pPr>
+              <a:spcAft>
+                <a:spcPts val="800"/>
+              </a:spcAft>
+            </a:pPr>
+            <a:r>
+              <a:rPr sz="2000">
+                <a:solidFill>
+                  <a:srgbClr val="1A1A1A"/>
+                </a:solidFill>
+                <a:latin typeface="Calibri"/>
+              </a:rPr>
+              <a:t>• scores = Q·Kᵀ / √d  — how much each word matches each other word</a:t>
+            </a:r>
+          </a:p>
+          <a:p>
+            <a:pPr>
+              <a:spcAft>
+                <a:spcPts val="800"/>
+              </a:spcAft>
+            </a:pPr>
+            <a:r>
+              <a:rPr sz="2000">
+                <a:solidFill>
+                  <a:srgbClr val="1A1A1A"/>
+                </a:solidFill>
+                <a:latin typeface="Calibri"/>
+              </a:rPr>
+              <a:t>• softmax each row → attention weights that sum to 1</a:t>
+            </a:r>
+          </a:p>
+          <a:p>
+            <a:pPr>
+              <a:spcAft>
+                <a:spcPts val="800"/>
+              </a:spcAft>
+            </a:pPr>
+            <a:r>
+              <a:rPr sz="2000">
+                <a:solidFill>
+                  <a:srgbClr val="1A1A1A"/>
+                </a:solidFill>
+                <a:latin typeface="Calibri"/>
+              </a:rPr>
+              <a:t>• output = weights · V — a context-aware mix of the value vectors</a:t>
+            </a:r>
+          </a:p>
+          <a:p>
+            <a:pPr lvl="1">
+              <a:spcAft>
+                <a:spcPts val="800"/>
+              </a:spcAft>
+            </a:pPr>
+            <a:r>
+              <a:rPr sz="1800">
                 <a:solidFill>
                   <a:srgbClr val="6B7280"/>
                 </a:solidFill>
                 <a:latin typeface="Calibri"/>
               </a:rPr>
-              <a:t>code/04_attention_from_scratch.ipynb — the operation inside every LLM, in pure NumPy.</a:t>
-            </a:r>
-          </a:p>
-        </p:txBody>
-      </p:sp>
-      <p:sp>
-        <p:nvSpPr>
-          <p:cNvPr id="7" name="TextBox 6"/>
+              <a:t>– Heatmap of the weights shows which words attend to which</a:t>
+            </a:r>
+          </a:p>
+          <a:p>
+            <a:pPr lvl="1">
+              <a:spcAft>
+                <a:spcPts val="800"/>
+              </a:spcAft>
+            </a:pPr>
+            <a:r>
+              <a:rPr sz="1800">
+                <a:solidFill>
+                  <a:srgbClr val="6B7280"/>
+                </a:solidFill>
+                <a:latin typeface="Calibri"/>
+              </a:rPr>
+              <a:t>– Multi-head = run it in parallel; stack layers → a Transformer</a:t>
+            </a:r>
+          </a:p>
+        </p:txBody>
+      </p:sp>
+      <p:sp>
+        <p:nvSpPr>
+          <p:cNvPr id="6" name="TextBox 5"/>
           <p:cNvSpPr txBox="1"/>
           <p:nvPr/>
         </p:nvSpPr>
@@ -4697,7 +4654,7 @@
       </p:sp>
       <p:sp>
         <p:nvSpPr>
-          <p:cNvPr id="8" name="TextBox 7"/>
+          <p:cNvPr id="7" name="TextBox 6"/>
           <p:cNvSpPr txBox="1"/>
           <p:nvPr/>
         </p:nvSpPr>
@@ -4725,7 +4682,7 @@
                 </a:solidFill>
                 <a:latin typeface="Calibri"/>
               </a:rPr>
-              <a:t>14/16</a:t>
+              <a:t>14/18</a:t>
             </a:r>
           </a:p>
         </p:txBody>
@@ -4874,21 +4831,118 @@
                 </a:solidFill>
                 <a:latin typeface="Calibri"/>
               </a:rPr>
-              <a:t>Three Ways to Run a Model</a:t>
-            </a:r>
-          </a:p>
-        </p:txBody>
-      </p:sp>
-      <p:sp>
-        <p:nvSpPr>
-          <p:cNvPr id="5" name="TextBox 4"/>
+              <a:t>Attention in 3 Lines of NumPy</a:t>
+            </a:r>
+          </a:p>
+        </p:txBody>
+      </p:sp>
+      <p:sp>
+        <p:nvSpPr>
+          <p:cNvPr id="5" name="Rectangle 4"/>
+          <p:cNvSpPr/>
+          <p:nvPr/>
+        </p:nvSpPr>
+        <p:spPr>
+          <a:xfrm>
+            <a:off x="548640" y="1325880"/>
+            <a:ext cx="11064240" cy="4480560"/>
+          </a:xfrm>
+          <a:prstGeom prst="rect">
+            <a:avLst/>
+          </a:prstGeom>
+          <a:solidFill>
+            <a:srgbClr val="1E1E1E"/>
+          </a:solidFill>
+          <a:ln>
+            <a:noFill/>
+          </a:ln>
+          <a:effectLst/>
+        </p:spPr>
+        <p:style>
+          <a:lnRef idx="1">
+            <a:schemeClr val="accent1"/>
+          </a:lnRef>
+          <a:fillRef idx="3">
+            <a:schemeClr val="accent1"/>
+          </a:fillRef>
+          <a:effectRef idx="2">
+            <a:schemeClr val="accent1"/>
+          </a:effectRef>
+          <a:fontRef idx="minor">
+            <a:schemeClr val="lt1"/>
+          </a:fontRef>
+        </p:style>
+        <p:txBody>
+          <a:bodyPr rtlCol="0" anchor="ctr" wrap="square" lIns="182880" tIns="137160"/>
+          <a:lstStyle/>
+          <a:p>
+            <a:pPr algn="ctr"/>
+            <a:r>
+              <a:rPr sz="1500">
+                <a:solidFill>
+                  <a:srgbClr val="E6E6E6"/>
+                </a:solidFill>
+                <a:latin typeface="Consolas"/>
+              </a:rPr>
+              <a:t>scores  = (Q @ K.T) / np.sqrt(d)   # match strength</a:t>
+            </a:r>
+          </a:p>
+          <a:p>
+            <a:r>
+              <a:rPr sz="1500">
+                <a:solidFill>
+                  <a:srgbClr val="E6E6E6"/>
+                </a:solidFill>
+                <a:latin typeface="Consolas"/>
+              </a:rPr>
+              <a:t>weights = softmax_rows(scores)     # rows sum to 1</a:t>
+            </a:r>
+          </a:p>
+          <a:p>
+            <a:r>
+              <a:rPr sz="1500">
+                <a:solidFill>
+                  <a:srgbClr val="E6E6E6"/>
+                </a:solidFill>
+                <a:latin typeface="Consolas"/>
+              </a:rPr>
+              <a:t>output  = weights @ V              # context mix</a:t>
+            </a:r>
+          </a:p>
+          <a:p>
+            <a:r>
+              <a:rPr sz="1500">
+                <a:solidFill>
+                  <a:srgbClr val="E6E6E6"/>
+                </a:solidFill>
+                <a:latin typeface="Consolas"/>
+              </a:rPr>
+              <a:t> </a:t>
+            </a:r>
+          </a:p>
+          <a:p>
+            <a:r>
+              <a:rPr sz="1500">
+                <a:solidFill>
+                  <a:srgbClr val="E6E6E6"/>
+                </a:solidFill>
+                <a:latin typeface="Consolas"/>
+              </a:rPr>
+              <a:t># plot 'weights' as a heatmap -&gt; the engine, made visible</a:t>
+            </a:r>
+          </a:p>
+        </p:txBody>
+      </p:sp>
+      <p:sp>
+        <p:nvSpPr>
+          <p:cNvPr id="6" name="TextBox 5"/>
           <p:cNvSpPr txBox="1"/>
           <p:nvPr/>
         </p:nvSpPr>
         <p:spPr>
           <a:xfrm>
-            <a:off x="731520" y="1280160"/>
-            <a:ext cx="5120640" cy="548640"/>
+            <a:off x="548640" y="5897880"/>
+            <a:ext cx="10515600" cy="457200"/>
           </a:xfrm>
           <a:prstGeom prst="rect">
             <a:avLst/>
@@ -4903,27 +4957,27 @@
           <a:p>
             <a:pPr algn="l"/>
             <a:r>
-              <a:rPr sz="2000" b="1">
-                <a:solidFill>
-                  <a:srgbClr val="128C8C"/>
-                </a:solidFill>
-                <a:latin typeface="Calibri"/>
-              </a:rPr>
-              <a:t>Cloud APIs (need a key)</a:t>
-            </a:r>
-          </a:p>
-        </p:txBody>
-      </p:sp>
-      <p:sp>
-        <p:nvSpPr>
-          <p:cNvPr id="6" name="TextBox 5"/>
+              <a:rPr sz="1400" b="0">
+                <a:solidFill>
+                  <a:srgbClr val="6B7280"/>
+                </a:solidFill>
+                <a:latin typeface="Calibri"/>
+              </a:rPr>
+              <a:t>code/04 — the operation inside every LLM, pure NumPy. Scope cap: encoder-style; real decoder LLMs add a causal mask.</a:t>
+            </a:r>
+          </a:p>
+        </p:txBody>
+      </p:sp>
+      <p:sp>
+        <p:nvSpPr>
+          <p:cNvPr id="7" name="TextBox 6"/>
           <p:cNvSpPr txBox="1"/>
           <p:nvPr/>
         </p:nvSpPr>
         <p:spPr>
           <a:xfrm>
-            <a:off x="731520" y="1828800"/>
-            <a:ext cx="5120640" cy="4206240"/>
+            <a:off x="365760" y="6446520"/>
+            <a:ext cx="8229600" cy="365760"/>
           </a:xfrm>
           <a:prstGeom prst="rect">
             <a:avLst/>
@@ -4936,49 +4990,29 @@
           </a:bodyPr>
           <a:lstStyle/>
           <a:p>
-            <a:pPr>
-              <a:spcAft>
-                <a:spcPts val="800"/>
-              </a:spcAft>
-            </a:pPr>
-            <a:r>
-              <a:rPr sz="1800">
-                <a:solidFill>
-                  <a:srgbClr val="1A1A1A"/>
-                </a:solidFill>
-                <a:latin typeface="Calibri"/>
-              </a:rPr>
-              <a:t>• Anthropic Claude — messages.create</a:t>
-            </a:r>
-          </a:p>
-          <a:p>
-            <a:pPr>
-              <a:spcAft>
-                <a:spcPts val="800"/>
-              </a:spcAft>
-            </a:pPr>
-            <a:r>
-              <a:rPr sz="1800">
-                <a:solidFill>
-                  <a:srgbClr val="1A1A1A"/>
-                </a:solidFill>
-                <a:latin typeface="Calibri"/>
-              </a:rPr>
-              <a:t>• Google Gemini + AI Studio</a:t>
-            </a:r>
-          </a:p>
-        </p:txBody>
-      </p:sp>
-      <p:sp>
-        <p:nvSpPr>
-          <p:cNvPr id="7" name="TextBox 6"/>
+            <a:pPr algn="l"/>
+            <a:r>
+              <a:rPr sz="1000" b="0">
+                <a:solidFill>
+                  <a:srgbClr val="6B7280"/>
+                </a:solidFill>
+                <a:latin typeface="Calibri"/>
+              </a:rPr>
+              <a:t>Palomar College · CSCI 250 · Fall 2026</a:t>
+            </a:r>
+          </a:p>
+        </p:txBody>
+      </p:sp>
+      <p:sp>
+        <p:nvSpPr>
+          <p:cNvPr id="8" name="TextBox 7"/>
           <p:cNvSpPr txBox="1"/>
           <p:nvPr/>
         </p:nvSpPr>
         <p:spPr>
           <a:xfrm>
-            <a:off x="6309360" y="1280160"/>
-            <a:ext cx="5120640" cy="548640"/>
+            <a:off x="11155680" y="6446520"/>
+            <a:ext cx="822960" cy="365760"/>
           </a:xfrm>
           <a:prstGeom prst="rect">
             <a:avLst/>
@@ -4991,97 +5025,7 @@
           </a:bodyPr>
           <a:lstStyle/>
           <a:p>
-            <a:pPr algn="l"/>
-            <a:r>
-              <a:rPr sz="2000" b="1">
-                <a:solidFill>
-                  <a:srgbClr val="128C8C"/>
-                </a:solidFill>
-                <a:latin typeface="Calibri"/>
-              </a:rPr>
-              <a:t>Local (no key, no cost)</a:t>
-            </a:r>
-          </a:p>
-        </p:txBody>
-      </p:sp>
-      <p:sp>
-        <p:nvSpPr>
-          <p:cNvPr id="8" name="TextBox 7"/>
-          <p:cNvSpPr txBox="1"/>
-          <p:nvPr/>
-        </p:nvSpPr>
-        <p:spPr>
-          <a:xfrm>
-            <a:off x="6309360" y="1828800"/>
-            <a:ext cx="5120640" cy="4206240"/>
-          </a:xfrm>
-          <a:prstGeom prst="rect">
-            <a:avLst/>
-          </a:prstGeom>
-          <a:noFill/>
-        </p:spPr>
-        <p:txBody>
-          <a:bodyPr wrap="square">
-            <a:spAutoFit/>
-          </a:bodyPr>
-          <a:lstStyle/>
-          <a:p>
-            <a:pPr>
-              <a:spcAft>
-                <a:spcPts val="800"/>
-              </a:spcAft>
-            </a:pPr>
-            <a:r>
-              <a:rPr sz="1800">
-                <a:solidFill>
-                  <a:srgbClr val="1A1A1A"/>
-                </a:solidFill>
-                <a:latin typeface="Calibri"/>
-              </a:rPr>
-              <a:t>• Ollama (Llama, Mistral, Gemma)</a:t>
-            </a:r>
-          </a:p>
-          <a:p>
-            <a:pPr>
-              <a:spcAft>
-                <a:spcPts val="800"/>
-              </a:spcAft>
-            </a:pPr>
-            <a:r>
-              <a:rPr sz="1800">
-                <a:solidFill>
-                  <a:srgbClr val="1A1A1A"/>
-                </a:solidFill>
-                <a:latin typeface="Calibri"/>
-              </a:rPr>
-              <a:t>• Hugging Face transformers</a:t>
-            </a:r>
-          </a:p>
-        </p:txBody>
-      </p:sp>
-      <p:sp>
-        <p:nvSpPr>
-          <p:cNvPr id="9" name="TextBox 8"/>
-          <p:cNvSpPr txBox="1"/>
-          <p:nvPr/>
-        </p:nvSpPr>
-        <p:spPr>
-          <a:xfrm>
-            <a:off x="365760" y="6446520"/>
-            <a:ext cx="8229600" cy="365760"/>
-          </a:xfrm>
-          <a:prstGeom prst="rect">
-            <a:avLst/>
-          </a:prstGeom>
-          <a:noFill/>
-        </p:spPr>
-        <p:txBody>
-          <a:bodyPr wrap="square">
-            <a:spAutoFit/>
-          </a:bodyPr>
-          <a:lstStyle/>
-          <a:p>
-            <a:pPr algn="l"/>
+            <a:pPr algn="r"/>
             <a:r>
               <a:rPr sz="1000" b="0">
                 <a:solidFill>
@@ -5089,42 +5033,7 @@
                 </a:solidFill>
                 <a:latin typeface="Calibri"/>
               </a:rPr>
-              <a:t>Palomar College · CSCI 250 · Fall 2026</a:t>
-            </a:r>
-          </a:p>
-        </p:txBody>
-      </p:sp>
-      <p:sp>
-        <p:nvSpPr>
-          <p:cNvPr id="10" name="TextBox 9"/>
-          <p:cNvSpPr txBox="1"/>
-          <p:nvPr/>
-        </p:nvSpPr>
-        <p:spPr>
-          <a:xfrm>
-            <a:off x="11155680" y="6446520"/>
-            <a:ext cx="822960" cy="365760"/>
-          </a:xfrm>
-          <a:prstGeom prst="rect">
-            <a:avLst/>
-          </a:prstGeom>
-          <a:noFill/>
-        </p:spPr>
-        <p:txBody>
-          <a:bodyPr wrap="square">
-            <a:spAutoFit/>
-          </a:bodyPr>
-          <a:lstStyle/>
-          <a:p>
-            <a:pPr algn="r"/>
-            <a:r>
-              <a:rPr sz="1000" b="0">
-                <a:solidFill>
-                  <a:srgbClr val="6B7280"/>
-                </a:solidFill>
-                <a:latin typeface="Calibri"/>
-              </a:rPr>
-              <a:t>15/16</a:t>
+              <a:t>15/18</a:t>
             </a:r>
           </a:p>
         </p:txBody>
@@ -5138,6 +5047,711 @@
 </file>
 
 <file path=ppt/slides/slide16.xml><?xml version="1.0" encoding="utf-8"?>
+<p:sld xmlns:a="http://schemas.openxmlformats.org/drawingml/2006/main" xmlns:p="http://schemas.openxmlformats.org/presentationml/2006/main" xmlns:r="http://schemas.openxmlformats.org/officeDocument/2006/relationships">
+  <p:cSld>
+    <p:bg>
+      <p:bgPr>
+        <a:solidFill>
+          <a:srgbClr val="FFFFFF"/>
+        </a:solidFill>
+        <a:effectLst/>
+      </p:bgPr>
+    </p:bg>
+    <p:spTree>
+      <p:nvGrpSpPr>
+        <p:cNvPr id="1" name=""/>
+        <p:cNvGrpSpPr/>
+        <p:nvPr/>
+      </p:nvGrpSpPr>
+      <p:grpSpPr/>
+      <p:sp>
+        <p:nvSpPr>
+          <p:cNvPr id="2" name="Rectangle 1"/>
+          <p:cNvSpPr/>
+          <p:nvPr/>
+        </p:nvSpPr>
+        <p:spPr>
+          <a:xfrm>
+            <a:off x="0" y="0"/>
+            <a:ext cx="12191695" cy="1051560"/>
+          </a:xfrm>
+          <a:prstGeom prst="rect">
+            <a:avLst/>
+          </a:prstGeom>
+          <a:solidFill>
+            <a:srgbClr val="0B1F3A"/>
+          </a:solidFill>
+          <a:ln>
+            <a:noFill/>
+          </a:ln>
+          <a:effectLst/>
+        </p:spPr>
+        <p:style>
+          <a:lnRef idx="1">
+            <a:schemeClr val="accent1"/>
+          </a:lnRef>
+          <a:fillRef idx="3">
+            <a:schemeClr val="accent1"/>
+          </a:fillRef>
+          <a:effectRef idx="2">
+            <a:schemeClr val="accent1"/>
+          </a:effectRef>
+          <a:fontRef idx="minor">
+            <a:schemeClr val="lt1"/>
+          </a:fontRef>
+        </p:style>
+        <p:txBody>
+          <a:bodyPr rtlCol="0" anchor="ctr"/>
+          <a:lstStyle/>
+          <a:p>
+            <a:pPr algn="ctr"/>
+          </a:p>
+        </p:txBody>
+      </p:sp>
+      <p:sp>
+        <p:nvSpPr>
+          <p:cNvPr id="3" name="Rectangle 2"/>
+          <p:cNvSpPr/>
+          <p:nvPr/>
+        </p:nvSpPr>
+        <p:spPr>
+          <a:xfrm>
+            <a:off x="0" y="1051560"/>
+            <a:ext cx="12191695" cy="54864"/>
+          </a:xfrm>
+          <a:prstGeom prst="rect">
+            <a:avLst/>
+          </a:prstGeom>
+          <a:solidFill>
+            <a:srgbClr val="128C8C"/>
+          </a:solidFill>
+          <a:ln>
+            <a:noFill/>
+          </a:ln>
+          <a:effectLst/>
+        </p:spPr>
+        <p:style>
+          <a:lnRef idx="1">
+            <a:schemeClr val="accent1"/>
+          </a:lnRef>
+          <a:fillRef idx="3">
+            <a:schemeClr val="accent1"/>
+          </a:fillRef>
+          <a:effectRef idx="2">
+            <a:schemeClr val="accent1"/>
+          </a:effectRef>
+          <a:fontRef idx="minor">
+            <a:schemeClr val="lt1"/>
+          </a:fontRef>
+        </p:style>
+        <p:txBody>
+          <a:bodyPr rtlCol="0" anchor="ctr"/>
+          <a:lstStyle/>
+          <a:p>
+            <a:pPr algn="ctr"/>
+          </a:p>
+        </p:txBody>
+      </p:sp>
+      <p:sp>
+        <p:nvSpPr>
+          <p:cNvPr id="4" name="TextBox 3"/>
+          <p:cNvSpPr txBox="1"/>
+          <p:nvPr/>
+        </p:nvSpPr>
+        <p:spPr>
+          <a:xfrm>
+            <a:off x="548640" y="201168"/>
+            <a:ext cx="11064240" cy="731520"/>
+          </a:xfrm>
+          <a:prstGeom prst="rect">
+            <a:avLst/>
+          </a:prstGeom>
+          <a:noFill/>
+        </p:spPr>
+        <p:txBody>
+          <a:bodyPr wrap="square" anchor="ctr">
+            <a:spAutoFit/>
+          </a:bodyPr>
+          <a:lstStyle/>
+          <a:p>
+            <a:pPr algn="l"/>
+            <a:r>
+              <a:rPr sz="2800" b="1">
+                <a:solidFill>
+                  <a:srgbClr val="FFFFFF"/>
+                </a:solidFill>
+                <a:latin typeface="Calibri"/>
+              </a:rPr>
+              <a:t>Three Ways to Run a Model</a:t>
+            </a:r>
+          </a:p>
+        </p:txBody>
+      </p:sp>
+      <p:sp>
+        <p:nvSpPr>
+          <p:cNvPr id="5" name="TextBox 4"/>
+          <p:cNvSpPr txBox="1"/>
+          <p:nvPr/>
+        </p:nvSpPr>
+        <p:spPr>
+          <a:xfrm>
+            <a:off x="731520" y="1280160"/>
+            <a:ext cx="5120640" cy="548640"/>
+          </a:xfrm>
+          <a:prstGeom prst="rect">
+            <a:avLst/>
+          </a:prstGeom>
+          <a:noFill/>
+        </p:spPr>
+        <p:txBody>
+          <a:bodyPr wrap="square">
+            <a:spAutoFit/>
+          </a:bodyPr>
+          <a:lstStyle/>
+          <a:p>
+            <a:pPr algn="l"/>
+            <a:r>
+              <a:rPr sz="2000" b="1">
+                <a:solidFill>
+                  <a:srgbClr val="128C8C"/>
+                </a:solidFill>
+                <a:latin typeface="Calibri"/>
+              </a:rPr>
+              <a:t>Cloud APIs (need a key)</a:t>
+            </a:r>
+          </a:p>
+        </p:txBody>
+      </p:sp>
+      <p:sp>
+        <p:nvSpPr>
+          <p:cNvPr id="6" name="TextBox 5"/>
+          <p:cNvSpPr txBox="1"/>
+          <p:nvPr/>
+        </p:nvSpPr>
+        <p:spPr>
+          <a:xfrm>
+            <a:off x="731520" y="1828800"/>
+            <a:ext cx="5120640" cy="4206240"/>
+          </a:xfrm>
+          <a:prstGeom prst="rect">
+            <a:avLst/>
+          </a:prstGeom>
+          <a:noFill/>
+        </p:spPr>
+        <p:txBody>
+          <a:bodyPr wrap="square">
+            <a:spAutoFit/>
+          </a:bodyPr>
+          <a:lstStyle/>
+          <a:p>
+            <a:pPr>
+              <a:spcAft>
+                <a:spcPts val="800"/>
+              </a:spcAft>
+            </a:pPr>
+            <a:r>
+              <a:rPr sz="1800">
+                <a:solidFill>
+                  <a:srgbClr val="1A1A1A"/>
+                </a:solidFill>
+                <a:latin typeface="Calibri"/>
+              </a:rPr>
+              <a:t>• Anthropic Claude — messages.create</a:t>
+            </a:r>
+          </a:p>
+          <a:p>
+            <a:pPr>
+              <a:spcAft>
+                <a:spcPts val="800"/>
+              </a:spcAft>
+            </a:pPr>
+            <a:r>
+              <a:rPr sz="1800">
+                <a:solidFill>
+                  <a:srgbClr val="1A1A1A"/>
+                </a:solidFill>
+                <a:latin typeface="Calibri"/>
+              </a:rPr>
+              <a:t>• Google Gemini + AI Studio</a:t>
+            </a:r>
+          </a:p>
+        </p:txBody>
+      </p:sp>
+      <p:sp>
+        <p:nvSpPr>
+          <p:cNvPr id="7" name="TextBox 6"/>
+          <p:cNvSpPr txBox="1"/>
+          <p:nvPr/>
+        </p:nvSpPr>
+        <p:spPr>
+          <a:xfrm>
+            <a:off x="6309360" y="1280160"/>
+            <a:ext cx="5120640" cy="548640"/>
+          </a:xfrm>
+          <a:prstGeom prst="rect">
+            <a:avLst/>
+          </a:prstGeom>
+          <a:noFill/>
+        </p:spPr>
+        <p:txBody>
+          <a:bodyPr wrap="square">
+            <a:spAutoFit/>
+          </a:bodyPr>
+          <a:lstStyle/>
+          <a:p>
+            <a:pPr algn="l"/>
+            <a:r>
+              <a:rPr sz="2000" b="1">
+                <a:solidFill>
+                  <a:srgbClr val="128C8C"/>
+                </a:solidFill>
+                <a:latin typeface="Calibri"/>
+              </a:rPr>
+              <a:t>Local (no key, no cost)</a:t>
+            </a:r>
+          </a:p>
+        </p:txBody>
+      </p:sp>
+      <p:sp>
+        <p:nvSpPr>
+          <p:cNvPr id="8" name="TextBox 7"/>
+          <p:cNvSpPr txBox="1"/>
+          <p:nvPr/>
+        </p:nvSpPr>
+        <p:spPr>
+          <a:xfrm>
+            <a:off x="6309360" y="1828800"/>
+            <a:ext cx="5120640" cy="4206240"/>
+          </a:xfrm>
+          <a:prstGeom prst="rect">
+            <a:avLst/>
+          </a:prstGeom>
+          <a:noFill/>
+        </p:spPr>
+        <p:txBody>
+          <a:bodyPr wrap="square">
+            <a:spAutoFit/>
+          </a:bodyPr>
+          <a:lstStyle/>
+          <a:p>
+            <a:pPr>
+              <a:spcAft>
+                <a:spcPts val="800"/>
+              </a:spcAft>
+            </a:pPr>
+            <a:r>
+              <a:rPr sz="1800">
+                <a:solidFill>
+                  <a:srgbClr val="1A1A1A"/>
+                </a:solidFill>
+                <a:latin typeface="Calibri"/>
+              </a:rPr>
+              <a:t>• Ollama (Llama, Mistral, Gemma)</a:t>
+            </a:r>
+          </a:p>
+          <a:p>
+            <a:pPr>
+              <a:spcAft>
+                <a:spcPts val="800"/>
+              </a:spcAft>
+            </a:pPr>
+            <a:r>
+              <a:rPr sz="1800">
+                <a:solidFill>
+                  <a:srgbClr val="1A1A1A"/>
+                </a:solidFill>
+                <a:latin typeface="Calibri"/>
+              </a:rPr>
+              <a:t>• Hugging Face transformers</a:t>
+            </a:r>
+          </a:p>
+        </p:txBody>
+      </p:sp>
+      <p:sp>
+        <p:nvSpPr>
+          <p:cNvPr id="9" name="TextBox 8"/>
+          <p:cNvSpPr txBox="1"/>
+          <p:nvPr/>
+        </p:nvSpPr>
+        <p:spPr>
+          <a:xfrm>
+            <a:off x="365760" y="6446520"/>
+            <a:ext cx="8229600" cy="365760"/>
+          </a:xfrm>
+          <a:prstGeom prst="rect">
+            <a:avLst/>
+          </a:prstGeom>
+          <a:noFill/>
+        </p:spPr>
+        <p:txBody>
+          <a:bodyPr wrap="square">
+            <a:spAutoFit/>
+          </a:bodyPr>
+          <a:lstStyle/>
+          <a:p>
+            <a:pPr algn="l"/>
+            <a:r>
+              <a:rPr sz="1000" b="0">
+                <a:solidFill>
+                  <a:srgbClr val="6B7280"/>
+                </a:solidFill>
+                <a:latin typeface="Calibri"/>
+              </a:rPr>
+              <a:t>Palomar College · CSCI 250 · Fall 2026</a:t>
+            </a:r>
+          </a:p>
+        </p:txBody>
+      </p:sp>
+      <p:sp>
+        <p:nvSpPr>
+          <p:cNvPr id="10" name="TextBox 9"/>
+          <p:cNvSpPr txBox="1"/>
+          <p:nvPr/>
+        </p:nvSpPr>
+        <p:spPr>
+          <a:xfrm>
+            <a:off x="11155680" y="6446520"/>
+            <a:ext cx="822960" cy="365760"/>
+          </a:xfrm>
+          <a:prstGeom prst="rect">
+            <a:avLst/>
+          </a:prstGeom>
+          <a:noFill/>
+        </p:spPr>
+        <p:txBody>
+          <a:bodyPr wrap="square">
+            <a:spAutoFit/>
+          </a:bodyPr>
+          <a:lstStyle/>
+          <a:p>
+            <a:pPr algn="r"/>
+            <a:r>
+              <a:rPr sz="1000" b="0">
+                <a:solidFill>
+                  <a:srgbClr val="6B7280"/>
+                </a:solidFill>
+                <a:latin typeface="Calibri"/>
+              </a:rPr>
+              <a:t>16/18</a:t>
+            </a:r>
+          </a:p>
+        </p:txBody>
+      </p:sp>
+    </p:spTree>
+  </p:cSld>
+  <p:clrMapOvr>
+    <a:masterClrMapping/>
+  </p:clrMapOvr>
+</p:sld>
+</file>
+
+<file path=ppt/slides/slide17.xml><?xml version="1.0" encoding="utf-8"?>
+<p:sld xmlns:a="http://schemas.openxmlformats.org/drawingml/2006/main" xmlns:p="http://schemas.openxmlformats.org/presentationml/2006/main" xmlns:r="http://schemas.openxmlformats.org/officeDocument/2006/relationships">
+  <p:cSld>
+    <p:bg>
+      <p:bgPr>
+        <a:solidFill>
+          <a:srgbClr val="FFFFFF"/>
+        </a:solidFill>
+        <a:effectLst/>
+      </p:bgPr>
+    </p:bg>
+    <p:spTree>
+      <p:nvGrpSpPr>
+        <p:cNvPr id="1" name=""/>
+        <p:cNvGrpSpPr/>
+        <p:nvPr/>
+      </p:nvGrpSpPr>
+      <p:grpSpPr/>
+      <p:sp>
+        <p:nvSpPr>
+          <p:cNvPr id="2" name="Rectangle 1"/>
+          <p:cNvSpPr/>
+          <p:nvPr/>
+        </p:nvSpPr>
+        <p:spPr>
+          <a:xfrm>
+            <a:off x="0" y="0"/>
+            <a:ext cx="12191695" cy="1051560"/>
+          </a:xfrm>
+          <a:prstGeom prst="rect">
+            <a:avLst/>
+          </a:prstGeom>
+          <a:solidFill>
+            <a:srgbClr val="0B1F3A"/>
+          </a:solidFill>
+          <a:ln>
+            <a:noFill/>
+          </a:ln>
+          <a:effectLst/>
+        </p:spPr>
+        <p:style>
+          <a:lnRef idx="1">
+            <a:schemeClr val="accent1"/>
+          </a:lnRef>
+          <a:fillRef idx="3">
+            <a:schemeClr val="accent1"/>
+          </a:fillRef>
+          <a:effectRef idx="2">
+            <a:schemeClr val="accent1"/>
+          </a:effectRef>
+          <a:fontRef idx="minor">
+            <a:schemeClr val="lt1"/>
+          </a:fontRef>
+        </p:style>
+        <p:txBody>
+          <a:bodyPr rtlCol="0" anchor="ctr"/>
+          <a:lstStyle/>
+          <a:p>
+            <a:pPr algn="ctr"/>
+          </a:p>
+        </p:txBody>
+      </p:sp>
+      <p:sp>
+        <p:nvSpPr>
+          <p:cNvPr id="3" name="Rectangle 2"/>
+          <p:cNvSpPr/>
+          <p:nvPr/>
+        </p:nvSpPr>
+        <p:spPr>
+          <a:xfrm>
+            <a:off x="0" y="1051560"/>
+            <a:ext cx="12191695" cy="54864"/>
+          </a:xfrm>
+          <a:prstGeom prst="rect">
+            <a:avLst/>
+          </a:prstGeom>
+          <a:solidFill>
+            <a:srgbClr val="128C8C"/>
+          </a:solidFill>
+          <a:ln>
+            <a:noFill/>
+          </a:ln>
+          <a:effectLst/>
+        </p:spPr>
+        <p:style>
+          <a:lnRef idx="1">
+            <a:schemeClr val="accent1"/>
+          </a:lnRef>
+          <a:fillRef idx="3">
+            <a:schemeClr val="accent1"/>
+          </a:fillRef>
+          <a:effectRef idx="2">
+            <a:schemeClr val="accent1"/>
+          </a:effectRef>
+          <a:fontRef idx="minor">
+            <a:schemeClr val="lt1"/>
+          </a:fontRef>
+        </p:style>
+        <p:txBody>
+          <a:bodyPr rtlCol="0" anchor="ctr"/>
+          <a:lstStyle/>
+          <a:p>
+            <a:pPr algn="ctr"/>
+          </a:p>
+        </p:txBody>
+      </p:sp>
+      <p:sp>
+        <p:nvSpPr>
+          <p:cNvPr id="4" name="TextBox 3"/>
+          <p:cNvSpPr txBox="1"/>
+          <p:nvPr/>
+        </p:nvSpPr>
+        <p:spPr>
+          <a:xfrm>
+            <a:off x="548640" y="201168"/>
+            <a:ext cx="11064240" cy="731520"/>
+          </a:xfrm>
+          <a:prstGeom prst="rect">
+            <a:avLst/>
+          </a:prstGeom>
+          <a:noFill/>
+        </p:spPr>
+        <p:txBody>
+          <a:bodyPr wrap="square" anchor="ctr">
+            <a:spAutoFit/>
+          </a:bodyPr>
+          <a:lstStyle/>
+          <a:p>
+            <a:pPr algn="l"/>
+            <a:r>
+              <a:rPr sz="2800" b="1">
+                <a:solidFill>
+                  <a:srgbClr val="FFFFFF"/>
+                </a:solidFill>
+                <a:latin typeface="Calibri"/>
+              </a:rPr>
+              <a:t>🎯 Start My Assistant — Just Pick</a:t>
+            </a:r>
+          </a:p>
+        </p:txBody>
+      </p:sp>
+      <p:sp>
+        <p:nvSpPr>
+          <p:cNvPr id="5" name="TextBox 4"/>
+          <p:cNvSpPr txBox="1"/>
+          <p:nvPr/>
+        </p:nvSpPr>
+        <p:spPr>
+          <a:xfrm>
+            <a:off x="731520" y="1371600"/>
+            <a:ext cx="10698480" cy="4754880"/>
+          </a:xfrm>
+          <a:prstGeom prst="rect">
+            <a:avLst/>
+          </a:prstGeom>
+          <a:noFill/>
+        </p:spPr>
+        <p:txBody>
+          <a:bodyPr wrap="square">
+            <a:spAutoFit/>
+          </a:bodyPr>
+          <a:lstStyle/>
+          <a:p>
+            <a:pPr>
+              <a:spcAft>
+                <a:spcPts val="800"/>
+              </a:spcAft>
+            </a:pPr>
+            <a:r>
+              <a:rPr sz="2000">
+                <a:solidFill>
+                  <a:srgbClr val="1A1A1A"/>
+                </a:solidFill>
+                <a:latin typeface="Calibri"/>
+              </a:rPr>
+              <a:t>• Your final project begins this week — but ONLY pick your idea + track</a:t>
+            </a:r>
+          </a:p>
+          <a:p>
+            <a:pPr>
+              <a:spcAft>
+                <a:spcPts val="800"/>
+              </a:spcAft>
+            </a:pPr>
+            <a:r>
+              <a:rPr sz="2000">
+                <a:solidFill>
+                  <a:srgbClr val="1A1A1A"/>
+                </a:solidFill>
+                <a:latin typeface="Calibri"/>
+              </a:rPr>
+              <a:t>• Tracks: RAG · Tool-Using Agent · Multimodal · Fine-Tuned (see Capstone doc)</a:t>
+            </a:r>
+          </a:p>
+          <a:p>
+            <a:pPr>
+              <a:spcAft>
+                <a:spcPts val="800"/>
+              </a:spcAft>
+            </a:pPr>
+            <a:r>
+              <a:rPr sz="2000">
+                <a:solidFill>
+                  <a:srgbClr val="1A1A1A"/>
+                </a:solidFill>
+                <a:latin typeface="Calibri"/>
+              </a:rPr>
+              <a:t>• Don't build the app this week — jot a one-line idea, that's enough</a:t>
+            </a:r>
+          </a:p>
+          <a:p>
+            <a:pPr lvl="1">
+              <a:spcAft>
+                <a:spcPts val="800"/>
+              </a:spcAft>
+            </a:pPr>
+            <a:r>
+              <a:rPr sz="1800">
+                <a:solidFill>
+                  <a:srgbClr val="6B7280"/>
+                </a:solidFill>
+                <a:latin typeface="Calibri"/>
+              </a:rPr>
+              <a:t>– Graded proposal + 'wow in 5 min' prototype = Milestone M1, due Week 9</a:t>
+            </a:r>
+          </a:p>
+        </p:txBody>
+      </p:sp>
+      <p:sp>
+        <p:nvSpPr>
+          <p:cNvPr id="6" name="TextBox 5"/>
+          <p:cNvSpPr txBox="1"/>
+          <p:nvPr/>
+        </p:nvSpPr>
+        <p:spPr>
+          <a:xfrm>
+            <a:off x="365760" y="6446520"/>
+            <a:ext cx="8229600" cy="365760"/>
+          </a:xfrm>
+          <a:prstGeom prst="rect">
+            <a:avLst/>
+          </a:prstGeom>
+          <a:noFill/>
+        </p:spPr>
+        <p:txBody>
+          <a:bodyPr wrap="square">
+            <a:spAutoFit/>
+          </a:bodyPr>
+          <a:lstStyle/>
+          <a:p>
+            <a:pPr algn="l"/>
+            <a:r>
+              <a:rPr sz="1000" b="0">
+                <a:solidFill>
+                  <a:srgbClr val="6B7280"/>
+                </a:solidFill>
+                <a:latin typeface="Calibri"/>
+              </a:rPr>
+              <a:t>Palomar College · CSCI 250 · Fall 2026</a:t>
+            </a:r>
+          </a:p>
+        </p:txBody>
+      </p:sp>
+      <p:sp>
+        <p:nvSpPr>
+          <p:cNvPr id="7" name="TextBox 6"/>
+          <p:cNvSpPr txBox="1"/>
+          <p:nvPr/>
+        </p:nvSpPr>
+        <p:spPr>
+          <a:xfrm>
+            <a:off x="11155680" y="6446520"/>
+            <a:ext cx="822960" cy="365760"/>
+          </a:xfrm>
+          <a:prstGeom prst="rect">
+            <a:avLst/>
+          </a:prstGeom>
+          <a:noFill/>
+        </p:spPr>
+        <p:txBody>
+          <a:bodyPr wrap="square">
+            <a:spAutoFit/>
+          </a:bodyPr>
+          <a:lstStyle/>
+          <a:p>
+            <a:pPr algn="r"/>
+            <a:r>
+              <a:rPr sz="1000" b="0">
+                <a:solidFill>
+                  <a:srgbClr val="6B7280"/>
+                </a:solidFill>
+                <a:latin typeface="Calibri"/>
+              </a:rPr>
+              <a:t>17/18</a:t>
+            </a:r>
+          </a:p>
+        </p:txBody>
+      </p:sp>
+    </p:spTree>
+  </p:cSld>
+  <p:clrMapOvr>
+    <a:masterClrMapping/>
+  </p:clrMapOvr>
+</p:sld>
+</file>
+
+<file path=ppt/slides/slide18.xml><?xml version="1.0" encoding="utf-8"?>
 <p:sld xmlns:a="http://schemas.openxmlformats.org/drawingml/2006/main" xmlns:p="http://schemas.openxmlformats.org/presentationml/2006/main" xmlns:r="http://schemas.openxmlformats.org/officeDocument/2006/relationships">
   <p:cSld>
     <p:bg>
@@ -5300,7 +5914,7 @@
                 </a:solidFill>
                 <a:latin typeface="Calibri"/>
               </a:rPr>
-              <a:t>✓ Build the BPE tokenizer (03) — fill-ins + round-trip on your text</a:t>
+              <a:t>✓ Build the BPE tokenizer (03) + attention (04) — concepts-first; running &gt; fill-ins if short on time</a:t>
             </a:r>
           </a:p>
           <a:p>
@@ -5316,7 +5930,7 @@
                 </a:solidFill>
                 <a:latin typeface="Calibri"/>
               </a:rPr>
-              <a:t>✓ Build attention (04) — fill-ins + paste your heatmap</a:t>
+              <a:t>✓ Do the hallucination hunt + comparison table</a:t>
             </a:r>
           </a:p>
           <a:p>
@@ -5332,7 +5946,7 @@
                 </a:solidFill>
                 <a:latin typeface="Calibri"/>
               </a:rPr>
-              <a:t>✓ Do the hallucination hunt + comparison table</a:t>
+              <a:t>✓ Pick your capstone idea + track (building starts Week 9)</a:t>
             </a:r>
           </a:p>
           <a:p>
@@ -5418,7 +6032,7 @@
                 </a:solidFill>
                 <a:latin typeface="Calibri"/>
               </a:rPr>
-              <a:t>16/16</a:t>
+              <a:t>18/18</a:t>
             </a:r>
           </a:p>
         </p:txBody>
@@ -5772,7 +6386,7 @@
                 </a:solidFill>
                 <a:latin typeface="Calibri"/>
               </a:rPr>
-              <a:t>2/16</a:t>
+              <a:t>2/18</a:t>
             </a:r>
           </a:p>
         </p:txBody>
@@ -5786,6 +6400,328 @@
 </file>
 
 <file path=ppt/slides/slide3.xml><?xml version="1.0" encoding="utf-8"?>
+<p:sld xmlns:a="http://schemas.openxmlformats.org/drawingml/2006/main" xmlns:p="http://schemas.openxmlformats.org/presentationml/2006/main" xmlns:r="http://schemas.openxmlformats.org/officeDocument/2006/relationships">
+  <p:cSld>
+    <p:bg>
+      <p:bgPr>
+        <a:solidFill>
+          <a:srgbClr val="FFFFFF"/>
+        </a:solidFill>
+        <a:effectLst/>
+      </p:bgPr>
+    </p:bg>
+    <p:spTree>
+      <p:nvGrpSpPr>
+        <p:cNvPr id="1" name=""/>
+        <p:cNvGrpSpPr/>
+        <p:nvPr/>
+      </p:nvGrpSpPr>
+      <p:grpSpPr/>
+      <p:sp>
+        <p:nvSpPr>
+          <p:cNvPr id="2" name="Rectangle 1"/>
+          <p:cNvSpPr/>
+          <p:nvPr/>
+        </p:nvSpPr>
+        <p:spPr>
+          <a:xfrm>
+            <a:off x="0" y="0"/>
+            <a:ext cx="12191695" cy="1051560"/>
+          </a:xfrm>
+          <a:prstGeom prst="rect">
+            <a:avLst/>
+          </a:prstGeom>
+          <a:solidFill>
+            <a:srgbClr val="0B1F3A"/>
+          </a:solidFill>
+          <a:ln>
+            <a:noFill/>
+          </a:ln>
+          <a:effectLst/>
+        </p:spPr>
+        <p:style>
+          <a:lnRef idx="1">
+            <a:schemeClr val="accent1"/>
+          </a:lnRef>
+          <a:fillRef idx="3">
+            <a:schemeClr val="accent1"/>
+          </a:fillRef>
+          <a:effectRef idx="2">
+            <a:schemeClr val="accent1"/>
+          </a:effectRef>
+          <a:fontRef idx="minor">
+            <a:schemeClr val="lt1"/>
+          </a:fontRef>
+        </p:style>
+        <p:txBody>
+          <a:bodyPr rtlCol="0" anchor="ctr"/>
+          <a:lstStyle/>
+          <a:p>
+            <a:pPr algn="ctr"/>
+          </a:p>
+        </p:txBody>
+      </p:sp>
+      <p:sp>
+        <p:nvSpPr>
+          <p:cNvPr id="3" name="Rectangle 2"/>
+          <p:cNvSpPr/>
+          <p:nvPr/>
+        </p:nvSpPr>
+        <p:spPr>
+          <a:xfrm>
+            <a:off x="0" y="1051560"/>
+            <a:ext cx="12191695" cy="54864"/>
+          </a:xfrm>
+          <a:prstGeom prst="rect">
+            <a:avLst/>
+          </a:prstGeom>
+          <a:solidFill>
+            <a:srgbClr val="128C8C"/>
+          </a:solidFill>
+          <a:ln>
+            <a:noFill/>
+          </a:ln>
+          <a:effectLst/>
+        </p:spPr>
+        <p:style>
+          <a:lnRef idx="1">
+            <a:schemeClr val="accent1"/>
+          </a:lnRef>
+          <a:fillRef idx="3">
+            <a:schemeClr val="accent1"/>
+          </a:fillRef>
+          <a:effectRef idx="2">
+            <a:schemeClr val="accent1"/>
+          </a:effectRef>
+          <a:fontRef idx="minor">
+            <a:schemeClr val="lt1"/>
+          </a:fontRef>
+        </p:style>
+        <p:txBody>
+          <a:bodyPr rtlCol="0" anchor="ctr"/>
+          <a:lstStyle/>
+          <a:p>
+            <a:pPr algn="ctr"/>
+          </a:p>
+        </p:txBody>
+      </p:sp>
+      <p:sp>
+        <p:nvSpPr>
+          <p:cNvPr id="4" name="TextBox 3"/>
+          <p:cNvSpPr txBox="1"/>
+          <p:nvPr/>
+        </p:nvSpPr>
+        <p:spPr>
+          <a:xfrm>
+            <a:off x="548640" y="201168"/>
+            <a:ext cx="11064240" cy="731520"/>
+          </a:xfrm>
+          <a:prstGeom prst="rect">
+            <a:avLst/>
+          </a:prstGeom>
+          <a:noFill/>
+        </p:spPr>
+        <p:txBody>
+          <a:bodyPr wrap="square" anchor="ctr">
+            <a:spAutoFit/>
+          </a:bodyPr>
+          <a:lstStyle/>
+          <a:p>
+            <a:pPr algn="l"/>
+            <a:r>
+              <a:rPr sz="2800" b="1">
+                <a:solidFill>
+                  <a:srgbClr val="FFFFFF"/>
+                </a:solidFill>
+                <a:latin typeface="Calibri"/>
+              </a:rPr>
+              <a:t>🧭 How to Approach This Week</a:t>
+            </a:r>
+          </a:p>
+        </p:txBody>
+      </p:sp>
+      <p:sp>
+        <p:nvSpPr>
+          <p:cNvPr id="5" name="TextBox 4"/>
+          <p:cNvSpPr txBox="1"/>
+          <p:nvPr/>
+        </p:nvSpPr>
+        <p:spPr>
+          <a:xfrm>
+            <a:off x="731520" y="1371600"/>
+            <a:ext cx="10698480" cy="4754880"/>
+          </a:xfrm>
+          <a:prstGeom prst="rect">
+            <a:avLst/>
+          </a:prstGeom>
+          <a:noFill/>
+        </p:spPr>
+        <p:txBody>
+          <a:bodyPr wrap="square">
+            <a:spAutoFit/>
+          </a:bodyPr>
+          <a:lstStyle/>
+          <a:p>
+            <a:pPr>
+              <a:spcAft>
+                <a:spcPts val="800"/>
+              </a:spcAft>
+            </a:pPr>
+            <a:r>
+              <a:rPr sz="2000">
+                <a:solidFill>
+                  <a:srgbClr val="1A1A1A"/>
+                </a:solidFill>
+                <a:latin typeface="Calibri"/>
+              </a:rPr>
+              <a:t>• The hardest week — and it's right after the midterm. Pace yourself.</a:t>
+            </a:r>
+          </a:p>
+          <a:p>
+            <a:pPr>
+              <a:spcAft>
+                <a:spcPts val="800"/>
+              </a:spcAft>
+            </a:pPr>
+            <a:r>
+              <a:rPr sz="2000">
+                <a:solidFill>
+                  <a:srgbClr val="1A1A1A"/>
+                </a:solidFill>
+                <a:latin typeface="Calibri"/>
+              </a:rPr>
+              <a:t>• From-scratch labs (BPE, attention) are CONCEPTS-FIRST — we stop at understanding</a:t>
+            </a:r>
+          </a:p>
+          <a:p>
+            <a:pPr>
+              <a:spcAft>
+                <a:spcPts val="800"/>
+              </a:spcAft>
+            </a:pPr>
+            <a:r>
+              <a:rPr sz="2000">
+                <a:solidFill>
+                  <a:srgbClr val="1A1A1A"/>
+                </a:solidFill>
+                <a:latin typeface="Calibri"/>
+              </a:rPr>
+              <a:t>• No full Transformer, no training a real LLM; every fill-in ships a working answer</a:t>
+            </a:r>
+          </a:p>
+          <a:p>
+            <a:pPr>
+              <a:spcAft>
+                <a:spcPts val="800"/>
+              </a:spcAft>
+            </a:pPr>
+            <a:r>
+              <a:rPr sz="2000">
+                <a:solidFill>
+                  <a:srgbClr val="1A1A1A"/>
+                </a:solidFill>
+                <a:latin typeface="Calibri"/>
+              </a:rPr>
+              <a:t>• Short on time? Prioritize running + understanding over the optional fill-ins</a:t>
+            </a:r>
+          </a:p>
+          <a:p>
+            <a:pPr lvl="1">
+              <a:spcAft>
+                <a:spcPts val="800"/>
+              </a:spcAft>
+            </a:pPr>
+            <a:r>
+              <a:rPr sz="1800">
+                <a:solidFill>
+                  <a:srgbClr val="6B7280"/>
+                </a:solidFill>
+                <a:latin typeface="Calibri"/>
+              </a:rPr>
+              <a:t>– Capstone this week = PICK your idea/track only; graded M1 is due Week 9</a:t>
+            </a:r>
+          </a:p>
+        </p:txBody>
+      </p:sp>
+      <p:sp>
+        <p:nvSpPr>
+          <p:cNvPr id="6" name="TextBox 5"/>
+          <p:cNvSpPr txBox="1"/>
+          <p:nvPr/>
+        </p:nvSpPr>
+        <p:spPr>
+          <a:xfrm>
+            <a:off x="365760" y="6446520"/>
+            <a:ext cx="8229600" cy="365760"/>
+          </a:xfrm>
+          <a:prstGeom prst="rect">
+            <a:avLst/>
+          </a:prstGeom>
+          <a:noFill/>
+        </p:spPr>
+        <p:txBody>
+          <a:bodyPr wrap="square">
+            <a:spAutoFit/>
+          </a:bodyPr>
+          <a:lstStyle/>
+          <a:p>
+            <a:pPr algn="l"/>
+            <a:r>
+              <a:rPr sz="1000" b="0">
+                <a:solidFill>
+                  <a:srgbClr val="6B7280"/>
+                </a:solidFill>
+                <a:latin typeface="Calibri"/>
+              </a:rPr>
+              <a:t>Palomar College · CSCI 250 · Fall 2026</a:t>
+            </a:r>
+          </a:p>
+        </p:txBody>
+      </p:sp>
+      <p:sp>
+        <p:nvSpPr>
+          <p:cNvPr id="7" name="TextBox 6"/>
+          <p:cNvSpPr txBox="1"/>
+          <p:nvPr/>
+        </p:nvSpPr>
+        <p:spPr>
+          <a:xfrm>
+            <a:off x="11155680" y="6446520"/>
+            <a:ext cx="822960" cy="365760"/>
+          </a:xfrm>
+          <a:prstGeom prst="rect">
+            <a:avLst/>
+          </a:prstGeom>
+          <a:noFill/>
+        </p:spPr>
+        <p:txBody>
+          <a:bodyPr wrap="square">
+            <a:spAutoFit/>
+          </a:bodyPr>
+          <a:lstStyle/>
+          <a:p>
+            <a:pPr algn="r"/>
+            <a:r>
+              <a:rPr sz="1000" b="0">
+                <a:solidFill>
+                  <a:srgbClr val="6B7280"/>
+                </a:solidFill>
+                <a:latin typeface="Calibri"/>
+              </a:rPr>
+              <a:t>3/18</a:t>
+            </a:r>
+          </a:p>
+        </p:txBody>
+      </p:sp>
+    </p:spTree>
+  </p:cSld>
+  <p:clrMapOvr>
+    <a:masterClrMapping/>
+  </p:clrMapOvr>
+</p:sld>
+</file>
+
+<file path=ppt/slides/slide4.xml><?xml version="1.0" encoding="utf-8"?>
 <p:sld xmlns:a="http://schemas.openxmlformats.org/drawingml/2006/main" xmlns:p="http://schemas.openxmlformats.org/presentationml/2006/main" xmlns:r="http://schemas.openxmlformats.org/officeDocument/2006/relationships">
   <p:cSld>
     <p:bg>
@@ -5834,328 +6770,6 @@
                 <a:latin typeface="Calibri"/>
               </a:rPr>
               <a:t>How LLMs Work</a:t>
-            </a:r>
-          </a:p>
-        </p:txBody>
-      </p:sp>
-    </p:spTree>
-  </p:cSld>
-  <p:clrMapOvr>
-    <a:masterClrMapping/>
-  </p:clrMapOvr>
-</p:sld>
-</file>
-
-<file path=ppt/slides/slide4.xml><?xml version="1.0" encoding="utf-8"?>
-<p:sld xmlns:a="http://schemas.openxmlformats.org/drawingml/2006/main" xmlns:p="http://schemas.openxmlformats.org/presentationml/2006/main" xmlns:r="http://schemas.openxmlformats.org/officeDocument/2006/relationships">
-  <p:cSld>
-    <p:bg>
-      <p:bgPr>
-        <a:solidFill>
-          <a:srgbClr val="FFFFFF"/>
-        </a:solidFill>
-        <a:effectLst/>
-      </p:bgPr>
-    </p:bg>
-    <p:spTree>
-      <p:nvGrpSpPr>
-        <p:cNvPr id="1" name=""/>
-        <p:cNvGrpSpPr/>
-        <p:nvPr/>
-      </p:nvGrpSpPr>
-      <p:grpSpPr/>
-      <p:sp>
-        <p:nvSpPr>
-          <p:cNvPr id="2" name="Rectangle 1"/>
-          <p:cNvSpPr/>
-          <p:nvPr/>
-        </p:nvSpPr>
-        <p:spPr>
-          <a:xfrm>
-            <a:off x="0" y="0"/>
-            <a:ext cx="12191695" cy="1051560"/>
-          </a:xfrm>
-          <a:prstGeom prst="rect">
-            <a:avLst/>
-          </a:prstGeom>
-          <a:solidFill>
-            <a:srgbClr val="0B1F3A"/>
-          </a:solidFill>
-          <a:ln>
-            <a:noFill/>
-          </a:ln>
-          <a:effectLst/>
-        </p:spPr>
-        <p:style>
-          <a:lnRef idx="1">
-            <a:schemeClr val="accent1"/>
-          </a:lnRef>
-          <a:fillRef idx="3">
-            <a:schemeClr val="accent1"/>
-          </a:fillRef>
-          <a:effectRef idx="2">
-            <a:schemeClr val="accent1"/>
-          </a:effectRef>
-          <a:fontRef idx="minor">
-            <a:schemeClr val="lt1"/>
-          </a:fontRef>
-        </p:style>
-        <p:txBody>
-          <a:bodyPr rtlCol="0" anchor="ctr"/>
-          <a:lstStyle/>
-          <a:p>
-            <a:pPr algn="ctr"/>
-          </a:p>
-        </p:txBody>
-      </p:sp>
-      <p:sp>
-        <p:nvSpPr>
-          <p:cNvPr id="3" name="Rectangle 2"/>
-          <p:cNvSpPr/>
-          <p:nvPr/>
-        </p:nvSpPr>
-        <p:spPr>
-          <a:xfrm>
-            <a:off x="0" y="1051560"/>
-            <a:ext cx="12191695" cy="54864"/>
-          </a:xfrm>
-          <a:prstGeom prst="rect">
-            <a:avLst/>
-          </a:prstGeom>
-          <a:solidFill>
-            <a:srgbClr val="128C8C"/>
-          </a:solidFill>
-          <a:ln>
-            <a:noFill/>
-          </a:ln>
-          <a:effectLst/>
-        </p:spPr>
-        <p:style>
-          <a:lnRef idx="1">
-            <a:schemeClr val="accent1"/>
-          </a:lnRef>
-          <a:fillRef idx="3">
-            <a:schemeClr val="accent1"/>
-          </a:fillRef>
-          <a:effectRef idx="2">
-            <a:schemeClr val="accent1"/>
-          </a:effectRef>
-          <a:fontRef idx="minor">
-            <a:schemeClr val="lt1"/>
-          </a:fontRef>
-        </p:style>
-        <p:txBody>
-          <a:bodyPr rtlCol="0" anchor="ctr"/>
-          <a:lstStyle/>
-          <a:p>
-            <a:pPr algn="ctr"/>
-          </a:p>
-        </p:txBody>
-      </p:sp>
-      <p:sp>
-        <p:nvSpPr>
-          <p:cNvPr id="4" name="TextBox 3"/>
-          <p:cNvSpPr txBox="1"/>
-          <p:nvPr/>
-        </p:nvSpPr>
-        <p:spPr>
-          <a:xfrm>
-            <a:off x="548640" y="201168"/>
-            <a:ext cx="11064240" cy="731520"/>
-          </a:xfrm>
-          <a:prstGeom prst="rect">
-            <a:avLst/>
-          </a:prstGeom>
-          <a:noFill/>
-        </p:spPr>
-        <p:txBody>
-          <a:bodyPr wrap="square" anchor="ctr">
-            <a:spAutoFit/>
-          </a:bodyPr>
-          <a:lstStyle/>
-          <a:p>
-            <a:pPr algn="l"/>
-            <a:r>
-              <a:rPr sz="2800" b="1">
-                <a:solidFill>
-                  <a:srgbClr val="FFFFFF"/>
-                </a:solidFill>
-                <a:latin typeface="Calibri"/>
-              </a:rPr>
-              <a:t>Next-Token Prediction</a:t>
-            </a:r>
-          </a:p>
-        </p:txBody>
-      </p:sp>
-      <p:sp>
-        <p:nvSpPr>
-          <p:cNvPr id="5" name="TextBox 4"/>
-          <p:cNvSpPr txBox="1"/>
-          <p:nvPr/>
-        </p:nvSpPr>
-        <p:spPr>
-          <a:xfrm>
-            <a:off x="731520" y="1371600"/>
-            <a:ext cx="10698480" cy="4754880"/>
-          </a:xfrm>
-          <a:prstGeom prst="rect">
-            <a:avLst/>
-          </a:prstGeom>
-          <a:noFill/>
-        </p:spPr>
-        <p:txBody>
-          <a:bodyPr wrap="square">
-            <a:spAutoFit/>
-          </a:bodyPr>
-          <a:lstStyle/>
-          <a:p>
-            <a:pPr>
-              <a:spcAft>
-                <a:spcPts val="800"/>
-              </a:spcAft>
-            </a:pPr>
-            <a:r>
-              <a:rPr sz="2000">
-                <a:solidFill>
-                  <a:srgbClr val="1A1A1A"/>
-                </a:solidFill>
-                <a:latin typeface="Calibri"/>
-              </a:rPr>
-              <a:t>• An LLM is a large Transformer neural network (builds on Week 6)</a:t>
-            </a:r>
-          </a:p>
-          <a:p>
-            <a:pPr>
-              <a:spcAft>
-                <a:spcPts val="800"/>
-              </a:spcAft>
-            </a:pPr>
-            <a:r>
-              <a:rPr sz="2000">
-                <a:solidFill>
-                  <a:srgbClr val="1A1A1A"/>
-                </a:solidFill>
-                <a:latin typeface="Calibri"/>
-              </a:rPr>
-              <a:t>• Trained to predict the next token from the tokens so far</a:t>
-            </a:r>
-          </a:p>
-          <a:p>
-            <a:pPr>
-              <a:spcAft>
-                <a:spcPts val="800"/>
-              </a:spcAft>
-            </a:pPr>
-            <a:r>
-              <a:rPr sz="2000">
-                <a:solidFill>
-                  <a:srgbClr val="1A1A1A"/>
-                </a:solidFill>
-                <a:latin typeface="Calibri"/>
-              </a:rPr>
-              <a:t>• Chat = repeat: predict → append → predict (autoregressive)</a:t>
-            </a:r>
-          </a:p>
-          <a:p>
-            <a:pPr lvl="1">
-              <a:spcAft>
-                <a:spcPts val="800"/>
-              </a:spcAft>
-            </a:pPr>
-            <a:r>
-              <a:rPr sz="1800">
-                <a:solidFill>
-                  <a:srgbClr val="6B7280"/>
-                </a:solidFill>
-                <a:latin typeface="Calibri"/>
-              </a:rPr>
-              <a:t>– No database lookup — text is generated, not retrieved</a:t>
-            </a:r>
-          </a:p>
-          <a:p>
-            <a:pPr lvl="1">
-              <a:spcAft>
-                <a:spcPts val="800"/>
-              </a:spcAft>
-            </a:pPr>
-            <a:r>
-              <a:rPr sz="1800">
-                <a:solidFill>
-                  <a:srgbClr val="6B7280"/>
-                </a:solidFill>
-                <a:latin typeface="Calibri"/>
-              </a:rPr>
-              <a:t>– This is why LLMs are fluent AND why they can make things up</a:t>
-            </a:r>
-          </a:p>
-        </p:txBody>
-      </p:sp>
-      <p:sp>
-        <p:nvSpPr>
-          <p:cNvPr id="6" name="TextBox 5"/>
-          <p:cNvSpPr txBox="1"/>
-          <p:nvPr/>
-        </p:nvSpPr>
-        <p:spPr>
-          <a:xfrm>
-            <a:off x="365760" y="6446520"/>
-            <a:ext cx="8229600" cy="365760"/>
-          </a:xfrm>
-          <a:prstGeom prst="rect">
-            <a:avLst/>
-          </a:prstGeom>
-          <a:noFill/>
-        </p:spPr>
-        <p:txBody>
-          <a:bodyPr wrap="square">
-            <a:spAutoFit/>
-          </a:bodyPr>
-          <a:lstStyle/>
-          <a:p>
-            <a:pPr algn="l"/>
-            <a:r>
-              <a:rPr sz="1000" b="0">
-                <a:solidFill>
-                  <a:srgbClr val="6B7280"/>
-                </a:solidFill>
-                <a:latin typeface="Calibri"/>
-              </a:rPr>
-              <a:t>Palomar College · CSCI 250 · Fall 2026</a:t>
-            </a:r>
-          </a:p>
-        </p:txBody>
-      </p:sp>
-      <p:sp>
-        <p:nvSpPr>
-          <p:cNvPr id="7" name="TextBox 6"/>
-          <p:cNvSpPr txBox="1"/>
-          <p:nvPr/>
-        </p:nvSpPr>
-        <p:spPr>
-          <a:xfrm>
-            <a:off x="11155680" y="6446520"/>
-            <a:ext cx="822960" cy="365760"/>
-          </a:xfrm>
-          <a:prstGeom prst="rect">
-            <a:avLst/>
-          </a:prstGeom>
-          <a:noFill/>
-        </p:spPr>
-        <p:txBody>
-          <a:bodyPr wrap="square">
-            <a:spAutoFit/>
-          </a:bodyPr>
-          <a:lstStyle/>
-          <a:p>
-            <a:pPr algn="r"/>
-            <a:r>
-              <a:rPr sz="1000" b="0">
-                <a:solidFill>
-                  <a:srgbClr val="6B7280"/>
-                </a:solidFill>
-                <a:latin typeface="Calibri"/>
-              </a:rPr>
-              <a:t>4/16</a:t>
             </a:r>
           </a:p>
         </p:txBody>
@@ -6304,7 +6918,7 @@
                 </a:solidFill>
                 <a:latin typeface="Calibri"/>
               </a:rPr>
-              <a:t>Tokens &amp; the Context Window</a:t>
+              <a:t>Next-Token Prediction</a:t>
             </a:r>
           </a:p>
         </p:txBody>
@@ -6343,7 +6957,7 @@
                 </a:solidFill>
                 <a:latin typeface="Calibri"/>
               </a:rPr>
-              <a:t>• Models see tokens (sub-word IDs), not characters or words</a:t>
+              <a:t>• An LLM is a large Transformer neural network (builds on Week 6)</a:t>
             </a:r>
           </a:p>
           <a:p>
@@ -6359,7 +6973,7 @@
                 </a:solidFill>
                 <a:latin typeface="Calibri"/>
               </a:rPr>
-              <a:t>• Rule of thumb: 1 token ≈ 4 chars ≈ 0.75 words; rare words split into several</a:t>
+              <a:t>• Trained to predict the next token from the tokens so far</a:t>
             </a:r>
           </a:p>
           <a:p>
@@ -6375,23 +6989,7 @@
                 </a:solidFill>
                 <a:latin typeface="Calibri"/>
               </a:rPr>
-              <a:t>• You pay per token; max_tokens caps the response</a:t>
-            </a:r>
-          </a:p>
-          <a:p>
-            <a:pPr>
-              <a:spcAft>
-                <a:spcPts val="800"/>
-              </a:spcAft>
-            </a:pPr>
-            <a:r>
-              <a:rPr sz="2000">
-                <a:solidFill>
-                  <a:srgbClr val="1A1A1A"/>
-                </a:solidFill>
-                <a:latin typeface="Calibri"/>
-              </a:rPr>
-              <a:t>• Context window = max tokens the model can attend to at once</a:t>
+              <a:t>• Chat = repeat: predict → append → predict (autoregressive)</a:t>
             </a:r>
           </a:p>
           <a:p>
@@ -6407,7 +7005,7 @@
                 </a:solidFill>
                 <a:latin typeface="Calibri"/>
               </a:rPr>
-              <a:t>– Prompt + generated reply must both fit inside it</a:t>
+              <a:t>– No database lookup — text is generated, not retrieved</a:t>
             </a:r>
           </a:p>
           <a:p>
@@ -6423,23 +7021,7 @@
                 </a:solidFill>
                 <a:latin typeface="Calibri"/>
               </a:rPr>
-              <a:t>– No memory between API calls — the client replays history</a:t>
-            </a:r>
-          </a:p>
-          <a:p>
-            <a:pPr lvl="1">
-              <a:spcAft>
-                <a:spcPts val="800"/>
-              </a:spcAft>
-            </a:pPr>
-            <a:r>
-              <a:rPr sz="1800">
-                <a:solidFill>
-                  <a:srgbClr val="6B7280"/>
-                </a:solidFill>
-                <a:latin typeface="Calibri"/>
-              </a:rPr>
-              <a:t>– Long docs need chunking → RAG (Week 11)</a:t>
+              <a:t>– This is why LLMs are fluent AND why they can make things up</a:t>
             </a:r>
           </a:p>
         </p:txBody>
@@ -6509,7 +7091,7 @@
                 </a:solidFill>
                 <a:latin typeface="Calibri"/>
               </a:rPr>
-              <a:t>5/16</a:t>
+              <a:t>5/18</a:t>
             </a:r>
           </a:p>
         </p:txBody>
@@ -6658,151 +7240,21 @@
                 </a:solidFill>
                 <a:latin typeface="Calibri"/>
               </a:rPr>
-              <a:t>Sampling Parameters</a:t>
-            </a:r>
-          </a:p>
-        </p:txBody>
-      </p:sp>
-      <p:sp>
-        <p:nvSpPr>
-          <p:cNvPr id="5" name="Rectangle 4"/>
-          <p:cNvSpPr/>
-          <p:nvPr/>
-        </p:nvSpPr>
-        <p:spPr>
-          <a:xfrm>
-            <a:off x="548640" y="1325880"/>
-            <a:ext cx="11064240" cy="4480560"/>
-          </a:xfrm>
-          <a:prstGeom prst="rect">
-            <a:avLst/>
-          </a:prstGeom>
-          <a:solidFill>
-            <a:srgbClr val="1E1E1E"/>
-          </a:solidFill>
-          <a:ln>
-            <a:noFill/>
-          </a:ln>
-          <a:effectLst/>
-        </p:spPr>
-        <p:style>
-          <a:lnRef idx="1">
-            <a:schemeClr val="accent1"/>
-          </a:lnRef>
-          <a:fillRef idx="3">
-            <a:schemeClr val="accent1"/>
-          </a:fillRef>
-          <a:effectRef idx="2">
-            <a:schemeClr val="accent1"/>
-          </a:effectRef>
-          <a:fontRef idx="minor">
-            <a:schemeClr val="lt1"/>
-          </a:fontRef>
-        </p:style>
-        <p:txBody>
-          <a:bodyPr rtlCol="0" anchor="ctr" wrap="square" lIns="182880" tIns="137160"/>
-          <a:lstStyle/>
-          <a:p>
-            <a:pPr algn="ctr"/>
-            <a:r>
-              <a:rPr sz="1500">
-                <a:solidFill>
-                  <a:srgbClr val="E6E6E6"/>
-                </a:solidFill>
-                <a:latin typeface="Consolas"/>
-              </a:rPr>
-              <a:t>msg = client.messages.create(</a:t>
-            </a:r>
-          </a:p>
-          <a:p>
-            <a:r>
-              <a:rPr sz="1500">
-                <a:solidFill>
-                  <a:srgbClr val="E6E6E6"/>
-                </a:solidFill>
-                <a:latin typeface="Consolas"/>
-              </a:rPr>
-              <a:t>    model="claude-sonnet-4-6",</a:t>
-            </a:r>
-          </a:p>
-          <a:p>
-            <a:r>
-              <a:rPr sz="1500">
-                <a:solidFill>
-                  <a:srgbClr val="E6E6E6"/>
-                </a:solidFill>
-                <a:latin typeface="Consolas"/>
-              </a:rPr>
-              <a:t>    max_tokens=200,       # caps the RESPONSE length + cost</a:t>
-            </a:r>
-          </a:p>
-          <a:p>
-            <a:r>
-              <a:rPr sz="1500">
-                <a:solidFill>
-                  <a:srgbClr val="E6E6E6"/>
-                </a:solidFill>
-                <a:latin typeface="Consolas"/>
-              </a:rPr>
-              <a:t>    temperature=0.0,      # 0 = focused; ~1.0 = creative</a:t>
-            </a:r>
-          </a:p>
-          <a:p>
-            <a:r>
-              <a:rPr sz="1500">
-                <a:solidFill>
-                  <a:srgbClr val="E6E6E6"/>
-                </a:solidFill>
-                <a:latin typeface="Consolas"/>
-              </a:rPr>
-              <a:t>    messages=[{"role": "user",</a:t>
-            </a:r>
-          </a:p>
-          <a:p>
-            <a:r>
-              <a:rPr sz="1500">
-                <a:solidFill>
-                  <a:srgbClr val="E6E6E6"/>
-                </a:solidFill>
-                <a:latin typeface="Consolas"/>
-              </a:rPr>
-              <a:t>               "content": "List 3 uses of LLMs."}],</a:t>
-            </a:r>
-          </a:p>
-          <a:p>
-            <a:r>
-              <a:rPr sz="1500">
-                <a:solidFill>
-                  <a:srgbClr val="E6E6E6"/>
-                </a:solidFill>
-                <a:latin typeface="Consolas"/>
-              </a:rPr>
-              <a:t>)</a:t>
-            </a:r>
-          </a:p>
-          <a:p>
-            <a:r>
-              <a:rPr sz="1500">
-                <a:solidFill>
-                  <a:srgbClr val="E6E6E6"/>
-                </a:solidFill>
-                <a:latin typeface="Consolas"/>
-              </a:rPr>
-              <a:t>print(msg.content[0].text)</a:t>
-            </a:r>
-          </a:p>
-        </p:txBody>
-      </p:sp>
-      <p:sp>
-        <p:nvSpPr>
-          <p:cNvPr id="6" name="TextBox 5"/>
+              <a:t>Tokens &amp; the Context Window</a:t>
+            </a:r>
+          </a:p>
+        </p:txBody>
+      </p:sp>
+      <p:sp>
+        <p:nvSpPr>
+          <p:cNvPr id="5" name="TextBox 4"/>
           <p:cNvSpPr txBox="1"/>
           <p:nvPr/>
         </p:nvSpPr>
         <p:spPr>
           <a:xfrm>
-            <a:off x="548640" y="5897880"/>
-            <a:ext cx="10515600" cy="457200"/>
+            <a:off x="731520" y="1371600"/>
+            <a:ext cx="10698480" cy="4754880"/>
           </a:xfrm>
           <a:prstGeom prst="rect">
             <a:avLst/>
@@ -6815,22 +7267,122 @@
           </a:bodyPr>
           <a:lstStyle/>
           <a:p>
-            <a:pPr algn="l"/>
-            <a:r>
-              <a:rPr sz="1400" b="0">
+            <a:pPr>
+              <a:spcAft>
+                <a:spcPts val="800"/>
+              </a:spcAft>
+            </a:pPr>
+            <a:r>
+              <a:rPr sz="2000">
+                <a:solidFill>
+                  <a:srgbClr val="1A1A1A"/>
+                </a:solidFill>
+                <a:latin typeface="Calibri"/>
+              </a:rPr>
+              <a:t>• Models see tokens (sub-word IDs), not characters or words</a:t>
+            </a:r>
+          </a:p>
+          <a:p>
+            <a:pPr>
+              <a:spcAft>
+                <a:spcPts val="800"/>
+              </a:spcAft>
+            </a:pPr>
+            <a:r>
+              <a:rPr sz="2000">
+                <a:solidFill>
+                  <a:srgbClr val="1A1A1A"/>
+                </a:solidFill>
+                <a:latin typeface="Calibri"/>
+              </a:rPr>
+              <a:t>• Rule of thumb: 1 token ≈ 4 chars ≈ 0.75 words; rare words split into several</a:t>
+            </a:r>
+          </a:p>
+          <a:p>
+            <a:pPr>
+              <a:spcAft>
+                <a:spcPts val="800"/>
+              </a:spcAft>
+            </a:pPr>
+            <a:r>
+              <a:rPr sz="2000">
+                <a:solidFill>
+                  <a:srgbClr val="1A1A1A"/>
+                </a:solidFill>
+                <a:latin typeface="Calibri"/>
+              </a:rPr>
+              <a:t>• You pay per token; max_tokens caps the response</a:t>
+            </a:r>
+          </a:p>
+          <a:p>
+            <a:pPr>
+              <a:spcAft>
+                <a:spcPts val="800"/>
+              </a:spcAft>
+            </a:pPr>
+            <a:r>
+              <a:rPr sz="2000">
+                <a:solidFill>
+                  <a:srgbClr val="1A1A1A"/>
+                </a:solidFill>
+                <a:latin typeface="Calibri"/>
+              </a:rPr>
+              <a:t>• Context window = max tokens the model can attend to at once</a:t>
+            </a:r>
+          </a:p>
+          <a:p>
+            <a:pPr lvl="1">
+              <a:spcAft>
+                <a:spcPts val="800"/>
+              </a:spcAft>
+            </a:pPr>
+            <a:r>
+              <a:rPr sz="1800">
                 <a:solidFill>
                   <a:srgbClr val="6B7280"/>
                 </a:solidFill>
                 <a:latin typeface="Calibri"/>
               </a:rPr>
-              <a:t>temp=0 for extraction/code; temp~0.7–1.0 for brainstorming. top-p = nucleus sampling.</a:t>
-            </a:r>
-          </a:p>
-        </p:txBody>
-      </p:sp>
-      <p:sp>
-        <p:nvSpPr>
-          <p:cNvPr id="7" name="TextBox 6"/>
+              <a:t>– Prompt + generated reply must both fit inside it</a:t>
+            </a:r>
+          </a:p>
+          <a:p>
+            <a:pPr lvl="1">
+              <a:spcAft>
+                <a:spcPts val="800"/>
+              </a:spcAft>
+            </a:pPr>
+            <a:r>
+              <a:rPr sz="1800">
+                <a:solidFill>
+                  <a:srgbClr val="6B7280"/>
+                </a:solidFill>
+                <a:latin typeface="Calibri"/>
+              </a:rPr>
+              <a:t>– No memory between API calls — the client replays history</a:t>
+            </a:r>
+          </a:p>
+          <a:p>
+            <a:pPr lvl="1">
+              <a:spcAft>
+                <a:spcPts val="800"/>
+              </a:spcAft>
+            </a:pPr>
+            <a:r>
+              <a:rPr sz="1800">
+                <a:solidFill>
+                  <a:srgbClr val="6B7280"/>
+                </a:solidFill>
+                <a:latin typeface="Calibri"/>
+              </a:rPr>
+              <a:t>– Long docs need chunking → RAG (Week 11)</a:t>
+            </a:r>
+          </a:p>
+        </p:txBody>
+      </p:sp>
+      <p:sp>
+        <p:nvSpPr>
+          <p:cNvPr id="6" name="TextBox 5"/>
           <p:cNvSpPr txBox="1"/>
           <p:nvPr/>
         </p:nvSpPr>
@@ -6865,7 +7417,7 @@
       </p:sp>
       <p:sp>
         <p:nvSpPr>
-          <p:cNvPr id="8" name="TextBox 7"/>
+          <p:cNvPr id="7" name="TextBox 6"/>
           <p:cNvSpPr txBox="1"/>
           <p:nvPr/>
         </p:nvSpPr>
@@ -6893,7 +7445,7 @@
                 </a:solidFill>
                 <a:latin typeface="Calibri"/>
               </a:rPr>
-              <a:t>6/16</a:t>
+              <a:t>6/18</a:t>
             </a:r>
           </a:p>
         </p:txBody>
@@ -7042,7 +7594,7 @@
                 </a:solidFill>
                 <a:latin typeface="Calibri"/>
               </a:rPr>
-              <a:t>In-Context Learning (Few-Shot)</a:t>
+              <a:t>Sampling Parameters</a:t>
             </a:r>
           </a:p>
         </p:txBody>
@@ -7095,7 +7647,7 @@
                 </a:solidFill>
                 <a:latin typeface="Consolas"/>
               </a:rPr>
-              <a:t>Review: "Loved every minute." -&gt; positive</a:t>
+              <a:t>msg = client.messages.create(</a:t>
             </a:r>
           </a:p>
           <a:p>
@@ -7106,7 +7658,7 @@
                 </a:solidFill>
                 <a:latin typeface="Consolas"/>
               </a:rPr>
-              <a:t>Review: "A complete waste of time." -&gt; negative</a:t>
+              <a:t>    model="claude-sonnet-4-6",</a:t>
             </a:r>
           </a:p>
           <a:p>
@@ -7117,7 +7669,62 @@
                 </a:solidFill>
                 <a:latin typeface="Consolas"/>
               </a:rPr>
-              <a:t>Review: "The acting saved a dull script." -&gt;</a:t>
+              <a:t>    max_tokens=200,       # caps the RESPONSE length + cost</a:t>
+            </a:r>
+          </a:p>
+          <a:p>
+            <a:r>
+              <a:rPr sz="1500">
+                <a:solidFill>
+                  <a:srgbClr val="E6E6E6"/>
+                </a:solidFill>
+                <a:latin typeface="Consolas"/>
+              </a:rPr>
+              <a:t>    temperature=0.0,      # 0 = focused; ~1.0 = creative</a:t>
+            </a:r>
+          </a:p>
+          <a:p>
+            <a:r>
+              <a:rPr sz="1500">
+                <a:solidFill>
+                  <a:srgbClr val="E6E6E6"/>
+                </a:solidFill>
+                <a:latin typeface="Consolas"/>
+              </a:rPr>
+              <a:t>    messages=[{"role": "user",</a:t>
+            </a:r>
+          </a:p>
+          <a:p>
+            <a:r>
+              <a:rPr sz="1500">
+                <a:solidFill>
+                  <a:srgbClr val="E6E6E6"/>
+                </a:solidFill>
+                <a:latin typeface="Consolas"/>
+              </a:rPr>
+              <a:t>               "content": "List 3 uses of LLMs."}],</a:t>
+            </a:r>
+          </a:p>
+          <a:p>
+            <a:r>
+              <a:rPr sz="1500">
+                <a:solidFill>
+                  <a:srgbClr val="E6E6E6"/>
+                </a:solidFill>
+                <a:latin typeface="Consolas"/>
+              </a:rPr>
+              <a:t>)</a:t>
+            </a:r>
+          </a:p>
+          <a:p>
+            <a:r>
+              <a:rPr sz="1500">
+                <a:solidFill>
+                  <a:srgbClr val="E6E6E6"/>
+                </a:solidFill>
+                <a:latin typeface="Consolas"/>
+              </a:rPr>
+              <a:t>print(msg.content[0].text)</a:t>
             </a:r>
           </a:p>
         </p:txBody>
@@ -7152,7 +7759,7 @@
                 </a:solidFill>
                 <a:latin typeface="Calibri"/>
               </a:rPr>
-              <a:t>Examples in the prompt teach the task + output format — no retraining. Foundation for Week 9.</a:t>
+              <a:t>temp=0 for extraction/code; temp~0.7–1.0 for brainstorming. top-p = nucleus sampling.</a:t>
             </a:r>
           </a:p>
         </p:txBody>
@@ -7222,7 +7829,7 @@
                 </a:solidFill>
                 <a:latin typeface="Calibri"/>
               </a:rPr>
-              <a:t>7/16</a:t>
+              <a:t>7/18</a:t>
             </a:r>
           </a:p>
         </p:txBody>
@@ -7371,21 +7978,96 @@
                 </a:solidFill>
                 <a:latin typeface="Calibri"/>
               </a:rPr>
-              <a:t>What LLMs Can &amp; Can't Do</a:t>
-            </a:r>
-          </a:p>
-        </p:txBody>
-      </p:sp>
-      <p:sp>
-        <p:nvSpPr>
-          <p:cNvPr id="5" name="TextBox 4"/>
+              <a:t>In-Context Learning (Few-Shot)</a:t>
+            </a:r>
+          </a:p>
+        </p:txBody>
+      </p:sp>
+      <p:sp>
+        <p:nvSpPr>
+          <p:cNvPr id="5" name="Rectangle 4"/>
+          <p:cNvSpPr/>
+          <p:nvPr/>
+        </p:nvSpPr>
+        <p:spPr>
+          <a:xfrm>
+            <a:off x="548640" y="1325880"/>
+            <a:ext cx="11064240" cy="4480560"/>
+          </a:xfrm>
+          <a:prstGeom prst="rect">
+            <a:avLst/>
+          </a:prstGeom>
+          <a:solidFill>
+            <a:srgbClr val="1E1E1E"/>
+          </a:solidFill>
+          <a:ln>
+            <a:noFill/>
+          </a:ln>
+          <a:effectLst/>
+        </p:spPr>
+        <p:style>
+          <a:lnRef idx="1">
+            <a:schemeClr val="accent1"/>
+          </a:lnRef>
+          <a:fillRef idx="3">
+            <a:schemeClr val="accent1"/>
+          </a:fillRef>
+          <a:effectRef idx="2">
+            <a:schemeClr val="accent1"/>
+          </a:effectRef>
+          <a:fontRef idx="minor">
+            <a:schemeClr val="lt1"/>
+          </a:fontRef>
+        </p:style>
+        <p:txBody>
+          <a:bodyPr rtlCol="0" anchor="ctr" wrap="square" lIns="182880" tIns="137160"/>
+          <a:lstStyle/>
+          <a:p>
+            <a:pPr algn="ctr"/>
+            <a:r>
+              <a:rPr sz="1500">
+                <a:solidFill>
+                  <a:srgbClr val="E6E6E6"/>
+                </a:solidFill>
+                <a:latin typeface="Consolas"/>
+              </a:rPr>
+              <a:t>Review: "Loved every minute." -&gt; positive</a:t>
+            </a:r>
+          </a:p>
+          <a:p>
+            <a:r>
+              <a:rPr sz="1500">
+                <a:solidFill>
+                  <a:srgbClr val="E6E6E6"/>
+                </a:solidFill>
+                <a:latin typeface="Consolas"/>
+              </a:rPr>
+              <a:t>Review: "A complete waste of time." -&gt; negative</a:t>
+            </a:r>
+          </a:p>
+          <a:p>
+            <a:r>
+              <a:rPr sz="1500">
+                <a:solidFill>
+                  <a:srgbClr val="E6E6E6"/>
+                </a:solidFill>
+                <a:latin typeface="Consolas"/>
+              </a:rPr>
+              <a:t>Review: "The acting saved a dull script." -&gt;</a:t>
+            </a:r>
+          </a:p>
+        </p:txBody>
+      </p:sp>
+      <p:sp>
+        <p:nvSpPr>
+          <p:cNvPr id="6" name="TextBox 5"/>
           <p:cNvSpPr txBox="1"/>
           <p:nvPr/>
         </p:nvSpPr>
         <p:spPr>
           <a:xfrm>
-            <a:off x="731520" y="1280160"/>
-            <a:ext cx="5120640" cy="548640"/>
+            <a:off x="548640" y="5897880"/>
+            <a:ext cx="10515600" cy="457200"/>
           </a:xfrm>
           <a:prstGeom prst="rect">
             <a:avLst/>
@@ -7400,27 +8082,27 @@
           <a:p>
             <a:pPr algn="l"/>
             <a:r>
-              <a:rPr sz="2000" b="1">
-                <a:solidFill>
-                  <a:srgbClr val="128C8C"/>
-                </a:solidFill>
-                <a:latin typeface="Calibri"/>
-              </a:rPr>
-              <a:t>Strengths</a:t>
-            </a:r>
-          </a:p>
-        </p:txBody>
-      </p:sp>
-      <p:sp>
-        <p:nvSpPr>
-          <p:cNvPr id="6" name="TextBox 5"/>
+              <a:rPr sz="1400" b="0">
+                <a:solidFill>
+                  <a:srgbClr val="6B7280"/>
+                </a:solidFill>
+                <a:latin typeface="Calibri"/>
+              </a:rPr>
+              <a:t>Examples in the prompt teach the task + output format — no retraining. Foundation for Week 9.</a:t>
+            </a:r>
+          </a:p>
+        </p:txBody>
+      </p:sp>
+      <p:sp>
+        <p:nvSpPr>
+          <p:cNvPr id="7" name="TextBox 6"/>
           <p:cNvSpPr txBox="1"/>
           <p:nvPr/>
         </p:nvSpPr>
         <p:spPr>
           <a:xfrm>
-            <a:off x="731520" y="1828800"/>
-            <a:ext cx="5120640" cy="4206240"/>
+            <a:off x="365760" y="6446520"/>
+            <a:ext cx="8229600" cy="365760"/>
           </a:xfrm>
           <a:prstGeom prst="rect">
             <a:avLst/>
@@ -7433,81 +8115,29 @@
           </a:bodyPr>
           <a:lstStyle/>
           <a:p>
-            <a:pPr>
-              <a:spcAft>
-                <a:spcPts val="800"/>
-              </a:spcAft>
-            </a:pPr>
-            <a:r>
-              <a:rPr sz="1800">
-                <a:solidFill>
-                  <a:srgbClr val="1A1A1A"/>
-                </a:solidFill>
-                <a:latin typeface="Calibri"/>
-              </a:rPr>
-              <a:t>• Summarize, draft, translate</a:t>
-            </a:r>
-          </a:p>
-          <a:p>
-            <a:pPr>
-              <a:spcAft>
-                <a:spcPts val="800"/>
-              </a:spcAft>
-            </a:pPr>
-            <a:r>
-              <a:rPr sz="1800">
-                <a:solidFill>
-                  <a:srgbClr val="1A1A1A"/>
-                </a:solidFill>
-                <a:latin typeface="Calibri"/>
-              </a:rPr>
-              <a:t>• Classify &amp; extract structure</a:t>
-            </a:r>
-          </a:p>
-          <a:p>
-            <a:pPr>
-              <a:spcAft>
-                <a:spcPts val="800"/>
-              </a:spcAft>
-            </a:pPr>
-            <a:r>
-              <a:rPr sz="1800">
-                <a:solidFill>
-                  <a:srgbClr val="1A1A1A"/>
-                </a:solidFill>
-                <a:latin typeface="Calibri"/>
-              </a:rPr>
-              <a:t>• Write &amp; refactor code</a:t>
-            </a:r>
-          </a:p>
-          <a:p>
-            <a:pPr>
-              <a:spcAft>
-                <a:spcPts val="800"/>
-              </a:spcAft>
-            </a:pPr>
-            <a:r>
-              <a:rPr sz="1800">
-                <a:solidFill>
-                  <a:srgbClr val="1A1A1A"/>
-                </a:solidFill>
-                <a:latin typeface="Calibri"/>
-              </a:rPr>
-              <a:t>• Flexible reasoning over text</a:t>
-            </a:r>
-          </a:p>
-        </p:txBody>
-      </p:sp>
-      <p:sp>
-        <p:nvSpPr>
-          <p:cNvPr id="7" name="TextBox 6"/>
+            <a:pPr algn="l"/>
+            <a:r>
+              <a:rPr sz="1000" b="0">
+                <a:solidFill>
+                  <a:srgbClr val="6B7280"/>
+                </a:solidFill>
+                <a:latin typeface="Calibri"/>
+              </a:rPr>
+              <a:t>Palomar College · CSCI 250 · Fall 2026</a:t>
+            </a:r>
+          </a:p>
+        </p:txBody>
+      </p:sp>
+      <p:sp>
+        <p:nvSpPr>
+          <p:cNvPr id="8" name="TextBox 7"/>
           <p:cNvSpPr txBox="1"/>
           <p:nvPr/>
         </p:nvSpPr>
         <p:spPr>
           <a:xfrm>
-            <a:off x="6309360" y="1280160"/>
-            <a:ext cx="5120640" cy="548640"/>
+            <a:off x="11155680" y="6446520"/>
+            <a:ext cx="822960" cy="365760"/>
           </a:xfrm>
           <a:prstGeom prst="rect">
             <a:avLst/>
@@ -7520,129 +8150,7 @@
           </a:bodyPr>
           <a:lstStyle/>
           <a:p>
-            <a:pPr algn="l"/>
-            <a:r>
-              <a:rPr sz="2000" b="1">
-                <a:solidFill>
-                  <a:srgbClr val="128C8C"/>
-                </a:solidFill>
-                <a:latin typeface="Calibri"/>
-              </a:rPr>
-              <a:t>Failure modes</a:t>
-            </a:r>
-          </a:p>
-        </p:txBody>
-      </p:sp>
-      <p:sp>
-        <p:nvSpPr>
-          <p:cNvPr id="8" name="TextBox 7"/>
-          <p:cNvSpPr txBox="1"/>
-          <p:nvPr/>
-        </p:nvSpPr>
-        <p:spPr>
-          <a:xfrm>
-            <a:off x="6309360" y="1828800"/>
-            <a:ext cx="5120640" cy="4206240"/>
-          </a:xfrm>
-          <a:prstGeom prst="rect">
-            <a:avLst/>
-          </a:prstGeom>
-          <a:noFill/>
-        </p:spPr>
-        <p:txBody>
-          <a:bodyPr wrap="square">
-            <a:spAutoFit/>
-          </a:bodyPr>
-          <a:lstStyle/>
-          <a:p>
-            <a:pPr>
-              <a:spcAft>
-                <a:spcPts val="800"/>
-              </a:spcAft>
-            </a:pPr>
-            <a:r>
-              <a:rPr sz="1800">
-                <a:solidFill>
-                  <a:srgbClr val="1A1A1A"/>
-                </a:solidFill>
-                <a:latin typeface="Calibri"/>
-              </a:rPr>
-              <a:t>• Hallucination (confident &amp; wrong)</a:t>
-            </a:r>
-          </a:p>
-          <a:p>
-            <a:pPr>
-              <a:spcAft>
-                <a:spcPts val="800"/>
-              </a:spcAft>
-            </a:pPr>
-            <a:r>
-              <a:rPr sz="1800">
-                <a:solidFill>
-                  <a:srgbClr val="1A1A1A"/>
-                </a:solidFill>
-                <a:latin typeface="Calibri"/>
-              </a:rPr>
-              <a:t>• Knowledge cutoff</a:t>
-            </a:r>
-          </a:p>
-          <a:p>
-            <a:pPr>
-              <a:spcAft>
-                <a:spcPts val="800"/>
-              </a:spcAft>
-            </a:pPr>
-            <a:r>
-              <a:rPr sz="1800">
-                <a:solidFill>
-                  <a:srgbClr val="1A1A1A"/>
-                </a:solidFill>
-                <a:latin typeface="Calibri"/>
-              </a:rPr>
-              <a:t>• Weak exact math / counting</a:t>
-            </a:r>
-          </a:p>
-          <a:p>
-            <a:pPr>
-              <a:spcAft>
-                <a:spcPts val="800"/>
-              </a:spcAft>
-            </a:pPr>
-            <a:r>
-              <a:rPr sz="1800">
-                <a:solidFill>
-                  <a:srgbClr val="1A1A1A"/>
-                </a:solidFill>
-                <a:latin typeface="Calibri"/>
-              </a:rPr>
-              <a:t>• Prompt sensitivity; bias</a:t>
-            </a:r>
-          </a:p>
-        </p:txBody>
-      </p:sp>
-      <p:sp>
-        <p:nvSpPr>
-          <p:cNvPr id="9" name="TextBox 8"/>
-          <p:cNvSpPr txBox="1"/>
-          <p:nvPr/>
-        </p:nvSpPr>
-        <p:spPr>
-          <a:xfrm>
-            <a:off x="365760" y="6446520"/>
-            <a:ext cx="8229600" cy="365760"/>
-          </a:xfrm>
-          <a:prstGeom prst="rect">
-            <a:avLst/>
-          </a:prstGeom>
-          <a:noFill/>
-        </p:spPr>
-        <p:txBody>
-          <a:bodyPr wrap="square">
-            <a:spAutoFit/>
-          </a:bodyPr>
-          <a:lstStyle/>
-          <a:p>
-            <a:pPr algn="l"/>
+            <a:pPr algn="r"/>
             <a:r>
               <a:rPr sz="1000" b="0">
                 <a:solidFill>
@@ -7650,42 +8158,7 @@
                 </a:solidFill>
                 <a:latin typeface="Calibri"/>
               </a:rPr>
-              <a:t>Palomar College · CSCI 250 · Fall 2026</a:t>
-            </a:r>
-          </a:p>
-        </p:txBody>
-      </p:sp>
-      <p:sp>
-        <p:nvSpPr>
-          <p:cNvPr id="10" name="TextBox 9"/>
-          <p:cNvSpPr txBox="1"/>
-          <p:nvPr/>
-        </p:nvSpPr>
-        <p:spPr>
-          <a:xfrm>
-            <a:off x="11155680" y="6446520"/>
-            <a:ext cx="822960" cy="365760"/>
-          </a:xfrm>
-          <a:prstGeom prst="rect">
-            <a:avLst/>
-          </a:prstGeom>
-          <a:noFill/>
-        </p:spPr>
-        <p:txBody>
-          <a:bodyPr wrap="square">
-            <a:spAutoFit/>
-          </a:bodyPr>
-          <a:lstStyle/>
-          <a:p>
-            <a:pPr algn="r"/>
-            <a:r>
-              <a:rPr sz="1000" b="0">
-                <a:solidFill>
-                  <a:srgbClr val="6B7280"/>
-                </a:solidFill>
-                <a:latin typeface="Calibri"/>
-              </a:rPr>
-              <a:t>8/16</a:t>
+              <a:t>8/18</a:t>
             </a:r>
           </a:p>
         </p:txBody>
@@ -7834,7 +8307,7 @@
                 </a:solidFill>
                 <a:latin typeface="Calibri"/>
               </a:rPr>
-              <a:t>Mitigating Hallucination</a:t>
+              <a:t>What LLMs Can &amp; Can't Do</a:t>
             </a:r>
           </a:p>
         </p:txBody>
@@ -7847,8 +8320,43 @@
         </p:nvSpPr>
         <p:spPr>
           <a:xfrm>
-            <a:off x="731520" y="1371600"/>
-            <a:ext cx="10698480" cy="4754880"/>
+            <a:off x="731520" y="1280160"/>
+            <a:ext cx="5120640" cy="548640"/>
+          </a:xfrm>
+          <a:prstGeom prst="rect">
+            <a:avLst/>
+          </a:prstGeom>
+          <a:noFill/>
+        </p:spPr>
+        <p:txBody>
+          <a:bodyPr wrap="square">
+            <a:spAutoFit/>
+          </a:bodyPr>
+          <a:lstStyle/>
+          <a:p>
+            <a:pPr algn="l"/>
+            <a:r>
+              <a:rPr sz="2000" b="1">
+                <a:solidFill>
+                  <a:srgbClr val="128C8C"/>
+                </a:solidFill>
+                <a:latin typeface="Calibri"/>
+              </a:rPr>
+              <a:t>Strengths</a:t>
+            </a:r>
+          </a:p>
+        </p:txBody>
+      </p:sp>
+      <p:sp>
+        <p:nvSpPr>
+          <p:cNvPr id="6" name="TextBox 5"/>
+          <p:cNvSpPr txBox="1"/>
+          <p:nvPr/>
+        </p:nvSpPr>
+        <p:spPr>
+          <a:xfrm>
+            <a:off x="731520" y="1828800"/>
+            <a:ext cx="5120640" cy="4206240"/>
           </a:xfrm>
           <a:prstGeom prst="rect">
             <a:avLst/>
@@ -7867,13 +8375,13 @@
               </a:spcAft>
             </a:pPr>
             <a:r>
-              <a:rPr sz="2000">
+              <a:rPr sz="1800">
                 <a:solidFill>
                   <a:srgbClr val="1A1A1A"/>
                 </a:solidFill>
                 <a:latin typeface="Calibri"/>
               </a:rPr>
-              <a:t>• Treat output as a confident DRAFT, not a source of truth</a:t>
+              <a:t>• Summarize, draft, translate</a:t>
             </a:r>
           </a:p>
           <a:p>
@@ -7883,13 +8391,13 @@
               </a:spcAft>
             </a:pPr>
             <a:r>
-              <a:rPr sz="2000">
+              <a:rPr sz="1800">
                 <a:solidFill>
                   <a:srgbClr val="1A1A1A"/>
                 </a:solidFill>
                 <a:latin typeface="Calibri"/>
               </a:rPr>
-              <a:t>• Ground answers in supplied context (RAG, Week 11)</a:t>
+              <a:t>• Classify &amp; extract structure</a:t>
             </a:r>
           </a:p>
           <a:p>
@@ -7899,13 +8407,13 @@
               </a:spcAft>
             </a:pPr>
             <a:r>
-              <a:rPr sz="2000">
+              <a:rPr sz="1800">
                 <a:solidFill>
                   <a:srgbClr val="1A1A1A"/>
                 </a:solidFill>
                 <a:latin typeface="Calibri"/>
               </a:rPr>
-              <a:t>• Ask for sources; set temperature=0 for factual tasks</a:t>
+              <a:t>• Write &amp; refactor code</a:t>
             </a:r>
           </a:p>
           <a:p>
@@ -7915,27 +8423,27 @@
               </a:spcAft>
             </a:pPr>
             <a:r>
-              <a:rPr sz="2000">
+              <a:rPr sz="1800">
                 <a:solidFill>
                   <a:srgbClr val="1A1A1A"/>
                 </a:solidFill>
                 <a:latin typeface="Calibri"/>
               </a:rPr>
-              <a:t>• Give the model tools (Week 13); verify anything important</a:t>
-            </a:r>
-          </a:p>
-        </p:txBody>
-      </p:sp>
-      <p:sp>
-        <p:nvSpPr>
-          <p:cNvPr id="6" name="TextBox 5"/>
+              <a:t>• Flexible reasoning over text</a:t>
+            </a:r>
+          </a:p>
+        </p:txBody>
+      </p:sp>
+      <p:sp>
+        <p:nvSpPr>
+          <p:cNvPr id="7" name="TextBox 6"/>
           <p:cNvSpPr txBox="1"/>
           <p:nvPr/>
         </p:nvSpPr>
         <p:spPr>
           <a:xfrm>
-            <a:off x="365760" y="6446520"/>
-            <a:ext cx="8229600" cy="365760"/>
+            <a:off x="6309360" y="1280160"/>
+            <a:ext cx="5120640" cy="548640"/>
           </a:xfrm>
           <a:prstGeom prst="rect">
             <a:avLst/>
@@ -7950,27 +8458,27 @@
           <a:p>
             <a:pPr algn="l"/>
             <a:r>
-              <a:rPr sz="1000" b="0">
-                <a:solidFill>
-                  <a:srgbClr val="6B7280"/>
-                </a:solidFill>
-                <a:latin typeface="Calibri"/>
-              </a:rPr>
-              <a:t>Palomar College · CSCI 250 · Fall 2026</a:t>
-            </a:r>
-          </a:p>
-        </p:txBody>
-      </p:sp>
-      <p:sp>
-        <p:nvSpPr>
-          <p:cNvPr id="7" name="TextBox 6"/>
+              <a:rPr sz="2000" b="1">
+                <a:solidFill>
+                  <a:srgbClr val="128C8C"/>
+                </a:solidFill>
+                <a:latin typeface="Calibri"/>
+              </a:rPr>
+              <a:t>Failure modes</a:t>
+            </a:r>
+          </a:p>
+        </p:txBody>
+      </p:sp>
+      <p:sp>
+        <p:nvSpPr>
+          <p:cNvPr id="8" name="TextBox 7"/>
           <p:cNvSpPr txBox="1"/>
           <p:nvPr/>
         </p:nvSpPr>
         <p:spPr>
           <a:xfrm>
-            <a:off x="11155680" y="6446520"/>
-            <a:ext cx="822960" cy="365760"/>
+            <a:off x="6309360" y="1828800"/>
+            <a:ext cx="5120640" cy="4206240"/>
           </a:xfrm>
           <a:prstGeom prst="rect">
             <a:avLst/>
@@ -7983,6 +8491,128 @@
           </a:bodyPr>
           <a:lstStyle/>
           <a:p>
+            <a:pPr>
+              <a:spcAft>
+                <a:spcPts val="800"/>
+              </a:spcAft>
+            </a:pPr>
+            <a:r>
+              <a:rPr sz="1800">
+                <a:solidFill>
+                  <a:srgbClr val="1A1A1A"/>
+                </a:solidFill>
+                <a:latin typeface="Calibri"/>
+              </a:rPr>
+              <a:t>• Hallucination (confident &amp; wrong)</a:t>
+            </a:r>
+          </a:p>
+          <a:p>
+            <a:pPr>
+              <a:spcAft>
+                <a:spcPts val="800"/>
+              </a:spcAft>
+            </a:pPr>
+            <a:r>
+              <a:rPr sz="1800">
+                <a:solidFill>
+                  <a:srgbClr val="1A1A1A"/>
+                </a:solidFill>
+                <a:latin typeface="Calibri"/>
+              </a:rPr>
+              <a:t>• Knowledge cutoff</a:t>
+            </a:r>
+          </a:p>
+          <a:p>
+            <a:pPr>
+              <a:spcAft>
+                <a:spcPts val="800"/>
+              </a:spcAft>
+            </a:pPr>
+            <a:r>
+              <a:rPr sz="1800">
+                <a:solidFill>
+                  <a:srgbClr val="1A1A1A"/>
+                </a:solidFill>
+                <a:latin typeface="Calibri"/>
+              </a:rPr>
+              <a:t>• Weak exact math / counting</a:t>
+            </a:r>
+          </a:p>
+          <a:p>
+            <a:pPr>
+              <a:spcAft>
+                <a:spcPts val="800"/>
+              </a:spcAft>
+            </a:pPr>
+            <a:r>
+              <a:rPr sz="1800">
+                <a:solidFill>
+                  <a:srgbClr val="1A1A1A"/>
+                </a:solidFill>
+                <a:latin typeface="Calibri"/>
+              </a:rPr>
+              <a:t>• Prompt sensitivity; bias</a:t>
+            </a:r>
+          </a:p>
+        </p:txBody>
+      </p:sp>
+      <p:sp>
+        <p:nvSpPr>
+          <p:cNvPr id="9" name="TextBox 8"/>
+          <p:cNvSpPr txBox="1"/>
+          <p:nvPr/>
+        </p:nvSpPr>
+        <p:spPr>
+          <a:xfrm>
+            <a:off x="365760" y="6446520"/>
+            <a:ext cx="8229600" cy="365760"/>
+          </a:xfrm>
+          <a:prstGeom prst="rect">
+            <a:avLst/>
+          </a:prstGeom>
+          <a:noFill/>
+        </p:spPr>
+        <p:txBody>
+          <a:bodyPr wrap="square">
+            <a:spAutoFit/>
+          </a:bodyPr>
+          <a:lstStyle/>
+          <a:p>
+            <a:pPr algn="l"/>
+            <a:r>
+              <a:rPr sz="1000" b="0">
+                <a:solidFill>
+                  <a:srgbClr val="6B7280"/>
+                </a:solidFill>
+                <a:latin typeface="Calibri"/>
+              </a:rPr>
+              <a:t>Palomar College · CSCI 250 · Fall 2026</a:t>
+            </a:r>
+          </a:p>
+        </p:txBody>
+      </p:sp>
+      <p:sp>
+        <p:nvSpPr>
+          <p:cNvPr id="10" name="TextBox 9"/>
+          <p:cNvSpPr txBox="1"/>
+          <p:nvPr/>
+        </p:nvSpPr>
+        <p:spPr>
+          <a:xfrm>
+            <a:off x="11155680" y="6446520"/>
+            <a:ext cx="822960" cy="365760"/>
+          </a:xfrm>
+          <a:prstGeom prst="rect">
+            <a:avLst/>
+          </a:prstGeom>
+          <a:noFill/>
+        </p:spPr>
+        <p:txBody>
+          <a:bodyPr wrap="square">
+            <a:spAutoFit/>
+          </a:bodyPr>
+          <a:lstStyle/>
+          <a:p>
             <a:pPr algn="r"/>
             <a:r>
               <a:rPr sz="1000" b="0">
@@ -7991,7 +8621,7 @@
                 </a:solidFill>
                 <a:latin typeface="Calibri"/>
               </a:rPr>
-              <a:t>9/16</a:t>
+              <a:t>9/18</a:t>
             </a:r>
           </a:p>
         </p:txBody>
